--- a/09_meetings/PETROS_Sales_Review_2026/ISZE_PETROS_Sales_Review_FY2027_ModeA_only.pptx
+++ b/09_meetings/PETROS_Sales_Review_2026/ISZE_PETROS_Sales_Review_FY2027_ModeA_only.pptx
@@ -24,7 +24,6 @@
     <p:sldId id="272" r:id="rId23"/>
     <p:sldId id="273" r:id="rId24"/>
     <p:sldId id="274" r:id="rId25"/>
-    <p:sldId id="275" r:id="rId26"/>
   </p:sldIdLst>
   <p:sldSz cx="12188952" cy="6858000" type="screen4x3"/>
   <p:notesSz cx="6858000" cy="9144000"/>
@@ -3454,7 +3453,7 @@
                 </a:solidFill>
                 <a:latin typeface="Calibri"/>
               </a:rPr>
-              <a:t>GPS</a:t>
+              <a:t>SERVICE-PARTS COVERAGE</a:t>
             </a:r>
           </a:p>
         </p:txBody>
@@ -3489,7 +3488,7 @@
                 </a:solidFill>
                 <a:latin typeface="Calibri"/>
               </a:rPr>
-              <a:t>GPS Capture: 46.3%</a:t>
+              <a:t>Service-parts coverage: brake rotor is the clear gap</a:t>
             </a:r>
           </a:p>
         </p:txBody>
@@ -3572,16 +3571,118 @@
           </a:p>
         </p:txBody>
       </p:sp>
-      <p:sp>
-        <p:nvSpPr>
-          <p:cNvPr id="8" name="TextBox 7"/>
+      <p:pic>
+        <p:nvPicPr>
+          <p:cNvPr id="8" name="Picture 7" descr="pms.png"/>
+          <p:cNvPicPr>
+            <a:picLocks noChangeAspect="1"/>
+          </p:cNvPicPr>
+          <p:nvPr/>
+        </p:nvPicPr>
+        <p:blipFill>
+          <a:blip r:embed="rId3"/>
+          <a:stretch>
+            <a:fillRect/>
+          </a:stretch>
+        </p:blipFill>
+        <p:spPr>
+          <a:xfrm>
+            <a:off x="292608" y="2050572"/>
+            <a:ext cx="7178040" cy="3168335"/>
+          </a:xfrm>
+          <a:prstGeom prst="rect">
+            <a:avLst/>
+          </a:prstGeom>
+        </p:spPr>
+      </p:pic>
+      <p:sp>
+        <p:nvSpPr>
+          <p:cNvPr id="9" name="Rectangle 8"/>
+          <p:cNvSpPr/>
+          <p:nvPr/>
+        </p:nvSpPr>
+        <p:spPr>
+          <a:xfrm>
+            <a:off x="7726679" y="1188720"/>
+            <a:ext cx="22000" cy="4892040"/>
+          </a:xfrm>
+          <a:prstGeom prst="rect">
+            <a:avLst/>
+          </a:prstGeom>
+          <a:solidFill>
+            <a:srgbClr val="ECECEC"/>
+          </a:solidFill>
+          <a:ln>
+            <a:noFill/>
+          </a:ln>
+        </p:spPr>
+        <p:style>
+          <a:lnRef idx="1">
+            <a:schemeClr val="accent1"/>
+          </a:lnRef>
+          <a:fillRef idx="3">
+            <a:schemeClr val="accent1"/>
+          </a:fillRef>
+          <a:effectRef idx="2">
+            <a:schemeClr val="accent1"/>
+          </a:effectRef>
+          <a:fontRef idx="minor">
+            <a:schemeClr val="lt1"/>
+          </a:fontRef>
+        </p:style>
+        <p:txBody>
+          <a:bodyPr rtlCol="0" anchor="ctr"/>
+          <a:lstStyle/>
+          <a:p>
+            <a:pPr algn="ctr"/>
+          </a:p>
+        </p:txBody>
+      </p:sp>
+      <p:sp>
+        <p:nvSpPr>
+          <p:cNvPr id="10" name="TextBox 9"/>
           <p:cNvSpPr txBox="1"/>
           <p:nvPr/>
         </p:nvSpPr>
         <p:spPr>
           <a:xfrm>
-            <a:off x="292608" y="1234440"/>
-            <a:ext cx="10515600" cy="3200400"/>
+            <a:off x="7927847" y="1234440"/>
+            <a:ext cx="3886200" cy="320040"/>
+          </a:xfrm>
+          <a:prstGeom prst="rect">
+            <a:avLst/>
+          </a:prstGeom>
+          <a:noFill/>
+        </p:spPr>
+        <p:txBody>
+          <a:bodyPr wrap="square">
+            <a:spAutoFit/>
+          </a:bodyPr>
+          <a:lstStyle/>
+          <a:p>
+            <a:pPr algn="l"/>
+            <a:r>
+              <a:rPr sz="1200" b="1">
+                <a:solidFill>
+                  <a:srgbClr val="CC0E1E"/>
+                </a:solidFill>
+                <a:latin typeface="Calibri"/>
+              </a:rPr>
+              <a:t>TAKEAWAYS</a:t>
+            </a:r>
+          </a:p>
+        </p:txBody>
+      </p:sp>
+      <p:sp>
+        <p:nvSpPr>
+          <p:cNvPr id="11" name="TextBox 10"/>
+          <p:cNvSpPr txBox="1"/>
+          <p:nvPr/>
+        </p:nvSpPr>
+        <p:spPr>
+          <a:xfrm>
+            <a:off x="7927847" y="1691640"/>
+            <a:ext cx="3794760" cy="4343400"/>
           </a:xfrm>
           <a:prstGeom prst="rect">
             <a:avLst/>
@@ -3603,7 +3704,7 @@
               </a:spcAft>
             </a:pPr>
             <a:r>
-              <a:rPr sz="1500" b="1">
+              <a:rPr sz="1250" b="1">
                 <a:solidFill>
                   <a:srgbClr val="CC0E1E"/>
                 </a:solidFill>
@@ -3612,13 +3713,13 @@
               <a:t>—  </a:t>
             </a:r>
             <a:r>
-              <a:rPr sz="1500">
+              <a:rPr sz="1250">
                 <a:solidFill>
                   <a:srgbClr val="1A1A1A"/>
                 </a:solidFill>
                 <a:latin typeface="Calibri"/>
               </a:rPr>
-              <a:t>GPS measures your actual parts purchases against the full potential of your fleet.</a:t>
+              <a:t>Brake rotor 36.4% against 54.9% for the rest of the network.</a:t>
             </a:r>
           </a:p>
           <a:p>
@@ -3631,7 +3732,7 @@
               </a:spcAft>
             </a:pPr>
             <a:r>
-              <a:rPr sz="1500" b="1">
+              <a:rPr sz="1250" b="1">
                 <a:solidFill>
                   <a:srgbClr val="CC0E1E"/>
                 </a:solidFill>
@@ -3640,13 +3741,13 @@
               <a:t>—  </a:t>
             </a:r>
             <a:r>
-              <a:rPr sz="1500">
+              <a:rPr sz="1250">
                 <a:solidFill>
                   <a:srgbClr val="1A1A1A"/>
                 </a:solidFill>
                 <a:latin typeface="Calibri"/>
               </a:rPr>
-              <a:t>Greece today: 46.3% (FY2026 purchases against the CY2025 fleet potential).</a:t>
+              <a:t>Brake pad 31.1% against 29.5% for the rest of the network.</a:t>
             </a:r>
           </a:p>
           <a:p>
@@ -3659,7 +3760,7 @@
               </a:spcAft>
             </a:pPr>
             <a:r>
-              <a:rPr sz="1500" b="1">
+              <a:rPr sz="1250" b="1">
                 <a:solidFill>
                   <a:srgbClr val="CC0E1E"/>
                 </a:solidFill>
@@ -3668,13 +3769,13 @@
               <a:t>—  </a:t>
             </a:r>
             <a:r>
-              <a:rPr sz="1500">
+              <a:rPr sz="1250">
                 <a:solidFill>
                   <a:srgbClr val="1A1A1A"/>
                 </a:solidFill>
                 <a:latin typeface="Calibri"/>
               </a:rPr>
-              <a:t>Fleet potential: EUR 954K on 3,742 vehicles.</a:t>
+              <a:t>Every market here is measured on the same fleet-and-interval model, so the comparison is like-for-like even where the underlying interval assumption is debatable.</a:t>
             </a:r>
           </a:p>
           <a:p>
@@ -3687,7 +3788,7 @@
               </a:spcAft>
             </a:pPr>
             <a:r>
-              <a:rPr sz="1500" b="1">
+              <a:rPr sz="1250" b="1">
                 <a:solidFill>
                   <a:srgbClr val="CC0E1E"/>
                 </a:solidFill>
@@ -3696,13 +3797,13 @@
               <a:t>—  </a:t>
             </a:r>
             <a:r>
-              <a:rPr sz="1500">
+              <a:rPr sz="1250">
                 <a:solidFill>
                   <a:srgbClr val="1A1A1A"/>
                 </a:solidFill>
                 <a:latin typeface="Calibri"/>
               </a:rPr>
-              <a:t>Real, sustained headroom above 46.3% — the service-parts and SPA discussion are both direct levers on it.</a:t>
+              <a:t>Worth agreeing which category we tackle first, and what the joint action is.</a:t>
             </a:r>
           </a:p>
         </p:txBody>
@@ -3830,7 +3931,7 @@
                 </a:solidFill>
                 <a:latin typeface="Calibri"/>
               </a:rPr>
-              <a:t>SERVICE-PARTS COVERAGE</a:t>
+              <a:t>IDS 2026 — DEALER STANDARD</a:t>
             </a:r>
           </a:p>
         </p:txBody>
@@ -3865,7 +3966,7 @@
                 </a:solidFill>
                 <a:latin typeface="Calibri"/>
               </a:rPr>
-              <a:t>Service-parts coverage: brake rotor is the clear gap</a:t>
+              <a:t>IDS 2026: Greece averages 73.9%, below the 79.4% network benchmark</a:t>
             </a:r>
           </a:p>
         </p:txBody>
@@ -3944,484 +4045,6 @@
                 <a:latin typeface="Calibri"/>
               </a:rPr>
               <a:t>11</a:t>
-            </a:r>
-          </a:p>
-        </p:txBody>
-      </p:sp>
-      <p:pic>
-        <p:nvPicPr>
-          <p:cNvPr id="8" name="Picture 7" descr="pms.png"/>
-          <p:cNvPicPr>
-            <a:picLocks noChangeAspect="1"/>
-          </p:cNvPicPr>
-          <p:nvPr/>
-        </p:nvPicPr>
-        <p:blipFill>
-          <a:blip r:embed="rId3"/>
-          <a:stretch>
-            <a:fillRect/>
-          </a:stretch>
-        </p:blipFill>
-        <p:spPr>
-          <a:xfrm>
-            <a:off x="292608" y="2050572"/>
-            <a:ext cx="7178040" cy="3168335"/>
-          </a:xfrm>
-          <a:prstGeom prst="rect">
-            <a:avLst/>
-          </a:prstGeom>
-        </p:spPr>
-      </p:pic>
-      <p:sp>
-        <p:nvSpPr>
-          <p:cNvPr id="9" name="Rectangle 8"/>
-          <p:cNvSpPr/>
-          <p:nvPr/>
-        </p:nvSpPr>
-        <p:spPr>
-          <a:xfrm>
-            <a:off x="7726679" y="1188720"/>
-            <a:ext cx="22000" cy="4892040"/>
-          </a:xfrm>
-          <a:prstGeom prst="rect">
-            <a:avLst/>
-          </a:prstGeom>
-          <a:solidFill>
-            <a:srgbClr val="ECECEC"/>
-          </a:solidFill>
-          <a:ln>
-            <a:noFill/>
-          </a:ln>
-        </p:spPr>
-        <p:style>
-          <a:lnRef idx="1">
-            <a:schemeClr val="accent1"/>
-          </a:lnRef>
-          <a:fillRef idx="3">
-            <a:schemeClr val="accent1"/>
-          </a:fillRef>
-          <a:effectRef idx="2">
-            <a:schemeClr val="accent1"/>
-          </a:effectRef>
-          <a:fontRef idx="minor">
-            <a:schemeClr val="lt1"/>
-          </a:fontRef>
-        </p:style>
-        <p:txBody>
-          <a:bodyPr rtlCol="0" anchor="ctr"/>
-          <a:lstStyle/>
-          <a:p>
-            <a:pPr algn="ctr"/>
-          </a:p>
-        </p:txBody>
-      </p:sp>
-      <p:sp>
-        <p:nvSpPr>
-          <p:cNvPr id="10" name="TextBox 9"/>
-          <p:cNvSpPr txBox="1"/>
-          <p:nvPr/>
-        </p:nvSpPr>
-        <p:spPr>
-          <a:xfrm>
-            <a:off x="7927847" y="1234440"/>
-            <a:ext cx="3886200" cy="320040"/>
-          </a:xfrm>
-          <a:prstGeom prst="rect">
-            <a:avLst/>
-          </a:prstGeom>
-          <a:noFill/>
-        </p:spPr>
-        <p:txBody>
-          <a:bodyPr wrap="square">
-            <a:spAutoFit/>
-          </a:bodyPr>
-          <a:lstStyle/>
-          <a:p>
-            <a:pPr algn="l"/>
-            <a:r>
-              <a:rPr sz="1200" b="1">
-                <a:solidFill>
-                  <a:srgbClr val="CC0E1E"/>
-                </a:solidFill>
-                <a:latin typeface="Calibri"/>
-              </a:rPr>
-              <a:t>TAKEAWAYS</a:t>
-            </a:r>
-          </a:p>
-        </p:txBody>
-      </p:sp>
-      <p:sp>
-        <p:nvSpPr>
-          <p:cNvPr id="11" name="TextBox 10"/>
-          <p:cNvSpPr txBox="1"/>
-          <p:nvPr/>
-        </p:nvSpPr>
-        <p:spPr>
-          <a:xfrm>
-            <a:off x="7927847" y="1691640"/>
-            <a:ext cx="3794760" cy="4343400"/>
-          </a:xfrm>
-          <a:prstGeom prst="rect">
-            <a:avLst/>
-          </a:prstGeom>
-          <a:noFill/>
-        </p:spPr>
-        <p:txBody>
-          <a:bodyPr wrap="square">
-            <a:spAutoFit/>
-          </a:bodyPr>
-          <a:lstStyle/>
-          <a:p>
-            <a:pPr>
-              <a:lnSpc>
-                <a:spcPct val="125000"/>
-              </a:lnSpc>
-              <a:spcAft>
-                <a:spcPts val="1000"/>
-              </a:spcAft>
-            </a:pPr>
-            <a:r>
-              <a:rPr sz="1250" b="1">
-                <a:solidFill>
-                  <a:srgbClr val="CC0E1E"/>
-                </a:solidFill>
-                <a:latin typeface="Calibri"/>
-              </a:rPr>
-              <a:t>—  </a:t>
-            </a:r>
-            <a:r>
-              <a:rPr sz="1250">
-                <a:solidFill>
-                  <a:srgbClr val="1A1A1A"/>
-                </a:solidFill>
-                <a:latin typeface="Calibri"/>
-              </a:rPr>
-              <a:t>Brake rotor 36.4% against 54.9% for the rest of the network.</a:t>
-            </a:r>
-          </a:p>
-          <a:p>
-            <a:pPr>
-              <a:lnSpc>
-                <a:spcPct val="125000"/>
-              </a:lnSpc>
-              <a:spcAft>
-                <a:spcPts val="1000"/>
-              </a:spcAft>
-            </a:pPr>
-            <a:r>
-              <a:rPr sz="1250" b="1">
-                <a:solidFill>
-                  <a:srgbClr val="CC0E1E"/>
-                </a:solidFill>
-                <a:latin typeface="Calibri"/>
-              </a:rPr>
-              <a:t>—  </a:t>
-            </a:r>
-            <a:r>
-              <a:rPr sz="1250">
-                <a:solidFill>
-                  <a:srgbClr val="1A1A1A"/>
-                </a:solidFill>
-                <a:latin typeface="Calibri"/>
-              </a:rPr>
-              <a:t>Brake pad 31.1% against 29.5% for the rest of the network.</a:t>
-            </a:r>
-          </a:p>
-          <a:p>
-            <a:pPr>
-              <a:lnSpc>
-                <a:spcPct val="125000"/>
-              </a:lnSpc>
-              <a:spcAft>
-                <a:spcPts val="1000"/>
-              </a:spcAft>
-            </a:pPr>
-            <a:r>
-              <a:rPr sz="1250" b="1">
-                <a:solidFill>
-                  <a:srgbClr val="CC0E1E"/>
-                </a:solidFill>
-                <a:latin typeface="Calibri"/>
-              </a:rPr>
-              <a:t>—  </a:t>
-            </a:r>
-            <a:r>
-              <a:rPr sz="1250">
-                <a:solidFill>
-                  <a:srgbClr val="1A1A1A"/>
-                </a:solidFill>
-                <a:latin typeface="Calibri"/>
-              </a:rPr>
-              <a:t>Every market here is measured on the same fleet-and-interval model, so the comparison is like-for-like even where the underlying interval assumption is debatable.</a:t>
-            </a:r>
-          </a:p>
-          <a:p>
-            <a:pPr>
-              <a:lnSpc>
-                <a:spcPct val="125000"/>
-              </a:lnSpc>
-              <a:spcAft>
-                <a:spcPts val="1000"/>
-              </a:spcAft>
-            </a:pPr>
-            <a:r>
-              <a:rPr sz="1250" b="1">
-                <a:solidFill>
-                  <a:srgbClr val="CC0E1E"/>
-                </a:solidFill>
-                <a:latin typeface="Calibri"/>
-              </a:rPr>
-              <a:t>—  </a:t>
-            </a:r>
-            <a:r>
-              <a:rPr sz="1250">
-                <a:solidFill>
-                  <a:srgbClr val="1A1A1A"/>
-                </a:solidFill>
-                <a:latin typeface="Calibri"/>
-              </a:rPr>
-              <a:t>Worth agreeing which category we tackle first, and what the joint action is.</a:t>
-            </a:r>
-          </a:p>
-        </p:txBody>
-      </p:sp>
-    </p:spTree>
-  </p:cSld>
-  <p:clrMapOvr>
-    <a:masterClrMapping/>
-  </p:clrMapOvr>
-</p:sld>
-</file>
-
-<file path=ppt/slides/slide12.xml><?xml version="1.0" encoding="utf-8"?>
-<p:sld xmlns:a="http://schemas.openxmlformats.org/drawingml/2006/main" xmlns:p="http://schemas.openxmlformats.org/presentationml/2006/main" xmlns:r="http://schemas.openxmlformats.org/officeDocument/2006/relationships">
-  <p:cSld>
-    <p:bg>
-      <p:bgPr>
-        <a:solidFill>
-          <a:srgbClr val="FFFFFF"/>
-        </a:solidFill>
-        <a:effectLst/>
-      </p:bgPr>
-    </p:bg>
-    <p:spTree>
-      <p:nvGrpSpPr>
-        <p:cNvPr id="1" name=""/>
-        <p:cNvGrpSpPr/>
-        <p:nvPr/>
-      </p:nvGrpSpPr>
-      <p:grpSpPr/>
-      <p:pic>
-        <p:nvPicPr>
-          <p:cNvPr id="2" name="Picture 1" descr="isuzu_logo_red.png"/>
-          <p:cNvPicPr>
-            <a:picLocks noChangeAspect="1"/>
-          </p:cNvPicPr>
-          <p:nvPr/>
-        </p:nvPicPr>
-        <p:blipFill>
-          <a:blip r:embed="rId2"/>
-          <a:stretch>
-            <a:fillRect/>
-          </a:stretch>
-        </p:blipFill>
-        <p:spPr>
-          <a:xfrm>
-            <a:off x="256032" y="6263640"/>
-            <a:ext cx="1679787" cy="292608"/>
-          </a:xfrm>
-          <a:prstGeom prst="rect">
-            <a:avLst/>
-          </a:prstGeom>
-        </p:spPr>
-      </p:pic>
-      <p:sp>
-        <p:nvSpPr>
-          <p:cNvPr id="3" name="Rectangle 2"/>
-          <p:cNvSpPr/>
-          <p:nvPr/>
-        </p:nvSpPr>
-        <p:spPr>
-          <a:xfrm>
-            <a:off x="0" y="6766560"/>
-            <a:ext cx="12188952" cy="91440"/>
-          </a:xfrm>
-          <a:prstGeom prst="rect">
-            <a:avLst/>
-          </a:prstGeom>
-          <a:solidFill>
-            <a:srgbClr val="CC0E1E"/>
-          </a:solidFill>
-          <a:ln>
-            <a:noFill/>
-          </a:ln>
-        </p:spPr>
-        <p:style>
-          <a:lnRef idx="1">
-            <a:schemeClr val="accent1"/>
-          </a:lnRef>
-          <a:fillRef idx="3">
-            <a:schemeClr val="accent1"/>
-          </a:fillRef>
-          <a:effectRef idx="2">
-            <a:schemeClr val="accent1"/>
-          </a:effectRef>
-          <a:fontRef idx="minor">
-            <a:schemeClr val="lt1"/>
-          </a:fontRef>
-        </p:style>
-        <p:txBody>
-          <a:bodyPr rtlCol="0" anchor="ctr"/>
-          <a:lstStyle/>
-          <a:p>
-            <a:pPr algn="ctr"/>
-          </a:p>
-        </p:txBody>
-      </p:sp>
-      <p:sp>
-        <p:nvSpPr>
-          <p:cNvPr id="4" name="TextBox 3"/>
-          <p:cNvSpPr txBox="1"/>
-          <p:nvPr/>
-        </p:nvSpPr>
-        <p:spPr>
-          <a:xfrm>
-            <a:off x="292608" y="201168"/>
-            <a:ext cx="11430000" cy="274320"/>
-          </a:xfrm>
-          <a:prstGeom prst="rect">
-            <a:avLst/>
-          </a:prstGeom>
-          <a:noFill/>
-        </p:spPr>
-        <p:txBody>
-          <a:bodyPr wrap="square">
-            <a:spAutoFit/>
-          </a:bodyPr>
-          <a:lstStyle/>
-          <a:p>
-            <a:pPr algn="l"/>
-            <a:r>
-              <a:rPr sz="1100" b="1">
-                <a:solidFill>
-                  <a:srgbClr val="CC0E1E"/>
-                </a:solidFill>
-                <a:latin typeface="Calibri"/>
-              </a:rPr>
-              <a:t>IDS 2026 — DEALER STANDARD</a:t>
-            </a:r>
-          </a:p>
-        </p:txBody>
-      </p:sp>
-      <p:sp>
-        <p:nvSpPr>
-          <p:cNvPr id="5" name="TextBox 4"/>
-          <p:cNvSpPr txBox="1"/>
-          <p:nvPr/>
-        </p:nvSpPr>
-        <p:spPr>
-          <a:xfrm>
-            <a:off x="292608" y="475488"/>
-            <a:ext cx="11612880" cy="566928"/>
-          </a:xfrm>
-          <a:prstGeom prst="rect">
-            <a:avLst/>
-          </a:prstGeom>
-          <a:noFill/>
-        </p:spPr>
-        <p:txBody>
-          <a:bodyPr wrap="square">
-            <a:spAutoFit/>
-          </a:bodyPr>
-          <a:lstStyle/>
-          <a:p>
-            <a:pPr algn="l"/>
-            <a:r>
-              <a:rPr sz="2500" b="1">
-                <a:solidFill>
-                  <a:srgbClr val="1A1A1A"/>
-                </a:solidFill>
-                <a:latin typeface="Calibri"/>
-              </a:rPr>
-              <a:t>IDS 2026: Greece averages 73.9%, below the 74.8% network benchmark</a:t>
-            </a:r>
-          </a:p>
-        </p:txBody>
-      </p:sp>
-      <p:sp>
-        <p:nvSpPr>
-          <p:cNvPr id="6" name="Rectangle 5"/>
-          <p:cNvSpPr/>
-          <p:nvPr/>
-        </p:nvSpPr>
-        <p:spPr>
-          <a:xfrm>
-            <a:off x="292608" y="1005840"/>
-            <a:ext cx="11612880" cy="28000"/>
-          </a:xfrm>
-          <a:prstGeom prst="rect">
-            <a:avLst/>
-          </a:prstGeom>
-          <a:solidFill>
-            <a:srgbClr val="CC0E1E"/>
-          </a:solidFill>
-          <a:ln>
-            <a:noFill/>
-          </a:ln>
-        </p:spPr>
-        <p:style>
-          <a:lnRef idx="1">
-            <a:schemeClr val="accent1"/>
-          </a:lnRef>
-          <a:fillRef idx="3">
-            <a:schemeClr val="accent1"/>
-          </a:fillRef>
-          <a:effectRef idx="2">
-            <a:schemeClr val="accent1"/>
-          </a:effectRef>
-          <a:fontRef idx="minor">
-            <a:schemeClr val="lt1"/>
-          </a:fontRef>
-        </p:style>
-        <p:txBody>
-          <a:bodyPr rtlCol="0" anchor="ctr"/>
-          <a:lstStyle/>
-          <a:p>
-            <a:pPr algn="ctr"/>
-          </a:p>
-        </p:txBody>
-      </p:sp>
-      <p:sp>
-        <p:nvSpPr>
-          <p:cNvPr id="7" name="TextBox 6"/>
-          <p:cNvSpPr txBox="1"/>
-          <p:nvPr/>
-        </p:nvSpPr>
-        <p:spPr>
-          <a:xfrm>
-            <a:off x="11594592" y="6473952"/>
-            <a:ext cx="365760" cy="274320"/>
-          </a:xfrm>
-          <a:prstGeom prst="rect">
-            <a:avLst/>
-          </a:prstGeom>
-          <a:noFill/>
-        </p:spPr>
-        <p:txBody>
-          <a:bodyPr wrap="square">
-            <a:spAutoFit/>
-          </a:bodyPr>
-          <a:lstStyle/>
-          <a:p>
-            <a:pPr algn="r"/>
-            <a:r>
-              <a:rPr sz="1000" b="0">
-                <a:solidFill>
-                  <a:srgbClr val="5A5A5A"/>
-                </a:solidFill>
-                <a:latin typeface="Calibri"/>
-              </a:rPr>
-              <a:t>12</a:t>
             </a:r>
           </a:p>
         </p:txBody>
@@ -4841,7 +4464,7 @@
                           </a:solidFill>
                           <a:latin typeface="Calibri"/>
                         </a:rPr>
-                        <a:t>74.8%</a:t>
+                        <a:t>79.4%</a:t>
                       </a:r>
                     </a:p>
                   </a:txBody>
@@ -5166,7 +4789,7 @@
                 </a:solidFill>
                 <a:latin typeface="Calibri"/>
               </a:rPr>
-              <a:t>The country average sits 0.9 points below the network.</a:t>
+              <a:t>The country average sits 5.5 points below the network — both averages are taken on assessed dealers only.</a:t>
             </a:r>
           </a:p>
           <a:p>
@@ -5194,7 +4817,7 @@
                 </a:solidFill>
                 <a:latin typeface="Calibri"/>
               </a:rPr>
-              <a:t>The spread is the point: 35 points between the strongest and weakest dealer.</a:t>
+              <a:t>The spread is the point: 35 points between the strongest and weakest assessed dealer.</a:t>
             </a:r>
           </a:p>
           <a:p>
@@ -5223,6 +4846,512 @@
                 <a:latin typeface="Calibri"/>
               </a:rPr>
               <a:t>Dealer-by-dealer detail and individual feedback are available as a separate pack — worth agreeing which dealers to visit, and when.</a:t>
+            </a:r>
+          </a:p>
+        </p:txBody>
+      </p:sp>
+    </p:spTree>
+  </p:cSld>
+  <p:clrMapOvr>
+    <a:masterClrMapping/>
+  </p:clrMapOvr>
+</p:sld>
+</file>
+
+<file path=ppt/slides/slide12.xml><?xml version="1.0" encoding="utf-8"?>
+<p:sld xmlns:a="http://schemas.openxmlformats.org/drawingml/2006/main" xmlns:p="http://schemas.openxmlformats.org/presentationml/2006/main" xmlns:r="http://schemas.openxmlformats.org/officeDocument/2006/relationships">
+  <p:cSld>
+    <p:bg>
+      <p:bgPr>
+        <a:solidFill>
+          <a:srgbClr val="FFFFFF"/>
+        </a:solidFill>
+        <a:effectLst/>
+      </p:bgPr>
+    </p:bg>
+    <p:spTree>
+      <p:nvGrpSpPr>
+        <p:cNvPr id="1" name=""/>
+        <p:cNvGrpSpPr/>
+        <p:nvPr/>
+      </p:nvGrpSpPr>
+      <p:grpSpPr/>
+      <p:pic>
+        <p:nvPicPr>
+          <p:cNvPr id="2" name="Picture 1" descr="isuzu_logo_red.png"/>
+          <p:cNvPicPr>
+            <a:picLocks noChangeAspect="1"/>
+          </p:cNvPicPr>
+          <p:nvPr/>
+        </p:nvPicPr>
+        <p:blipFill>
+          <a:blip r:embed="rId2"/>
+          <a:stretch>
+            <a:fillRect/>
+          </a:stretch>
+        </p:blipFill>
+        <p:spPr>
+          <a:xfrm>
+            <a:off x="256032" y="6263640"/>
+            <a:ext cx="1679787" cy="292608"/>
+          </a:xfrm>
+          <a:prstGeom prst="rect">
+            <a:avLst/>
+          </a:prstGeom>
+        </p:spPr>
+      </p:pic>
+      <p:sp>
+        <p:nvSpPr>
+          <p:cNvPr id="3" name="Rectangle 2"/>
+          <p:cNvSpPr/>
+          <p:nvPr/>
+        </p:nvSpPr>
+        <p:spPr>
+          <a:xfrm>
+            <a:off x="0" y="6766560"/>
+            <a:ext cx="12188952" cy="91440"/>
+          </a:xfrm>
+          <a:prstGeom prst="rect">
+            <a:avLst/>
+          </a:prstGeom>
+          <a:solidFill>
+            <a:srgbClr val="CC0E1E"/>
+          </a:solidFill>
+          <a:ln>
+            <a:noFill/>
+          </a:ln>
+        </p:spPr>
+        <p:style>
+          <a:lnRef idx="1">
+            <a:schemeClr val="accent1"/>
+          </a:lnRef>
+          <a:fillRef idx="3">
+            <a:schemeClr val="accent1"/>
+          </a:fillRef>
+          <a:effectRef idx="2">
+            <a:schemeClr val="accent1"/>
+          </a:effectRef>
+          <a:fontRef idx="minor">
+            <a:schemeClr val="lt1"/>
+          </a:fontRef>
+        </p:style>
+        <p:txBody>
+          <a:bodyPr rtlCol="0" anchor="ctr"/>
+          <a:lstStyle/>
+          <a:p>
+            <a:pPr algn="ctr"/>
+          </a:p>
+        </p:txBody>
+      </p:sp>
+      <p:sp>
+        <p:nvSpPr>
+          <p:cNvPr id="4" name="TextBox 3"/>
+          <p:cNvSpPr txBox="1"/>
+          <p:nvPr/>
+        </p:nvSpPr>
+        <p:spPr>
+          <a:xfrm>
+            <a:off x="292608" y="201168"/>
+            <a:ext cx="11430000" cy="274320"/>
+          </a:xfrm>
+          <a:prstGeom prst="rect">
+            <a:avLst/>
+          </a:prstGeom>
+          <a:noFill/>
+        </p:spPr>
+        <p:txBody>
+          <a:bodyPr wrap="square">
+            <a:spAutoFit/>
+          </a:bodyPr>
+          <a:lstStyle/>
+          <a:p>
+            <a:pPr algn="l"/>
+            <a:r>
+              <a:rPr sz="1100" b="1">
+                <a:solidFill>
+                  <a:srgbClr val="CC0E1E"/>
+                </a:solidFill>
+                <a:latin typeface="Calibri"/>
+              </a:rPr>
+              <a:t>FLEET &amp; FY2027 TARGET</a:t>
+            </a:r>
+          </a:p>
+        </p:txBody>
+      </p:sp>
+      <p:sp>
+        <p:nvSpPr>
+          <p:cNvPr id="5" name="TextBox 4"/>
+          <p:cNvSpPr txBox="1"/>
+          <p:nvPr/>
+        </p:nvSpPr>
+        <p:spPr>
+          <a:xfrm>
+            <a:off x="292608" y="475488"/>
+            <a:ext cx="11612880" cy="566928"/>
+          </a:xfrm>
+          <a:prstGeom prst="rect">
+            <a:avLst/>
+          </a:prstGeom>
+          <a:noFill/>
+        </p:spPr>
+        <p:txBody>
+          <a:bodyPr wrap="square">
+            <a:spAutoFit/>
+          </a:bodyPr>
+          <a:lstStyle/>
+          <a:p>
+            <a:pPr algn="l"/>
+            <a:r>
+              <a:rPr sz="2500" b="1">
+                <a:solidFill>
+                  <a:srgbClr val="1A1A1A"/>
+                </a:solidFill>
+                <a:latin typeface="Calibri"/>
+              </a:rPr>
+              <a:t>The fleet is expected to grow in 2026</a:t>
+            </a:r>
+          </a:p>
+        </p:txBody>
+      </p:sp>
+      <p:sp>
+        <p:nvSpPr>
+          <p:cNvPr id="6" name="Rectangle 5"/>
+          <p:cNvSpPr/>
+          <p:nvPr/>
+        </p:nvSpPr>
+        <p:spPr>
+          <a:xfrm>
+            <a:off x="292608" y="1005840"/>
+            <a:ext cx="11612880" cy="28000"/>
+          </a:xfrm>
+          <a:prstGeom prst="rect">
+            <a:avLst/>
+          </a:prstGeom>
+          <a:solidFill>
+            <a:srgbClr val="CC0E1E"/>
+          </a:solidFill>
+          <a:ln>
+            <a:noFill/>
+          </a:ln>
+        </p:spPr>
+        <p:style>
+          <a:lnRef idx="1">
+            <a:schemeClr val="accent1"/>
+          </a:lnRef>
+          <a:fillRef idx="3">
+            <a:schemeClr val="accent1"/>
+          </a:fillRef>
+          <a:effectRef idx="2">
+            <a:schemeClr val="accent1"/>
+          </a:effectRef>
+          <a:fontRef idx="minor">
+            <a:schemeClr val="lt1"/>
+          </a:fontRef>
+        </p:style>
+        <p:txBody>
+          <a:bodyPr rtlCol="0" anchor="ctr"/>
+          <a:lstStyle/>
+          <a:p>
+            <a:pPr algn="ctr"/>
+          </a:p>
+        </p:txBody>
+      </p:sp>
+      <p:sp>
+        <p:nvSpPr>
+          <p:cNvPr id="7" name="TextBox 6"/>
+          <p:cNvSpPr txBox="1"/>
+          <p:nvPr/>
+        </p:nvSpPr>
+        <p:spPr>
+          <a:xfrm>
+            <a:off x="11594592" y="6473952"/>
+            <a:ext cx="365760" cy="274320"/>
+          </a:xfrm>
+          <a:prstGeom prst="rect">
+            <a:avLst/>
+          </a:prstGeom>
+          <a:noFill/>
+        </p:spPr>
+        <p:txBody>
+          <a:bodyPr wrap="square">
+            <a:spAutoFit/>
+          </a:bodyPr>
+          <a:lstStyle/>
+          <a:p>
+            <a:pPr algn="r"/>
+            <a:r>
+              <a:rPr sz="1000" b="0">
+                <a:solidFill>
+                  <a:srgbClr val="5A5A5A"/>
+                </a:solidFill>
+                <a:latin typeface="Calibri"/>
+              </a:rPr>
+              <a:t>12</a:t>
+            </a:r>
+          </a:p>
+        </p:txBody>
+      </p:sp>
+      <p:pic>
+        <p:nvPicPr>
+          <p:cNvPr id="8" name="Picture 7" descr="uio.png"/>
+          <p:cNvPicPr>
+            <a:picLocks noChangeAspect="1"/>
+          </p:cNvPicPr>
+          <p:nvPr/>
+        </p:nvPicPr>
+        <p:blipFill>
+          <a:blip r:embed="rId3"/>
+          <a:stretch>
+            <a:fillRect/>
+          </a:stretch>
+        </p:blipFill>
+        <p:spPr>
+          <a:xfrm>
+            <a:off x="292608" y="2120980"/>
+            <a:ext cx="7178040" cy="3027520"/>
+          </a:xfrm>
+          <a:prstGeom prst="rect">
+            <a:avLst/>
+          </a:prstGeom>
+        </p:spPr>
+      </p:pic>
+      <p:sp>
+        <p:nvSpPr>
+          <p:cNvPr id="9" name="Rectangle 8"/>
+          <p:cNvSpPr/>
+          <p:nvPr/>
+        </p:nvSpPr>
+        <p:spPr>
+          <a:xfrm>
+            <a:off x="7726679" y="1188720"/>
+            <a:ext cx="22000" cy="4892040"/>
+          </a:xfrm>
+          <a:prstGeom prst="rect">
+            <a:avLst/>
+          </a:prstGeom>
+          <a:solidFill>
+            <a:srgbClr val="ECECEC"/>
+          </a:solidFill>
+          <a:ln>
+            <a:noFill/>
+          </a:ln>
+        </p:spPr>
+        <p:style>
+          <a:lnRef idx="1">
+            <a:schemeClr val="accent1"/>
+          </a:lnRef>
+          <a:fillRef idx="3">
+            <a:schemeClr val="accent1"/>
+          </a:fillRef>
+          <a:effectRef idx="2">
+            <a:schemeClr val="accent1"/>
+          </a:effectRef>
+          <a:fontRef idx="minor">
+            <a:schemeClr val="lt1"/>
+          </a:fontRef>
+        </p:style>
+        <p:txBody>
+          <a:bodyPr rtlCol="0" anchor="ctr"/>
+          <a:lstStyle/>
+          <a:p>
+            <a:pPr algn="ctr"/>
+          </a:p>
+        </p:txBody>
+      </p:sp>
+      <p:sp>
+        <p:nvSpPr>
+          <p:cNvPr id="10" name="TextBox 9"/>
+          <p:cNvSpPr txBox="1"/>
+          <p:nvPr/>
+        </p:nvSpPr>
+        <p:spPr>
+          <a:xfrm>
+            <a:off x="7927847" y="1234440"/>
+            <a:ext cx="3886200" cy="320040"/>
+          </a:xfrm>
+          <a:prstGeom prst="rect">
+            <a:avLst/>
+          </a:prstGeom>
+          <a:noFill/>
+        </p:spPr>
+        <p:txBody>
+          <a:bodyPr wrap="square">
+            <a:spAutoFit/>
+          </a:bodyPr>
+          <a:lstStyle/>
+          <a:p>
+            <a:pPr algn="l"/>
+            <a:r>
+              <a:rPr sz="1200" b="1">
+                <a:solidFill>
+                  <a:srgbClr val="CC0E1E"/>
+                </a:solidFill>
+                <a:latin typeface="Calibri"/>
+              </a:rPr>
+              <a:t>WHAT THIS MEANS FOR FY2027</a:t>
+            </a:r>
+          </a:p>
+        </p:txBody>
+      </p:sp>
+      <p:sp>
+        <p:nvSpPr>
+          <p:cNvPr id="11" name="TextBox 10"/>
+          <p:cNvSpPr txBox="1"/>
+          <p:nvPr/>
+        </p:nvSpPr>
+        <p:spPr>
+          <a:xfrm>
+            <a:off x="7927847" y="1691640"/>
+            <a:ext cx="3794760" cy="4343400"/>
+          </a:xfrm>
+          <a:prstGeom prst="rect">
+            <a:avLst/>
+          </a:prstGeom>
+          <a:noFill/>
+        </p:spPr>
+        <p:txBody>
+          <a:bodyPr wrap="square">
+            <a:spAutoFit/>
+          </a:bodyPr>
+          <a:lstStyle/>
+          <a:p>
+            <a:pPr>
+              <a:lnSpc>
+                <a:spcPct val="125000"/>
+              </a:lnSpc>
+              <a:spcAft>
+                <a:spcPts val="1000"/>
+              </a:spcAft>
+            </a:pPr>
+            <a:r>
+              <a:rPr sz="1250" b="1">
+                <a:solidFill>
+                  <a:srgbClr val="CC0E1E"/>
+                </a:solidFill>
+                <a:latin typeface="Calibri"/>
+              </a:rPr>
+              <a:t>—  </a:t>
+            </a:r>
+            <a:r>
+              <a:rPr sz="1250">
+                <a:solidFill>
+                  <a:srgbClr val="1A1A1A"/>
+                </a:solidFill>
+                <a:latin typeface="Calibri"/>
+              </a:rPr>
+              <a:t>Fleet size (calendar year): 3,742 vehicles in 2025 → 3,932 working estimate for end-2026 (+5.1%).</a:t>
+            </a:r>
+          </a:p>
+          <a:p>
+            <a:pPr>
+              <a:lnSpc>
+                <a:spcPct val="125000"/>
+              </a:lnSpc>
+              <a:spcAft>
+                <a:spcPts val="1000"/>
+              </a:spcAft>
+            </a:pPr>
+            <a:r>
+              <a:rPr sz="1250" b="1">
+                <a:solidFill>
+                  <a:srgbClr val="CC0E1E"/>
+                </a:solidFill>
+                <a:latin typeface="Calibri"/>
+              </a:rPr>
+              <a:t>—  </a:t>
+            </a:r>
+            <a:r>
+              <a:rPr sz="1250">
+                <a:solidFill>
+                  <a:srgbClr val="1A1A1A"/>
+                </a:solidFill>
+                <a:latin typeface="Calibri"/>
+              </a:rPr>
+              <a:t>The chart is calendar years 2019–2026 only. 2026 is a working year-end estimate, not a fiscal-year figure.</a:t>
+            </a:r>
+          </a:p>
+          <a:p>
+            <a:pPr>
+              <a:lnSpc>
+                <a:spcPct val="125000"/>
+              </a:lnSpc>
+              <a:spcAft>
+                <a:spcPts val="1000"/>
+              </a:spcAft>
+            </a:pPr>
+            <a:r>
+              <a:rPr sz="1250" b="1">
+                <a:solidFill>
+                  <a:srgbClr val="CC0E1E"/>
+                </a:solidFill>
+                <a:latin typeface="Calibri"/>
+              </a:rPr>
+              <a:t>—  </a:t>
+            </a:r>
+            <a:r>
+              <a:rPr sz="1250">
+                <a:solidFill>
+                  <a:srgbClr val="1A1A1A"/>
+                </a:solidFill>
+                <a:latin typeface="Calibri"/>
+              </a:rPr>
+              <a:t>End-2026 mix: LCV / D-Max 3,879; CV — LD 53.</a:t>
+            </a:r>
+          </a:p>
+          <a:p>
+            <a:pPr>
+              <a:lnSpc>
+                <a:spcPct val="125000"/>
+              </a:lnSpc>
+              <a:spcAft>
+                <a:spcPts val="1000"/>
+              </a:spcAft>
+            </a:pPr>
+            <a:r>
+              <a:rPr sz="1250" b="1">
+                <a:solidFill>
+                  <a:srgbClr val="CC0E1E"/>
+                </a:solidFill>
+                <a:latin typeface="Calibri"/>
+              </a:rPr>
+              <a:t>—  </a:t>
+            </a:r>
+            <a:r>
+              <a:rPr sz="1250">
+                <a:solidFill>
+                  <a:srgbClr val="1A1A1A"/>
+                </a:solidFill>
+                <a:latin typeface="Calibri"/>
+              </a:rPr>
+              <a:t>The FY2027 extended target (ISZE→DB) applies a 5% price adjustment and 1.8% stretch — locked at EUR 592,795 from GPS Extended Target V3.1 (Dashboard column I).</a:t>
+            </a:r>
+          </a:p>
+          <a:p>
+            <a:pPr>
+              <a:lnSpc>
+                <a:spcPct val="125000"/>
+              </a:lnSpc>
+              <a:spcAft>
+                <a:spcPts val="1000"/>
+              </a:spcAft>
+            </a:pPr>
+            <a:r>
+              <a:rPr sz="1250" b="1">
+                <a:solidFill>
+                  <a:srgbClr val="CC0E1E"/>
+                </a:solidFill>
+                <a:latin typeface="Calibri"/>
+              </a:rPr>
+              <a:t>—  </a:t>
+            </a:r>
+            <a:r>
+              <a:rPr sz="1250">
+                <a:solidFill>
+                  <a:srgbClr val="1A1A1A"/>
+                </a:solidFill>
+                <a:latin typeface="Calibri"/>
+              </a:rPr>
+              <a:t>The target reflects the working fleet outlook without extending the chart beyond 2026.</a:t>
             </a:r>
           </a:p>
         </p:txBody>
@@ -5385,7 +5514,7 @@
                 </a:solidFill>
                 <a:latin typeface="Calibri"/>
               </a:rPr>
-              <a:t>The fleet is expected to grow in 2026</a:t>
+              <a:t>How the FY2027 extended target is built</a:t>
             </a:r>
           </a:p>
         </p:txBody>
@@ -5468,83 +5597,16 @@
           </a:p>
         </p:txBody>
       </p:sp>
-      <p:pic>
-        <p:nvPicPr>
-          <p:cNvPr id="8" name="Picture 7" descr="uio.png"/>
-          <p:cNvPicPr>
-            <a:picLocks noChangeAspect="1"/>
-          </p:cNvPicPr>
-          <p:nvPr/>
-        </p:nvPicPr>
-        <p:blipFill>
-          <a:blip r:embed="rId3"/>
-          <a:stretch>
-            <a:fillRect/>
-          </a:stretch>
-        </p:blipFill>
-        <p:spPr>
-          <a:xfrm>
-            <a:off x="292608" y="2120980"/>
-            <a:ext cx="7178040" cy="3027520"/>
-          </a:xfrm>
-          <a:prstGeom prst="rect">
-            <a:avLst/>
-          </a:prstGeom>
-        </p:spPr>
-      </p:pic>
-      <p:sp>
-        <p:nvSpPr>
-          <p:cNvPr id="9" name="Rectangle 8"/>
-          <p:cNvSpPr/>
-          <p:nvPr/>
-        </p:nvSpPr>
-        <p:spPr>
-          <a:xfrm>
-            <a:off x="7726679" y="1188720"/>
-            <a:ext cx="22000" cy="4892040"/>
-          </a:xfrm>
-          <a:prstGeom prst="rect">
-            <a:avLst/>
-          </a:prstGeom>
-          <a:solidFill>
-            <a:srgbClr val="ECECEC"/>
-          </a:solidFill>
-          <a:ln>
-            <a:noFill/>
-          </a:ln>
-        </p:spPr>
-        <p:style>
-          <a:lnRef idx="1">
-            <a:schemeClr val="accent1"/>
-          </a:lnRef>
-          <a:fillRef idx="3">
-            <a:schemeClr val="accent1"/>
-          </a:fillRef>
-          <a:effectRef idx="2">
-            <a:schemeClr val="accent1"/>
-          </a:effectRef>
-          <a:fontRef idx="minor">
-            <a:schemeClr val="lt1"/>
-          </a:fontRef>
-        </p:style>
-        <p:txBody>
-          <a:bodyPr rtlCol="0" anchor="ctr"/>
-          <a:lstStyle/>
-          <a:p>
-            <a:pPr algn="ctr"/>
-          </a:p>
-        </p:txBody>
-      </p:sp>
-      <p:sp>
-        <p:nvSpPr>
-          <p:cNvPr id="10" name="TextBox 9"/>
+      <p:sp>
+        <p:nvSpPr>
+          <p:cNvPr id="8" name="TextBox 7"/>
           <p:cNvSpPr txBox="1"/>
           <p:nvPr/>
         </p:nvSpPr>
         <p:spPr>
           <a:xfrm>
-            <a:off x="7927847" y="1234440"/>
-            <a:ext cx="3886200" cy="320040"/>
+            <a:off x="292608" y="1170432"/>
+            <a:ext cx="10515600" cy="274320"/>
           </a:xfrm>
           <a:prstGeom prst="rect">
             <a:avLst/>
@@ -5559,452 +5621,13 @@
           <a:p>
             <a:pPr algn="l"/>
             <a:r>
-              <a:rPr sz="1200" b="1">
+              <a:rPr sz="1300" b="1">
                 <a:solidFill>
                   <a:srgbClr val="CC0E1E"/>
                 </a:solidFill>
                 <a:latin typeface="Calibri"/>
               </a:rPr>
-              <a:t>WHAT THIS MEANS FOR FY2027</a:t>
-            </a:r>
-          </a:p>
-        </p:txBody>
-      </p:sp>
-      <p:sp>
-        <p:nvSpPr>
-          <p:cNvPr id="11" name="TextBox 10"/>
-          <p:cNvSpPr txBox="1"/>
-          <p:nvPr/>
-        </p:nvSpPr>
-        <p:spPr>
-          <a:xfrm>
-            <a:off x="7927847" y="1691640"/>
-            <a:ext cx="3794760" cy="4343400"/>
-          </a:xfrm>
-          <a:prstGeom prst="rect">
-            <a:avLst/>
-          </a:prstGeom>
-          <a:noFill/>
-        </p:spPr>
-        <p:txBody>
-          <a:bodyPr wrap="square">
-            <a:spAutoFit/>
-          </a:bodyPr>
-          <a:lstStyle/>
-          <a:p>
-            <a:pPr>
-              <a:lnSpc>
-                <a:spcPct val="125000"/>
-              </a:lnSpc>
-              <a:spcAft>
-                <a:spcPts val="1000"/>
-              </a:spcAft>
-            </a:pPr>
-            <a:r>
-              <a:rPr sz="1250" b="1">
-                <a:solidFill>
-                  <a:srgbClr val="CC0E1E"/>
-                </a:solidFill>
-                <a:latin typeface="Calibri"/>
-              </a:rPr>
-              <a:t>—  </a:t>
-            </a:r>
-            <a:r>
-              <a:rPr sz="1250">
-                <a:solidFill>
-                  <a:srgbClr val="1A1A1A"/>
-                </a:solidFill>
-                <a:latin typeface="Calibri"/>
-              </a:rPr>
-              <a:t>Fleet size (calendar year): 3,742 vehicles in 2025 → 3,932 working estimate for end-2026 (+5.1%).</a:t>
-            </a:r>
-          </a:p>
-          <a:p>
-            <a:pPr>
-              <a:lnSpc>
-                <a:spcPct val="125000"/>
-              </a:lnSpc>
-              <a:spcAft>
-                <a:spcPts val="1000"/>
-              </a:spcAft>
-            </a:pPr>
-            <a:r>
-              <a:rPr sz="1250" b="1">
-                <a:solidFill>
-                  <a:srgbClr val="CC0E1E"/>
-                </a:solidFill>
-                <a:latin typeface="Calibri"/>
-              </a:rPr>
-              <a:t>—  </a:t>
-            </a:r>
-            <a:r>
-              <a:rPr sz="1250">
-                <a:solidFill>
-                  <a:srgbClr val="1A1A1A"/>
-                </a:solidFill>
-                <a:latin typeface="Calibri"/>
-              </a:rPr>
-              <a:t>The chart is calendar years 2019–2026 only. 2026 is a working year-end estimate, not a fiscal-year figure.</a:t>
-            </a:r>
-          </a:p>
-          <a:p>
-            <a:pPr>
-              <a:lnSpc>
-                <a:spcPct val="125000"/>
-              </a:lnSpc>
-              <a:spcAft>
-                <a:spcPts val="1000"/>
-              </a:spcAft>
-            </a:pPr>
-            <a:r>
-              <a:rPr sz="1250" b="1">
-                <a:solidFill>
-                  <a:srgbClr val="CC0E1E"/>
-                </a:solidFill>
-                <a:latin typeface="Calibri"/>
-              </a:rPr>
-              <a:t>—  </a:t>
-            </a:r>
-            <a:r>
-              <a:rPr sz="1250">
-                <a:solidFill>
-                  <a:srgbClr val="1A1A1A"/>
-                </a:solidFill>
-                <a:latin typeface="Calibri"/>
-              </a:rPr>
-              <a:t>End-2026 mix: LCV / D-Max 3,879; CV — LD 53.</a:t>
-            </a:r>
-          </a:p>
-          <a:p>
-            <a:pPr>
-              <a:lnSpc>
-                <a:spcPct val="125000"/>
-              </a:lnSpc>
-              <a:spcAft>
-                <a:spcPts val="1000"/>
-              </a:spcAft>
-            </a:pPr>
-            <a:r>
-              <a:rPr sz="1250" b="1">
-                <a:solidFill>
-                  <a:srgbClr val="CC0E1E"/>
-                </a:solidFill>
-                <a:latin typeface="Calibri"/>
-              </a:rPr>
-              <a:t>—  </a:t>
-            </a:r>
-            <a:r>
-              <a:rPr sz="1250">
-                <a:solidFill>
-                  <a:srgbClr val="1A1A1A"/>
-                </a:solidFill>
-                <a:latin typeface="Calibri"/>
-              </a:rPr>
-              <a:t>The FY2027 Sales-to-Dealer target starts from that fleet change, then applies a 5% price adjustment and 1.8% additional growth.</a:t>
-            </a:r>
-          </a:p>
-          <a:p>
-            <a:pPr>
-              <a:lnSpc>
-                <a:spcPct val="125000"/>
-              </a:lnSpc>
-              <a:spcAft>
-                <a:spcPts val="1000"/>
-              </a:spcAft>
-            </a:pPr>
-            <a:r>
-              <a:rPr sz="1250" b="1">
-                <a:solidFill>
-                  <a:srgbClr val="CC0E1E"/>
-                </a:solidFill>
-                <a:latin typeface="Calibri"/>
-              </a:rPr>
-              <a:t>—  </a:t>
-            </a:r>
-            <a:r>
-              <a:rPr sz="1250">
-                <a:solidFill>
-                  <a:srgbClr val="1A1A1A"/>
-                </a:solidFill>
-                <a:latin typeface="Calibri"/>
-              </a:rPr>
-              <a:t>The target reflects the working fleet outlook without extending the chart beyond 2026.</a:t>
-            </a:r>
-          </a:p>
-        </p:txBody>
-      </p:sp>
-    </p:spTree>
-  </p:cSld>
-  <p:clrMapOvr>
-    <a:masterClrMapping/>
-  </p:clrMapOvr>
-</p:sld>
-</file>
-
-<file path=ppt/slides/slide14.xml><?xml version="1.0" encoding="utf-8"?>
-<p:sld xmlns:a="http://schemas.openxmlformats.org/drawingml/2006/main" xmlns:p="http://schemas.openxmlformats.org/presentationml/2006/main" xmlns:r="http://schemas.openxmlformats.org/officeDocument/2006/relationships">
-  <p:cSld>
-    <p:bg>
-      <p:bgPr>
-        <a:solidFill>
-          <a:srgbClr val="FFFFFF"/>
-        </a:solidFill>
-        <a:effectLst/>
-      </p:bgPr>
-    </p:bg>
-    <p:spTree>
-      <p:nvGrpSpPr>
-        <p:cNvPr id="1" name=""/>
-        <p:cNvGrpSpPr/>
-        <p:nvPr/>
-      </p:nvGrpSpPr>
-      <p:grpSpPr/>
-      <p:pic>
-        <p:nvPicPr>
-          <p:cNvPr id="2" name="Picture 1" descr="isuzu_logo_red.png"/>
-          <p:cNvPicPr>
-            <a:picLocks noChangeAspect="1"/>
-          </p:cNvPicPr>
-          <p:nvPr/>
-        </p:nvPicPr>
-        <p:blipFill>
-          <a:blip r:embed="rId2"/>
-          <a:stretch>
-            <a:fillRect/>
-          </a:stretch>
-        </p:blipFill>
-        <p:spPr>
-          <a:xfrm>
-            <a:off x="256032" y="6263640"/>
-            <a:ext cx="1679787" cy="292608"/>
-          </a:xfrm>
-          <a:prstGeom prst="rect">
-            <a:avLst/>
-          </a:prstGeom>
-        </p:spPr>
-      </p:pic>
-      <p:sp>
-        <p:nvSpPr>
-          <p:cNvPr id="3" name="Rectangle 2"/>
-          <p:cNvSpPr/>
-          <p:nvPr/>
-        </p:nvSpPr>
-        <p:spPr>
-          <a:xfrm>
-            <a:off x="0" y="6766560"/>
-            <a:ext cx="12188952" cy="91440"/>
-          </a:xfrm>
-          <a:prstGeom prst="rect">
-            <a:avLst/>
-          </a:prstGeom>
-          <a:solidFill>
-            <a:srgbClr val="CC0E1E"/>
-          </a:solidFill>
-          <a:ln>
-            <a:noFill/>
-          </a:ln>
-        </p:spPr>
-        <p:style>
-          <a:lnRef idx="1">
-            <a:schemeClr val="accent1"/>
-          </a:lnRef>
-          <a:fillRef idx="3">
-            <a:schemeClr val="accent1"/>
-          </a:fillRef>
-          <a:effectRef idx="2">
-            <a:schemeClr val="accent1"/>
-          </a:effectRef>
-          <a:fontRef idx="minor">
-            <a:schemeClr val="lt1"/>
-          </a:fontRef>
-        </p:style>
-        <p:txBody>
-          <a:bodyPr rtlCol="0" anchor="ctr"/>
-          <a:lstStyle/>
-          <a:p>
-            <a:pPr algn="ctr"/>
-          </a:p>
-        </p:txBody>
-      </p:sp>
-      <p:sp>
-        <p:nvSpPr>
-          <p:cNvPr id="4" name="TextBox 3"/>
-          <p:cNvSpPr txBox="1"/>
-          <p:nvPr/>
-        </p:nvSpPr>
-        <p:spPr>
-          <a:xfrm>
-            <a:off x="292608" y="201168"/>
-            <a:ext cx="11430000" cy="274320"/>
-          </a:xfrm>
-          <a:prstGeom prst="rect">
-            <a:avLst/>
-          </a:prstGeom>
-          <a:noFill/>
-        </p:spPr>
-        <p:txBody>
-          <a:bodyPr wrap="square">
-            <a:spAutoFit/>
-          </a:bodyPr>
-          <a:lstStyle/>
-          <a:p>
-            <a:pPr algn="l"/>
-            <a:r>
-              <a:rPr sz="1100" b="1">
-                <a:solidFill>
-                  <a:srgbClr val="CC0E1E"/>
-                </a:solidFill>
-                <a:latin typeface="Calibri"/>
-              </a:rPr>
-              <a:t>FLEET &amp; FY2027 TARGET</a:t>
-            </a:r>
-          </a:p>
-        </p:txBody>
-      </p:sp>
-      <p:sp>
-        <p:nvSpPr>
-          <p:cNvPr id="5" name="TextBox 4"/>
-          <p:cNvSpPr txBox="1"/>
-          <p:nvPr/>
-        </p:nvSpPr>
-        <p:spPr>
-          <a:xfrm>
-            <a:off x="292608" y="475488"/>
-            <a:ext cx="11612880" cy="566928"/>
-          </a:xfrm>
-          <a:prstGeom prst="rect">
-            <a:avLst/>
-          </a:prstGeom>
-          <a:noFill/>
-        </p:spPr>
-        <p:txBody>
-          <a:bodyPr wrap="square">
-            <a:spAutoFit/>
-          </a:bodyPr>
-          <a:lstStyle/>
-          <a:p>
-            <a:pPr algn="l"/>
-            <a:r>
-              <a:rPr sz="2500" b="1">
-                <a:solidFill>
-                  <a:srgbClr val="1A1A1A"/>
-                </a:solidFill>
-                <a:latin typeface="Calibri"/>
-              </a:rPr>
-              <a:t>How the FY2027 target is built</a:t>
-            </a:r>
-          </a:p>
-        </p:txBody>
-      </p:sp>
-      <p:sp>
-        <p:nvSpPr>
-          <p:cNvPr id="6" name="Rectangle 5"/>
-          <p:cNvSpPr/>
-          <p:nvPr/>
-        </p:nvSpPr>
-        <p:spPr>
-          <a:xfrm>
-            <a:off x="292608" y="1005840"/>
-            <a:ext cx="11612880" cy="28000"/>
-          </a:xfrm>
-          <a:prstGeom prst="rect">
-            <a:avLst/>
-          </a:prstGeom>
-          <a:solidFill>
-            <a:srgbClr val="CC0E1E"/>
-          </a:solidFill>
-          <a:ln>
-            <a:noFill/>
-          </a:ln>
-        </p:spPr>
-        <p:style>
-          <a:lnRef idx="1">
-            <a:schemeClr val="accent1"/>
-          </a:lnRef>
-          <a:fillRef idx="3">
-            <a:schemeClr val="accent1"/>
-          </a:fillRef>
-          <a:effectRef idx="2">
-            <a:schemeClr val="accent1"/>
-          </a:effectRef>
-          <a:fontRef idx="minor">
-            <a:schemeClr val="lt1"/>
-          </a:fontRef>
-        </p:style>
-        <p:txBody>
-          <a:bodyPr rtlCol="0" anchor="ctr"/>
-          <a:lstStyle/>
-          <a:p>
-            <a:pPr algn="ctr"/>
-          </a:p>
-        </p:txBody>
-      </p:sp>
-      <p:sp>
-        <p:nvSpPr>
-          <p:cNvPr id="7" name="TextBox 6"/>
-          <p:cNvSpPr txBox="1"/>
-          <p:nvPr/>
-        </p:nvSpPr>
-        <p:spPr>
-          <a:xfrm>
-            <a:off x="11594592" y="6473952"/>
-            <a:ext cx="365760" cy="274320"/>
-          </a:xfrm>
-          <a:prstGeom prst="rect">
-            <a:avLst/>
-          </a:prstGeom>
-          <a:noFill/>
-        </p:spPr>
-        <p:txBody>
-          <a:bodyPr wrap="square">
-            <a:spAutoFit/>
-          </a:bodyPr>
-          <a:lstStyle/>
-          <a:p>
-            <a:pPr algn="r"/>
-            <a:r>
-              <a:rPr sz="1000" b="0">
-                <a:solidFill>
-                  <a:srgbClr val="5A5A5A"/>
-                </a:solidFill>
-                <a:latin typeface="Calibri"/>
-              </a:rPr>
-              <a:t>14</a:t>
-            </a:r>
-          </a:p>
-        </p:txBody>
-      </p:sp>
-      <p:sp>
-        <p:nvSpPr>
-          <p:cNvPr id="8" name="TextBox 7"/>
-          <p:cNvSpPr txBox="1"/>
-          <p:nvPr/>
-        </p:nvSpPr>
-        <p:spPr>
-          <a:xfrm>
-            <a:off x="292608" y="1170432"/>
-            <a:ext cx="8595360" cy="274320"/>
-          </a:xfrm>
-          <a:prstGeom prst="rect">
-            <a:avLst/>
-          </a:prstGeom>
-          <a:noFill/>
-        </p:spPr>
-        <p:txBody>
-          <a:bodyPr wrap="square">
-            <a:spAutoFit/>
-          </a:bodyPr>
-          <a:lstStyle/>
-          <a:p>
-            <a:pPr algn="l"/>
-            <a:r>
-              <a:rPr sz="1300" b="1">
-                <a:solidFill>
-                  <a:srgbClr val="CC0E1E"/>
-                </a:solidFill>
-                <a:latin typeface="Calibri"/>
-              </a:rPr>
-              <a:t>Sales-to-Dealer amount bridge</a:t>
+              <a:t>ISZE → DB extended target (V3.1 Dashboard column I)</a:t>
             </a:r>
           </a:p>
         </p:txBody>
@@ -6019,7 +5642,7 @@
         </p:nvGraphicFramePr>
         <p:xfrm>
           <a:off x="292608" y="1508760"/>
-          <a:ext cx="8595360" cy="2148840"/>
+          <a:ext cx="8595360" cy="2331720"/>
         </p:xfrm>
         <a:graphic>
           <a:graphicData uri="http://schemas.openxmlformats.org/drawingml/2006/table">
@@ -6031,7 +5654,7 @@
                 <a:gridCol w="5669280"/>
                 <a:gridCol w="2926080"/>
               </a:tblGrid>
-              <a:tr h="429768">
+              <a:tr h="466344">
                 <a:tc>
                   <a:txBody>
                     <a:bodyPr/>
@@ -6079,7 +5702,7 @@
                   </a:tcPr>
                 </a:tc>
               </a:tr>
-              <a:tr h="429768">
+              <a:tr h="466344">
                 <a:tc>
                   <a:txBody>
                     <a:bodyPr/>
@@ -6093,7 +5716,7 @@
                           </a:solidFill>
                           <a:latin typeface="Calibri"/>
                         </a:rPr>
-                        <a:t>FY2026 Sales-to-Dealer (working estimate)</a:t>
+                        <a:t>Business Plan / actual FY27 base</a:t>
                       </a:r>
                     </a:p>
                   </a:txBody>
@@ -6116,7 +5739,7 @@
                           </a:solidFill>
                           <a:latin typeface="Calibri"/>
                         </a:rPr>
-                        <a:t>EUR 708,667</a:t>
+                        <a:t>EUR 574,400</a:t>
                       </a:r>
                     </a:p>
                   </a:txBody>
@@ -6127,7 +5750,7 @@
                   </a:tcPr>
                 </a:tc>
               </a:tr>
-              <a:tr h="429768">
+              <a:tr h="466344">
                 <a:tc>
                   <a:txBody>
                     <a:bodyPr/>
@@ -6141,7 +5764,7 @@
                           </a:solidFill>
                           <a:latin typeface="Calibri"/>
                         </a:rPr>
-                        <a:t>After fleet movement (+5.1%)</a:t>
+                        <a:t>Market potential (max spend FY27)</a:t>
                       </a:r>
                     </a:p>
                   </a:txBody>
@@ -6164,7 +5787,7 @@
                           </a:solidFill>
                           <a:latin typeface="Calibri"/>
                         </a:rPr>
-                        <a:t>EUR 744,650</a:t>
+                        <a:t>EUR 1,021,924</a:t>
                       </a:r>
                     </a:p>
                   </a:txBody>
@@ -6175,7 +5798,7 @@
                   </a:tcPr>
                 </a:tc>
               </a:tr>
-              <a:tr h="429768">
+              <a:tr h="466344">
                 <a:tc>
                   <a:txBody>
                     <a:bodyPr/>
@@ -6189,7 +5812,7 @@
                           </a:solidFill>
                           <a:latin typeface="Calibri"/>
                         </a:rPr>
-                        <a:t>After price adjustment (+5%)</a:t>
+                        <a:t>Stretch (+1.8% of max spend)</a:t>
                       </a:r>
                     </a:p>
                   </a:txBody>
@@ -6212,7 +5835,7 @@
                           </a:solidFill>
                           <a:latin typeface="Calibri"/>
                         </a:rPr>
-                        <a:t>EUR 781,882</a:t>
+                        <a:t>EUR 18,395</a:t>
                       </a:r>
                     </a:p>
                   </a:txBody>
@@ -6223,7 +5846,7 @@
                   </a:tcPr>
                 </a:tc>
               </a:tr>
-              <a:tr h="429768">
+              <a:tr h="466344">
                 <a:tc>
                   <a:txBody>
                     <a:bodyPr/>
@@ -6237,7 +5860,7 @@
                           </a:solidFill>
                           <a:latin typeface="Calibri"/>
                         </a:rPr>
-                        <a:t>FY2027 target after additional growth (+1.8%)</a:t>
+                        <a:t>FY2027 EXTENDED TARGET (locked)</a:t>
                       </a:r>
                     </a:p>
                   </a:txBody>
@@ -6260,7 +5883,7 @@
                           </a:solidFill>
                           <a:latin typeface="Calibri"/>
                         </a:rPr>
-                        <a:t>EUR 795,956</a:t>
+                        <a:t>EUR 592,795</a:t>
                       </a:r>
                     </a:p>
                   </a:txBody>
@@ -6283,8 +5906,8 @@
         </p:nvSpPr>
         <p:spPr>
           <a:xfrm>
-            <a:off x="292608" y="3977639"/>
-            <a:ext cx="11612880" cy="1188720"/>
+            <a:off x="292608" y="4069080"/>
+            <a:ext cx="11612880" cy="1280160"/>
           </a:xfrm>
           <a:prstGeom prst="rect">
             <a:avLst/>
@@ -6321,7 +5944,7 @@
                 </a:solidFill>
                 <a:latin typeface="Calibri"/>
               </a:rPr>
-              <a:t>The FY2027 target is +12.3% versus the FY2026 Sales-to-Dealer base.</a:t>
+              <a:t>Extended target = BP + stretch; stretch default is 1.8% (network rule from GPS Extended Target V3.1).</a:t>
             </a:r>
           </a:p>
           <a:p>
@@ -6349,7 +5972,7 @@
                 </a:solidFill>
                 <a:latin typeface="Calibri"/>
               </a:rPr>
-              <a:t>The FY2026 base is a working estimate (ISZE billing ÷ 0.65): the KPI Dashboard has no usable Sales-to-Dealer row for this market.</a:t>
+              <a:t>Figure locked from GPS Extended Target FY27 V3.1, Dashboard column I (GREECE): EUR 592,795.</a:t>
             </a:r>
           </a:p>
         </p:txBody>
@@ -6362,7 +5985,7 @@
 </p:sld>
 </file>
 
-<file path=ppt/slides/slide15.xml><?xml version="1.0" encoding="utf-8"?>
+<file path=ppt/slides/slide14.xml><?xml version="1.0" encoding="utf-8"?>
 <p:sld xmlns:a="http://schemas.openxmlformats.org/drawingml/2006/main" xmlns:p="http://schemas.openxmlformats.org/presentationml/2006/main" xmlns:r="http://schemas.openxmlformats.org/officeDocument/2006/relationships">
   <p:cSld>
     <p:bg>
@@ -6590,7 +6213,7 @@
                 </a:solidFill>
                 <a:latin typeface="Calibri"/>
               </a:rPr>
-              <a:t>15</a:t>
+              <a:t>14</a:t>
             </a:r>
           </a:p>
         </p:txBody>
@@ -6724,7 +6347,7 @@
                 </a:solidFill>
                 <a:latin typeface="Calibri"/>
               </a:rPr>
-              <a:t>Your fleet</a:t>
+              <a:t>The FY2027 business plan</a:t>
             </a:r>
           </a:p>
         </p:txBody>
@@ -6775,166 +6398,9 @@
                 </a:solidFill>
                 <a:latin typeface="Calibri"/>
               </a:rPr>
-              <a:t>The working fleet movement used in the target is +5.1%.</a:t>
-            </a:r>
-          </a:p>
-        </p:txBody>
-      </p:sp>
-      <p:sp>
-        <p:nvSpPr>
-          <p:cNvPr id="12" name="Rounded Rectangle 11"/>
-          <p:cNvSpPr/>
-          <p:nvPr/>
-        </p:nvSpPr>
-        <p:spPr>
-          <a:xfrm>
-            <a:off x="5943600" y="1234440"/>
-            <a:ext cx="5943600" cy="2011680"/>
-          </a:xfrm>
-          <a:prstGeom prst="roundRect">
-            <a:avLst>
-              <a:gd name="adj" fmla="val 6000"/>
-            </a:avLst>
-          </a:prstGeom>
-          <a:solidFill>
-            <a:srgbClr val="ECECEC"/>
-          </a:solidFill>
-          <a:ln>
-            <a:noFill/>
-          </a:ln>
-          <a:effectLst/>
-        </p:spPr>
-        <p:style>
-          <a:lnRef idx="1">
-            <a:schemeClr val="accent1"/>
-          </a:lnRef>
-          <a:fillRef idx="3">
-            <a:schemeClr val="accent1"/>
-          </a:fillRef>
-          <a:effectRef idx="2">
-            <a:schemeClr val="accent1"/>
-          </a:effectRef>
-          <a:fontRef idx="minor">
-            <a:schemeClr val="lt1"/>
-          </a:fontRef>
-        </p:style>
-        <p:txBody>
-          <a:bodyPr rtlCol="0" anchor="ctr"/>
-          <a:lstStyle/>
-          <a:p>
-            <a:pPr algn="ctr"/>
-          </a:p>
-        </p:txBody>
-      </p:sp>
-      <p:sp>
-        <p:nvSpPr>
-          <p:cNvPr id="13" name="Oval 12"/>
-          <p:cNvSpPr/>
-          <p:nvPr/>
-        </p:nvSpPr>
-        <p:spPr>
-          <a:xfrm>
-            <a:off x="6144768" y="1435608"/>
-            <a:ext cx="457200" cy="457200"/>
-          </a:xfrm>
-          <a:prstGeom prst="ellipse">
-            <a:avLst/>
-          </a:prstGeom>
-          <a:solidFill>
-            <a:srgbClr val="CC0E1E"/>
-          </a:solidFill>
-          <a:ln>
-            <a:noFill/>
-          </a:ln>
-          <a:effectLst/>
-        </p:spPr>
-        <p:style>
-          <a:lnRef idx="1">
-            <a:schemeClr val="accent1"/>
-          </a:lnRef>
-          <a:fillRef idx="3">
-            <a:schemeClr val="accent1"/>
-          </a:fillRef>
-          <a:effectRef idx="2">
-            <a:schemeClr val="accent1"/>
-          </a:effectRef>
-          <a:fontRef idx="minor">
-            <a:schemeClr val="lt1"/>
-          </a:fontRef>
-        </p:style>
-        <p:txBody>
-          <a:bodyPr rtlCol="0" anchor="ctr" lIns="0" rIns="0" tIns="0" bIns="0"/>
-          <a:lstStyle/>
-          <a:p>
-            <a:pPr algn="ctr"/>
-            <a:r>
-              <a:rPr sz="1800" b="1">
-                <a:solidFill>
-                  <a:srgbClr val="FFFFFF"/>
-                </a:solidFill>
-                <a:latin typeface="Calibri"/>
-              </a:rPr>
-              <a:t>2</a:t>
-            </a:r>
-          </a:p>
-        </p:txBody>
-      </p:sp>
-      <p:sp>
-        <p:nvSpPr>
-          <p:cNvPr id="14" name="TextBox 13"/>
-          <p:cNvSpPr txBox="1"/>
-          <p:nvPr/>
-        </p:nvSpPr>
-        <p:spPr>
-          <a:xfrm>
-            <a:off x="6766560" y="1435608"/>
-            <a:ext cx="4937760" cy="411480"/>
-          </a:xfrm>
-          <a:prstGeom prst="rect">
-            <a:avLst/>
-          </a:prstGeom>
-          <a:noFill/>
-        </p:spPr>
-        <p:txBody>
-          <a:bodyPr wrap="square">
-            <a:spAutoFit/>
-          </a:bodyPr>
-          <a:lstStyle/>
-          <a:p>
-            <a:pPr algn="l"/>
-            <a:r>
-              <a:rPr sz="1500" b="1">
-                <a:solidFill>
-                  <a:srgbClr val="1A1A1A"/>
-                </a:solidFill>
-                <a:latin typeface="Calibri"/>
-              </a:rPr>
-              <a:t>The price move</a:t>
-            </a:r>
-          </a:p>
-        </p:txBody>
-      </p:sp>
-      <p:sp>
-        <p:nvSpPr>
-          <p:cNvPr id="15" name="TextBox 14"/>
-          <p:cNvSpPr txBox="1"/>
-          <p:nvPr/>
-        </p:nvSpPr>
-        <p:spPr>
-          <a:xfrm>
-            <a:off x="6236208" y="2011680"/>
-            <a:ext cx="5394960" cy="1097280"/>
-          </a:xfrm>
-          <a:prstGeom prst="rect">
-            <a:avLst/>
-          </a:prstGeom>
-          <a:noFill/>
-        </p:spPr>
-        <p:txBody>
-          <a:bodyPr wrap="square">
-            <a:spAutoFit/>
-          </a:bodyPr>
-          <a:lstStyle/>
+              <a:t>The target starts from the FY2027 Business Plan for this market, EUR 574,400.</a:t>
+            </a:r>
+          </a:p>
           <a:p>
             <a:pPr>
               <a:lnSpc>
@@ -6960,9 +6426,166 @@
                 </a:solidFill>
                 <a:latin typeface="Calibri"/>
               </a:rPr>
-              <a:t>ISZE is applying a 5% price adjustment for FY2027, consistent with every ISZE market this year.</a:t>
-            </a:r>
-          </a:p>
+              <a:t>Your fleet outlook (+5.1%) sets the market potential the stretch is measured against.</a:t>
+            </a:r>
+          </a:p>
+        </p:txBody>
+      </p:sp>
+      <p:sp>
+        <p:nvSpPr>
+          <p:cNvPr id="12" name="Rounded Rectangle 11"/>
+          <p:cNvSpPr/>
+          <p:nvPr/>
+        </p:nvSpPr>
+        <p:spPr>
+          <a:xfrm>
+            <a:off x="5943600" y="1234440"/>
+            <a:ext cx="5943600" cy="2011680"/>
+          </a:xfrm>
+          <a:prstGeom prst="roundRect">
+            <a:avLst>
+              <a:gd name="adj" fmla="val 6000"/>
+            </a:avLst>
+          </a:prstGeom>
+          <a:solidFill>
+            <a:srgbClr val="ECECEC"/>
+          </a:solidFill>
+          <a:ln>
+            <a:noFill/>
+          </a:ln>
+          <a:effectLst/>
+        </p:spPr>
+        <p:style>
+          <a:lnRef idx="1">
+            <a:schemeClr val="accent1"/>
+          </a:lnRef>
+          <a:fillRef idx="3">
+            <a:schemeClr val="accent1"/>
+          </a:fillRef>
+          <a:effectRef idx="2">
+            <a:schemeClr val="accent1"/>
+          </a:effectRef>
+          <a:fontRef idx="minor">
+            <a:schemeClr val="lt1"/>
+          </a:fontRef>
+        </p:style>
+        <p:txBody>
+          <a:bodyPr rtlCol="0" anchor="ctr"/>
+          <a:lstStyle/>
+          <a:p>
+            <a:pPr algn="ctr"/>
+          </a:p>
+        </p:txBody>
+      </p:sp>
+      <p:sp>
+        <p:nvSpPr>
+          <p:cNvPr id="13" name="Oval 12"/>
+          <p:cNvSpPr/>
+          <p:nvPr/>
+        </p:nvSpPr>
+        <p:spPr>
+          <a:xfrm>
+            <a:off x="6144768" y="1435608"/>
+            <a:ext cx="457200" cy="457200"/>
+          </a:xfrm>
+          <a:prstGeom prst="ellipse">
+            <a:avLst/>
+          </a:prstGeom>
+          <a:solidFill>
+            <a:srgbClr val="CC0E1E"/>
+          </a:solidFill>
+          <a:ln>
+            <a:noFill/>
+          </a:ln>
+          <a:effectLst/>
+        </p:spPr>
+        <p:style>
+          <a:lnRef idx="1">
+            <a:schemeClr val="accent1"/>
+          </a:lnRef>
+          <a:fillRef idx="3">
+            <a:schemeClr val="accent1"/>
+          </a:fillRef>
+          <a:effectRef idx="2">
+            <a:schemeClr val="accent1"/>
+          </a:effectRef>
+          <a:fontRef idx="minor">
+            <a:schemeClr val="lt1"/>
+          </a:fontRef>
+        </p:style>
+        <p:txBody>
+          <a:bodyPr rtlCol="0" anchor="ctr" lIns="0" rIns="0" tIns="0" bIns="0"/>
+          <a:lstStyle/>
+          <a:p>
+            <a:pPr algn="ctr"/>
+            <a:r>
+              <a:rPr sz="1800" b="1">
+                <a:solidFill>
+                  <a:srgbClr val="FFFFFF"/>
+                </a:solidFill>
+                <a:latin typeface="Calibri"/>
+              </a:rPr>
+              <a:t>2</a:t>
+            </a:r>
+          </a:p>
+        </p:txBody>
+      </p:sp>
+      <p:sp>
+        <p:nvSpPr>
+          <p:cNvPr id="14" name="TextBox 13"/>
+          <p:cNvSpPr txBox="1"/>
+          <p:nvPr/>
+        </p:nvSpPr>
+        <p:spPr>
+          <a:xfrm>
+            <a:off x="6766560" y="1435608"/>
+            <a:ext cx="4937760" cy="411480"/>
+          </a:xfrm>
+          <a:prstGeom prst="rect">
+            <a:avLst/>
+          </a:prstGeom>
+          <a:noFill/>
+        </p:spPr>
+        <p:txBody>
+          <a:bodyPr wrap="square">
+            <a:spAutoFit/>
+          </a:bodyPr>
+          <a:lstStyle/>
+          <a:p>
+            <a:pPr algn="l"/>
+            <a:r>
+              <a:rPr sz="1500" b="1">
+                <a:solidFill>
+                  <a:srgbClr val="1A1A1A"/>
+                </a:solidFill>
+                <a:latin typeface="Calibri"/>
+              </a:rPr>
+              <a:t>The price move</a:t>
+            </a:r>
+          </a:p>
+        </p:txBody>
+      </p:sp>
+      <p:sp>
+        <p:nvSpPr>
+          <p:cNvPr id="15" name="TextBox 14"/>
+          <p:cNvSpPr txBox="1"/>
+          <p:nvPr/>
+        </p:nvSpPr>
+        <p:spPr>
+          <a:xfrm>
+            <a:off x="6236208" y="2011680"/>
+            <a:ext cx="5394960" cy="1097280"/>
+          </a:xfrm>
+          <a:prstGeom prst="rect">
+            <a:avLst/>
+          </a:prstGeom>
+          <a:noFill/>
+        </p:spPr>
+        <p:txBody>
+          <a:bodyPr wrap="square">
+            <a:spAutoFit/>
+          </a:bodyPr>
+          <a:lstStyle/>
           <a:p>
             <a:pPr>
               <a:lnSpc>
@@ -6988,6 +6611,34 @@
                 </a:solidFill>
                 <a:latin typeface="Calibri"/>
               </a:rPr>
+              <a:t>ISZE is applying a 5% price adjustment for FY2027, consistent with every ISZE market this year.</a:t>
+            </a:r>
+          </a:p>
+          <a:p>
+            <a:pPr>
+              <a:lnSpc>
+                <a:spcPct val="115000"/>
+              </a:lnSpc>
+              <a:spcAft>
+                <a:spcPts val="1000"/>
+              </a:spcAft>
+            </a:pPr>
+            <a:r>
+              <a:rPr sz="1250" b="1">
+                <a:solidFill>
+                  <a:srgbClr val="CC0E1E"/>
+                </a:solidFill>
+                <a:latin typeface="Calibri"/>
+              </a:rPr>
+              <a:t>—  </a:t>
+            </a:r>
+            <a:r>
+              <a:rPr sz="1250">
+                <a:solidFill>
+                  <a:srgbClr val="1A1A1A"/>
+                </a:solidFill>
+                <a:latin typeface="Calibri"/>
+              </a:rPr>
               <a:t>It is built into the per-vehicle rate above, not added separately on top.</a:t>
             </a:r>
           </a:p>
@@ -7038,7 +6689,7 @@
         </p:nvGraphicFramePr>
         <p:xfrm>
           <a:off x="292608" y="3785615"/>
-          <a:ext cx="8595360" cy="1234440"/>
+          <a:ext cx="8595360" cy="1417320"/>
         </p:xfrm>
         <a:graphic>
           <a:graphicData uri="http://schemas.openxmlformats.org/drawingml/2006/table">
@@ -7050,7 +6701,7 @@
                 <a:gridCol w="5029200"/>
                 <a:gridCol w="3566160"/>
               </a:tblGrid>
-              <a:tr h="411480">
+              <a:tr h="354330">
                 <a:tc>
                   <a:txBody>
                     <a:bodyPr/>
@@ -7098,7 +6749,7 @@
                   </a:tcPr>
                 </a:tc>
               </a:tr>
-              <a:tr h="411480">
+              <a:tr h="354330">
                 <a:tc>
                   <a:txBody>
                     <a:bodyPr/>
@@ -7112,7 +6763,7 @@
                           </a:solidFill>
                           <a:latin typeface="Calibri"/>
                         </a:rPr>
-                        <a:t>FY2027 Sales-to-Dealer target</a:t>
+                        <a:t>FY2027 extended target (V3.1 col I)</a:t>
                       </a:r>
                     </a:p>
                   </a:txBody>
@@ -7135,7 +6786,7 @@
                           </a:solidFill>
                           <a:latin typeface="Calibri"/>
                         </a:rPr>
-                        <a:t>EUR 795,956</a:t>
+                        <a:t>EUR 592,795</a:t>
                       </a:r>
                     </a:p>
                   </a:txBody>
@@ -7146,7 +6797,55 @@
                   </a:tcPr>
                 </a:tc>
               </a:tr>
-              <a:tr h="411480">
+              <a:tr h="354330">
+                <a:tc>
+                  <a:txBody>
+                    <a:bodyPr/>
+                    <a:lstStyle/>
+                    <a:p>
+                      <a:pPr algn="l"/>
+                      <a:r>
+                        <a:rPr sz="1250" b="0">
+                          <a:solidFill>
+                            <a:srgbClr val="1A1A1A"/>
+                          </a:solidFill>
+                          <a:latin typeface="Calibri"/>
+                        </a:rPr>
+                        <a:t>vs BP FY27 (EUR 574,400)</a:t>
+                      </a:r>
+                    </a:p>
+                  </a:txBody>
+                  <a:tcPr anchor="ctr" marL="73152" marR="73152">
+                    <a:solidFill>
+                      <a:srgbClr val="ECECEC"/>
+                    </a:solidFill>
+                  </a:tcPr>
+                </a:tc>
+                <a:tc>
+                  <a:txBody>
+                    <a:bodyPr/>
+                    <a:lstStyle/>
+                    <a:p>
+                      <a:pPr algn="r"/>
+                      <a:r>
+                        <a:rPr sz="1250" b="0">
+                          <a:solidFill>
+                            <a:srgbClr val="1A1A1A"/>
+                          </a:solidFill>
+                          <a:latin typeface="Calibri"/>
+                        </a:rPr>
+                        <a:t>+3.2%</a:t>
+                      </a:r>
+                    </a:p>
+                  </a:txBody>
+                  <a:tcPr anchor="ctr" marL="73152" marR="73152">
+                    <a:solidFill>
+                      <a:srgbClr val="ECECEC"/>
+                    </a:solidFill>
+                  </a:tcPr>
+                </a:tc>
+              </a:tr>
+              <a:tr h="354330">
                 <a:tc>
                   <a:txBody>
                     <a:bodyPr/>
@@ -7160,7 +6859,7 @@
                           </a:solidFill>
                           <a:latin typeface="Calibri"/>
                         </a:rPr>
-                        <a:t>vs FY2026 Sales-to-Dealer (EUR 708,667)</a:t>
+                        <a:t>Stretch included</a:t>
                       </a:r>
                     </a:p>
                   </a:txBody>
@@ -7183,7 +6882,7 @@
                           </a:solidFill>
                           <a:latin typeface="Calibri"/>
                         </a:rPr>
-                        <a:t>+12.3%</a:t>
+                        <a:t>+1.8%</a:t>
                       </a:r>
                     </a:p>
                   </a:txBody>
@@ -7272,7 +6971,1023 @@
                 </a:solidFill>
                 <a:latin typeface="Calibri"/>
               </a:rPr>
-              <a:t>Until the incentive is confirmed, treat the FY2027 target as the working bridge (fleet × price × additional growth), not a locked commercial commitment.</a:t>
+              <a:t>Until the incentive is confirmed, treat the FY2027 extended target as the working figure (BP + stretch), not a locked commercial commitment.</a:t>
+            </a:r>
+          </a:p>
+        </p:txBody>
+      </p:sp>
+    </p:spTree>
+  </p:cSld>
+  <p:clrMapOvr>
+    <a:masterClrMapping/>
+  </p:clrMapOvr>
+</p:sld>
+</file>
+
+<file path=ppt/slides/slide15.xml><?xml version="1.0" encoding="utf-8"?>
+<p:sld xmlns:a="http://schemas.openxmlformats.org/drawingml/2006/main" xmlns:p="http://schemas.openxmlformats.org/presentationml/2006/main" xmlns:r="http://schemas.openxmlformats.org/officeDocument/2006/relationships">
+  <p:cSld>
+    <p:bg>
+      <p:bgPr>
+        <a:solidFill>
+          <a:srgbClr val="FFFFFF"/>
+        </a:solidFill>
+        <a:effectLst/>
+      </p:bgPr>
+    </p:bg>
+    <p:spTree>
+      <p:nvGrpSpPr>
+        <p:cNvPr id="1" name=""/>
+        <p:cNvGrpSpPr/>
+        <p:nvPr/>
+      </p:nvGrpSpPr>
+      <p:grpSpPr/>
+      <p:pic>
+        <p:nvPicPr>
+          <p:cNvPr id="2" name="Picture 1" descr="isuzu_logo_red.png"/>
+          <p:cNvPicPr>
+            <a:picLocks noChangeAspect="1"/>
+          </p:cNvPicPr>
+          <p:nvPr/>
+        </p:nvPicPr>
+        <p:blipFill>
+          <a:blip r:embed="rId2"/>
+          <a:stretch>
+            <a:fillRect/>
+          </a:stretch>
+        </p:blipFill>
+        <p:spPr>
+          <a:xfrm>
+            <a:off x="256032" y="6263640"/>
+            <a:ext cx="1679787" cy="292608"/>
+          </a:xfrm>
+          <a:prstGeom prst="rect">
+            <a:avLst/>
+          </a:prstGeom>
+        </p:spPr>
+      </p:pic>
+      <p:sp>
+        <p:nvSpPr>
+          <p:cNvPr id="3" name="Rectangle 2"/>
+          <p:cNvSpPr/>
+          <p:nvPr/>
+        </p:nvSpPr>
+        <p:spPr>
+          <a:xfrm>
+            <a:off x="0" y="6766560"/>
+            <a:ext cx="12188952" cy="91440"/>
+          </a:xfrm>
+          <a:prstGeom prst="rect">
+            <a:avLst/>
+          </a:prstGeom>
+          <a:solidFill>
+            <a:srgbClr val="CC0E1E"/>
+          </a:solidFill>
+          <a:ln>
+            <a:noFill/>
+          </a:ln>
+        </p:spPr>
+        <p:style>
+          <a:lnRef idx="1">
+            <a:schemeClr val="accent1"/>
+          </a:lnRef>
+          <a:fillRef idx="3">
+            <a:schemeClr val="accent1"/>
+          </a:fillRef>
+          <a:effectRef idx="2">
+            <a:schemeClr val="accent1"/>
+          </a:effectRef>
+          <a:fontRef idx="minor">
+            <a:schemeClr val="lt1"/>
+          </a:fontRef>
+        </p:style>
+        <p:txBody>
+          <a:bodyPr rtlCol="0" anchor="ctr"/>
+          <a:lstStyle/>
+          <a:p>
+            <a:pPr algn="ctr"/>
+          </a:p>
+        </p:txBody>
+      </p:sp>
+      <p:sp>
+        <p:nvSpPr>
+          <p:cNvPr id="4" name="TextBox 3"/>
+          <p:cNvSpPr txBox="1"/>
+          <p:nvPr/>
+        </p:nvSpPr>
+        <p:spPr>
+          <a:xfrm>
+            <a:off x="292608" y="201168"/>
+            <a:ext cx="11430000" cy="274320"/>
+          </a:xfrm>
+          <a:prstGeom prst="rect">
+            <a:avLst/>
+          </a:prstGeom>
+          <a:noFill/>
+        </p:spPr>
+        <p:txBody>
+          <a:bodyPr wrap="square">
+            <a:spAutoFit/>
+          </a:bodyPr>
+          <a:lstStyle/>
+          <a:p>
+            <a:pPr algn="l"/>
+            <a:r>
+              <a:rPr sz="1100" b="1">
+                <a:solidFill>
+                  <a:srgbClr val="CC0E1E"/>
+                </a:solidFill>
+                <a:latin typeface="Calibri"/>
+              </a:rPr>
+              <a:t>SPA</a:t>
+            </a:r>
+          </a:p>
+        </p:txBody>
+      </p:sp>
+      <p:sp>
+        <p:nvSpPr>
+          <p:cNvPr id="5" name="TextBox 4"/>
+          <p:cNvSpPr txBox="1"/>
+          <p:nvPr/>
+        </p:nvSpPr>
+        <p:spPr>
+          <a:xfrm>
+            <a:off x="292608" y="475488"/>
+            <a:ext cx="11612880" cy="566928"/>
+          </a:xfrm>
+          <a:prstGeom prst="rect">
+            <a:avLst/>
+          </a:prstGeom>
+          <a:noFill/>
+        </p:spPr>
+        <p:txBody>
+          <a:bodyPr wrap="square">
+            <a:spAutoFit/>
+          </a:bodyPr>
+          <a:lstStyle/>
+          <a:p>
+            <a:pPr algn="l"/>
+            <a:r>
+              <a:rPr sz="2500" b="1">
+                <a:solidFill>
+                  <a:srgbClr val="1A1A1A"/>
+                </a:solidFill>
+                <a:latin typeface="Calibri"/>
+              </a:rPr>
+              <a:t>SPA</a:t>
+            </a:r>
+          </a:p>
+        </p:txBody>
+      </p:sp>
+      <p:sp>
+        <p:nvSpPr>
+          <p:cNvPr id="6" name="Rectangle 5"/>
+          <p:cNvSpPr/>
+          <p:nvPr/>
+        </p:nvSpPr>
+        <p:spPr>
+          <a:xfrm>
+            <a:off x="292608" y="1005840"/>
+            <a:ext cx="11612880" cy="28000"/>
+          </a:xfrm>
+          <a:prstGeom prst="rect">
+            <a:avLst/>
+          </a:prstGeom>
+          <a:solidFill>
+            <a:srgbClr val="CC0E1E"/>
+          </a:solidFill>
+          <a:ln>
+            <a:noFill/>
+          </a:ln>
+        </p:spPr>
+        <p:style>
+          <a:lnRef idx="1">
+            <a:schemeClr val="accent1"/>
+          </a:lnRef>
+          <a:fillRef idx="3">
+            <a:schemeClr val="accent1"/>
+          </a:fillRef>
+          <a:effectRef idx="2">
+            <a:schemeClr val="accent1"/>
+          </a:effectRef>
+          <a:fontRef idx="minor">
+            <a:schemeClr val="lt1"/>
+          </a:fontRef>
+        </p:style>
+        <p:txBody>
+          <a:bodyPr rtlCol="0" anchor="ctr"/>
+          <a:lstStyle/>
+          <a:p>
+            <a:pPr algn="ctr"/>
+          </a:p>
+        </p:txBody>
+      </p:sp>
+      <p:sp>
+        <p:nvSpPr>
+          <p:cNvPr id="7" name="TextBox 6"/>
+          <p:cNvSpPr txBox="1"/>
+          <p:nvPr/>
+        </p:nvSpPr>
+        <p:spPr>
+          <a:xfrm>
+            <a:off x="11594592" y="6473952"/>
+            <a:ext cx="365760" cy="274320"/>
+          </a:xfrm>
+          <a:prstGeom prst="rect">
+            <a:avLst/>
+          </a:prstGeom>
+          <a:noFill/>
+        </p:spPr>
+        <p:txBody>
+          <a:bodyPr wrap="square">
+            <a:spAutoFit/>
+          </a:bodyPr>
+          <a:lstStyle/>
+          <a:p>
+            <a:pPr algn="r"/>
+            <a:r>
+              <a:rPr sz="1000" b="0">
+                <a:solidFill>
+                  <a:srgbClr val="5A5A5A"/>
+                </a:solidFill>
+                <a:latin typeface="Calibri"/>
+              </a:rPr>
+              <a:t>15</a:t>
+            </a:r>
+          </a:p>
+        </p:txBody>
+      </p:sp>
+      <p:sp>
+        <p:nvSpPr>
+          <p:cNvPr id="8" name="Rounded Rectangle 7"/>
+          <p:cNvSpPr/>
+          <p:nvPr/>
+        </p:nvSpPr>
+        <p:spPr>
+          <a:xfrm>
+            <a:off x="292608" y="1234440"/>
+            <a:ext cx="2798064" cy="3108960"/>
+          </a:xfrm>
+          <a:prstGeom prst="roundRect">
+            <a:avLst>
+              <a:gd name="adj" fmla="val 6000"/>
+            </a:avLst>
+          </a:prstGeom>
+          <a:solidFill>
+            <a:srgbClr val="ECECEC"/>
+          </a:solidFill>
+          <a:ln>
+            <a:noFill/>
+          </a:ln>
+          <a:effectLst/>
+        </p:spPr>
+        <p:style>
+          <a:lnRef idx="1">
+            <a:schemeClr val="accent1"/>
+          </a:lnRef>
+          <a:fillRef idx="3">
+            <a:schemeClr val="accent1"/>
+          </a:fillRef>
+          <a:effectRef idx="2">
+            <a:schemeClr val="accent1"/>
+          </a:effectRef>
+          <a:fontRef idx="minor">
+            <a:schemeClr val="lt1"/>
+          </a:fontRef>
+        </p:style>
+        <p:txBody>
+          <a:bodyPr rtlCol="0" anchor="ctr"/>
+          <a:lstStyle/>
+          <a:p>
+            <a:pPr algn="ctr"/>
+          </a:p>
+        </p:txBody>
+      </p:sp>
+      <p:sp>
+        <p:nvSpPr>
+          <p:cNvPr id="9" name="Oval 8"/>
+          <p:cNvSpPr/>
+          <p:nvPr/>
+        </p:nvSpPr>
+        <p:spPr>
+          <a:xfrm>
+            <a:off x="493776" y="1435608"/>
+            <a:ext cx="457200" cy="457200"/>
+          </a:xfrm>
+          <a:prstGeom prst="ellipse">
+            <a:avLst/>
+          </a:prstGeom>
+          <a:solidFill>
+            <a:srgbClr val="CC0E1E"/>
+          </a:solidFill>
+          <a:ln>
+            <a:noFill/>
+          </a:ln>
+          <a:effectLst/>
+        </p:spPr>
+        <p:style>
+          <a:lnRef idx="1">
+            <a:schemeClr val="accent1"/>
+          </a:lnRef>
+          <a:fillRef idx="3">
+            <a:schemeClr val="accent1"/>
+          </a:fillRef>
+          <a:effectRef idx="2">
+            <a:schemeClr val="accent1"/>
+          </a:effectRef>
+          <a:fontRef idx="minor">
+            <a:schemeClr val="lt1"/>
+          </a:fontRef>
+        </p:style>
+        <p:txBody>
+          <a:bodyPr rtlCol="0" anchor="ctr" lIns="0" rIns="0" tIns="0" bIns="0"/>
+          <a:lstStyle/>
+          <a:p>
+            <a:pPr algn="ctr"/>
+            <a:r>
+              <a:rPr sz="1800" b="1">
+                <a:solidFill>
+                  <a:srgbClr val="FFFFFF"/>
+                </a:solidFill>
+                <a:latin typeface="Calibri"/>
+              </a:rPr>
+              <a:t>1</a:t>
+            </a:r>
+          </a:p>
+        </p:txBody>
+      </p:sp>
+      <p:sp>
+        <p:nvSpPr>
+          <p:cNvPr id="10" name="TextBox 9"/>
+          <p:cNvSpPr txBox="1"/>
+          <p:nvPr/>
+        </p:nvSpPr>
+        <p:spPr>
+          <a:xfrm>
+            <a:off x="1115568" y="1435608"/>
+            <a:ext cx="1792224" cy="411480"/>
+          </a:xfrm>
+          <a:prstGeom prst="rect">
+            <a:avLst/>
+          </a:prstGeom>
+          <a:noFill/>
+        </p:spPr>
+        <p:txBody>
+          <a:bodyPr wrap="square">
+            <a:spAutoFit/>
+          </a:bodyPr>
+          <a:lstStyle/>
+          <a:p>
+            <a:pPr algn="l"/>
+            <a:r>
+              <a:rPr sz="1500" b="1">
+                <a:solidFill>
+                  <a:srgbClr val="1A1A1A"/>
+                </a:solidFill>
+                <a:latin typeface="Calibri"/>
+              </a:rPr>
+              <a:t>PETROS proposal</a:t>
+            </a:r>
+          </a:p>
+        </p:txBody>
+      </p:sp>
+      <p:sp>
+        <p:nvSpPr>
+          <p:cNvPr id="11" name="TextBox 10"/>
+          <p:cNvSpPr txBox="1"/>
+          <p:nvPr/>
+        </p:nvSpPr>
+        <p:spPr>
+          <a:xfrm>
+            <a:off x="585216" y="2011680"/>
+            <a:ext cx="2249424" cy="2194560"/>
+          </a:xfrm>
+          <a:prstGeom prst="rect">
+            <a:avLst/>
+          </a:prstGeom>
+          <a:noFill/>
+        </p:spPr>
+        <p:txBody>
+          <a:bodyPr wrap="square">
+            <a:spAutoFit/>
+          </a:bodyPr>
+          <a:lstStyle/>
+          <a:p>
+            <a:pPr>
+              <a:lnSpc>
+                <a:spcPct val="115000"/>
+              </a:lnSpc>
+              <a:spcAft>
+                <a:spcPts val="1000"/>
+              </a:spcAft>
+            </a:pPr>
+            <a:r>
+              <a:rPr sz="1250" b="1">
+                <a:solidFill>
+                  <a:srgbClr val="CC0E1E"/>
+                </a:solidFill>
+                <a:latin typeface="Calibri"/>
+              </a:rPr>
+              <a:t>—  </a:t>
+            </a:r>
+            <a:r>
+              <a:rPr sz="1250">
+                <a:solidFill>
+                  <a:srgbClr val="1A1A1A"/>
+                </a:solidFill>
+                <a:latin typeface="Calibri"/>
+              </a:rPr>
+              <a:t>Petros Petropoulos submits a proposed parts list.</a:t>
+            </a:r>
+          </a:p>
+        </p:txBody>
+      </p:sp>
+      <p:sp>
+        <p:nvSpPr>
+          <p:cNvPr id="12" name="Rounded Rectangle 11"/>
+          <p:cNvSpPr/>
+          <p:nvPr/>
+        </p:nvSpPr>
+        <p:spPr>
+          <a:xfrm>
+            <a:off x="3227832" y="1234440"/>
+            <a:ext cx="2798064" cy="3108960"/>
+          </a:xfrm>
+          <a:prstGeom prst="roundRect">
+            <a:avLst>
+              <a:gd name="adj" fmla="val 6000"/>
+            </a:avLst>
+          </a:prstGeom>
+          <a:solidFill>
+            <a:srgbClr val="ECECEC"/>
+          </a:solidFill>
+          <a:ln>
+            <a:noFill/>
+          </a:ln>
+          <a:effectLst/>
+        </p:spPr>
+        <p:style>
+          <a:lnRef idx="1">
+            <a:schemeClr val="accent1"/>
+          </a:lnRef>
+          <a:fillRef idx="3">
+            <a:schemeClr val="accent1"/>
+          </a:fillRef>
+          <a:effectRef idx="2">
+            <a:schemeClr val="accent1"/>
+          </a:effectRef>
+          <a:fontRef idx="minor">
+            <a:schemeClr val="lt1"/>
+          </a:fontRef>
+        </p:style>
+        <p:txBody>
+          <a:bodyPr rtlCol="0" anchor="ctr"/>
+          <a:lstStyle/>
+          <a:p>
+            <a:pPr algn="ctr"/>
+          </a:p>
+        </p:txBody>
+      </p:sp>
+      <p:sp>
+        <p:nvSpPr>
+          <p:cNvPr id="13" name="Oval 12"/>
+          <p:cNvSpPr/>
+          <p:nvPr/>
+        </p:nvSpPr>
+        <p:spPr>
+          <a:xfrm>
+            <a:off x="3429000" y="1435608"/>
+            <a:ext cx="457200" cy="457200"/>
+          </a:xfrm>
+          <a:prstGeom prst="ellipse">
+            <a:avLst/>
+          </a:prstGeom>
+          <a:solidFill>
+            <a:srgbClr val="CC0E1E"/>
+          </a:solidFill>
+          <a:ln>
+            <a:noFill/>
+          </a:ln>
+          <a:effectLst/>
+        </p:spPr>
+        <p:style>
+          <a:lnRef idx="1">
+            <a:schemeClr val="accent1"/>
+          </a:lnRef>
+          <a:fillRef idx="3">
+            <a:schemeClr val="accent1"/>
+          </a:fillRef>
+          <a:effectRef idx="2">
+            <a:schemeClr val="accent1"/>
+          </a:effectRef>
+          <a:fontRef idx="minor">
+            <a:schemeClr val="lt1"/>
+          </a:fontRef>
+        </p:style>
+        <p:txBody>
+          <a:bodyPr rtlCol="0" anchor="ctr" lIns="0" rIns="0" tIns="0" bIns="0"/>
+          <a:lstStyle/>
+          <a:p>
+            <a:pPr algn="ctr"/>
+            <a:r>
+              <a:rPr sz="1800" b="1">
+                <a:solidFill>
+                  <a:srgbClr val="FFFFFF"/>
+                </a:solidFill>
+                <a:latin typeface="Calibri"/>
+              </a:rPr>
+              <a:t>2</a:t>
+            </a:r>
+          </a:p>
+        </p:txBody>
+      </p:sp>
+      <p:sp>
+        <p:nvSpPr>
+          <p:cNvPr id="14" name="TextBox 13"/>
+          <p:cNvSpPr txBox="1"/>
+          <p:nvPr/>
+        </p:nvSpPr>
+        <p:spPr>
+          <a:xfrm>
+            <a:off x="4050792" y="1435608"/>
+            <a:ext cx="1792224" cy="411480"/>
+          </a:xfrm>
+          <a:prstGeom prst="rect">
+            <a:avLst/>
+          </a:prstGeom>
+          <a:noFill/>
+        </p:spPr>
+        <p:txBody>
+          <a:bodyPr wrap="square">
+            <a:spAutoFit/>
+          </a:bodyPr>
+          <a:lstStyle/>
+          <a:p>
+            <a:pPr algn="l"/>
+            <a:r>
+              <a:rPr sz="1500" b="1">
+                <a:solidFill>
+                  <a:srgbClr val="1A1A1A"/>
+                </a:solidFill>
+                <a:latin typeface="Calibri"/>
+              </a:rPr>
+              <a:t>ISZE review</a:t>
+            </a:r>
+          </a:p>
+        </p:txBody>
+      </p:sp>
+      <p:sp>
+        <p:nvSpPr>
+          <p:cNvPr id="15" name="TextBox 14"/>
+          <p:cNvSpPr txBox="1"/>
+          <p:nvPr/>
+        </p:nvSpPr>
+        <p:spPr>
+          <a:xfrm>
+            <a:off x="3520440" y="2011680"/>
+            <a:ext cx="2249424" cy="2194560"/>
+          </a:xfrm>
+          <a:prstGeom prst="rect">
+            <a:avLst/>
+          </a:prstGeom>
+          <a:noFill/>
+        </p:spPr>
+        <p:txBody>
+          <a:bodyPr wrap="square">
+            <a:spAutoFit/>
+          </a:bodyPr>
+          <a:lstStyle/>
+          <a:p>
+            <a:pPr>
+              <a:lnSpc>
+                <a:spcPct val="115000"/>
+              </a:lnSpc>
+              <a:spcAft>
+                <a:spcPts val="1000"/>
+              </a:spcAft>
+            </a:pPr>
+            <a:r>
+              <a:rPr sz="1250" b="1">
+                <a:solidFill>
+                  <a:srgbClr val="CC0E1E"/>
+                </a:solidFill>
+                <a:latin typeface="Calibri"/>
+              </a:rPr>
+              <a:t>—  </a:t>
+            </a:r>
+            <a:r>
+              <a:rPr sz="1250">
+                <a:solidFill>
+                  <a:srgbClr val="1A1A1A"/>
+                </a:solidFill>
+                <a:latin typeface="Calibri"/>
+              </a:rPr>
+              <a:t>ISZE reviews the proposal against network data and fit.</a:t>
+            </a:r>
+          </a:p>
+        </p:txBody>
+      </p:sp>
+      <p:sp>
+        <p:nvSpPr>
+          <p:cNvPr id="16" name="Rounded Rectangle 15"/>
+          <p:cNvSpPr/>
+          <p:nvPr/>
+        </p:nvSpPr>
+        <p:spPr>
+          <a:xfrm>
+            <a:off x="6163056" y="1234440"/>
+            <a:ext cx="2798064" cy="3108960"/>
+          </a:xfrm>
+          <a:prstGeom prst="roundRect">
+            <a:avLst>
+              <a:gd name="adj" fmla="val 6000"/>
+            </a:avLst>
+          </a:prstGeom>
+          <a:solidFill>
+            <a:srgbClr val="ECECEC"/>
+          </a:solidFill>
+          <a:ln>
+            <a:noFill/>
+          </a:ln>
+          <a:effectLst/>
+        </p:spPr>
+        <p:style>
+          <a:lnRef idx="1">
+            <a:schemeClr val="accent1"/>
+          </a:lnRef>
+          <a:fillRef idx="3">
+            <a:schemeClr val="accent1"/>
+          </a:fillRef>
+          <a:effectRef idx="2">
+            <a:schemeClr val="accent1"/>
+          </a:effectRef>
+          <a:fontRef idx="minor">
+            <a:schemeClr val="lt1"/>
+          </a:fontRef>
+        </p:style>
+        <p:txBody>
+          <a:bodyPr rtlCol="0" anchor="ctr"/>
+          <a:lstStyle/>
+          <a:p>
+            <a:pPr algn="ctr"/>
+          </a:p>
+        </p:txBody>
+      </p:sp>
+      <p:sp>
+        <p:nvSpPr>
+          <p:cNvPr id="17" name="Oval 16"/>
+          <p:cNvSpPr/>
+          <p:nvPr/>
+        </p:nvSpPr>
+        <p:spPr>
+          <a:xfrm>
+            <a:off x="6364224" y="1435608"/>
+            <a:ext cx="457200" cy="457200"/>
+          </a:xfrm>
+          <a:prstGeom prst="ellipse">
+            <a:avLst/>
+          </a:prstGeom>
+          <a:solidFill>
+            <a:srgbClr val="CC0E1E"/>
+          </a:solidFill>
+          <a:ln>
+            <a:noFill/>
+          </a:ln>
+          <a:effectLst/>
+        </p:spPr>
+        <p:style>
+          <a:lnRef idx="1">
+            <a:schemeClr val="accent1"/>
+          </a:lnRef>
+          <a:fillRef idx="3">
+            <a:schemeClr val="accent1"/>
+          </a:fillRef>
+          <a:effectRef idx="2">
+            <a:schemeClr val="accent1"/>
+          </a:effectRef>
+          <a:fontRef idx="minor">
+            <a:schemeClr val="lt1"/>
+          </a:fontRef>
+        </p:style>
+        <p:txBody>
+          <a:bodyPr rtlCol="0" anchor="ctr" lIns="0" rIns="0" tIns="0" bIns="0"/>
+          <a:lstStyle/>
+          <a:p>
+            <a:pPr algn="ctr"/>
+            <a:r>
+              <a:rPr sz="1800" b="1">
+                <a:solidFill>
+                  <a:srgbClr val="FFFFFF"/>
+                </a:solidFill>
+                <a:latin typeface="Calibri"/>
+              </a:rPr>
+              <a:t>3</a:t>
+            </a:r>
+          </a:p>
+        </p:txBody>
+      </p:sp>
+      <p:sp>
+        <p:nvSpPr>
+          <p:cNvPr id="18" name="TextBox 17"/>
+          <p:cNvSpPr txBox="1"/>
+          <p:nvPr/>
+        </p:nvSpPr>
+        <p:spPr>
+          <a:xfrm>
+            <a:off x="6986016" y="1435608"/>
+            <a:ext cx="1792224" cy="411480"/>
+          </a:xfrm>
+          <a:prstGeom prst="rect">
+            <a:avLst/>
+          </a:prstGeom>
+          <a:noFill/>
+        </p:spPr>
+        <p:txBody>
+          <a:bodyPr wrap="square">
+            <a:spAutoFit/>
+          </a:bodyPr>
+          <a:lstStyle/>
+          <a:p>
+            <a:pPr algn="l"/>
+            <a:r>
+              <a:rPr sz="1500" b="1">
+                <a:solidFill>
+                  <a:srgbClr val="1A1A1A"/>
+                </a:solidFill>
+                <a:latin typeface="Calibri"/>
+              </a:rPr>
+              <a:t>Counter-proposal</a:t>
+            </a:r>
+          </a:p>
+        </p:txBody>
+      </p:sp>
+      <p:sp>
+        <p:nvSpPr>
+          <p:cNvPr id="19" name="TextBox 18"/>
+          <p:cNvSpPr txBox="1"/>
+          <p:nvPr/>
+        </p:nvSpPr>
+        <p:spPr>
+          <a:xfrm>
+            <a:off x="6455664" y="2011680"/>
+            <a:ext cx="2249424" cy="2194560"/>
+          </a:xfrm>
+          <a:prstGeom prst="rect">
+            <a:avLst/>
+          </a:prstGeom>
+          <a:noFill/>
+        </p:spPr>
+        <p:txBody>
+          <a:bodyPr wrap="square">
+            <a:spAutoFit/>
+          </a:bodyPr>
+          <a:lstStyle/>
+          <a:p>
+            <a:pPr>
+              <a:lnSpc>
+                <a:spcPct val="115000"/>
+              </a:lnSpc>
+              <a:spcAft>
+                <a:spcPts val="1000"/>
+              </a:spcAft>
+            </a:pPr>
+            <a:r>
+              <a:rPr sz="1250" b="1">
+                <a:solidFill>
+                  <a:srgbClr val="CC0E1E"/>
+                </a:solidFill>
+                <a:latin typeface="Calibri"/>
+              </a:rPr>
+              <a:t>—  </a:t>
+            </a:r>
+            <a:r>
+              <a:rPr sz="1250">
+                <a:solidFill>
+                  <a:srgbClr val="1A1A1A"/>
+                </a:solidFill>
+                <a:latin typeface="Calibri"/>
+              </a:rPr>
+              <a:t>ISZE returns a counter-proposal where needed.</a:t>
+            </a:r>
+          </a:p>
+        </p:txBody>
+      </p:sp>
+      <p:sp>
+        <p:nvSpPr>
+          <p:cNvPr id="20" name="Rounded Rectangle 19"/>
+          <p:cNvSpPr/>
+          <p:nvPr/>
+        </p:nvSpPr>
+        <p:spPr>
+          <a:xfrm>
+            <a:off x="9098280" y="1234440"/>
+            <a:ext cx="2798064" cy="3108960"/>
+          </a:xfrm>
+          <a:prstGeom prst="roundRect">
+            <a:avLst>
+              <a:gd name="adj" fmla="val 6000"/>
+            </a:avLst>
+          </a:prstGeom>
+          <a:solidFill>
+            <a:srgbClr val="ECECEC"/>
+          </a:solidFill>
+          <a:ln>
+            <a:noFill/>
+          </a:ln>
+          <a:effectLst/>
+        </p:spPr>
+        <p:style>
+          <a:lnRef idx="1">
+            <a:schemeClr val="accent1"/>
+          </a:lnRef>
+          <a:fillRef idx="3">
+            <a:schemeClr val="accent1"/>
+          </a:fillRef>
+          <a:effectRef idx="2">
+            <a:schemeClr val="accent1"/>
+          </a:effectRef>
+          <a:fontRef idx="minor">
+            <a:schemeClr val="lt1"/>
+          </a:fontRef>
+        </p:style>
+        <p:txBody>
+          <a:bodyPr rtlCol="0" anchor="ctr"/>
+          <a:lstStyle/>
+          <a:p>
+            <a:pPr algn="ctr"/>
+          </a:p>
+        </p:txBody>
+      </p:sp>
+      <p:sp>
+        <p:nvSpPr>
+          <p:cNvPr id="21" name="Oval 20"/>
+          <p:cNvSpPr/>
+          <p:nvPr/>
+        </p:nvSpPr>
+        <p:spPr>
+          <a:xfrm>
+            <a:off x="9299448" y="1435608"/>
+            <a:ext cx="457200" cy="457200"/>
+          </a:xfrm>
+          <a:prstGeom prst="ellipse">
+            <a:avLst/>
+          </a:prstGeom>
+          <a:solidFill>
+            <a:srgbClr val="CC0E1E"/>
+          </a:solidFill>
+          <a:ln>
+            <a:noFill/>
+          </a:ln>
+          <a:effectLst/>
+        </p:spPr>
+        <p:style>
+          <a:lnRef idx="1">
+            <a:schemeClr val="accent1"/>
+          </a:lnRef>
+          <a:fillRef idx="3">
+            <a:schemeClr val="accent1"/>
+          </a:fillRef>
+          <a:effectRef idx="2">
+            <a:schemeClr val="accent1"/>
+          </a:effectRef>
+          <a:fontRef idx="minor">
+            <a:schemeClr val="lt1"/>
+          </a:fontRef>
+        </p:style>
+        <p:txBody>
+          <a:bodyPr rtlCol="0" anchor="ctr" lIns="0" rIns="0" tIns="0" bIns="0"/>
+          <a:lstStyle/>
+          <a:p>
+            <a:pPr algn="ctr"/>
+            <a:r>
+              <a:rPr sz="1800" b="1">
+                <a:solidFill>
+                  <a:srgbClr val="FFFFFF"/>
+                </a:solidFill>
+                <a:latin typeface="Calibri"/>
+              </a:rPr>
+              <a:t>4</a:t>
+            </a:r>
+          </a:p>
+        </p:txBody>
+      </p:sp>
+      <p:sp>
+        <p:nvSpPr>
+          <p:cNvPr id="22" name="TextBox 21"/>
+          <p:cNvSpPr txBox="1"/>
+          <p:nvPr/>
+        </p:nvSpPr>
+        <p:spPr>
+          <a:xfrm>
+            <a:off x="9921240" y="1435608"/>
+            <a:ext cx="1792224" cy="411480"/>
+          </a:xfrm>
+          <a:prstGeom prst="rect">
+            <a:avLst/>
+          </a:prstGeom>
+          <a:noFill/>
+        </p:spPr>
+        <p:txBody>
+          <a:bodyPr wrap="square">
+            <a:spAutoFit/>
+          </a:bodyPr>
+          <a:lstStyle/>
+          <a:p>
+            <a:pPr algn="l"/>
+            <a:r>
+              <a:rPr sz="1500" b="1">
+                <a:solidFill>
+                  <a:srgbClr val="1A1A1A"/>
+                </a:solidFill>
+                <a:latin typeface="Calibri"/>
+              </a:rPr>
+              <a:t>Final approval</a:t>
+            </a:r>
+          </a:p>
+        </p:txBody>
+      </p:sp>
+      <p:sp>
+        <p:nvSpPr>
+          <p:cNvPr id="23" name="TextBox 22"/>
+          <p:cNvSpPr txBox="1"/>
+          <p:nvPr/>
+        </p:nvSpPr>
+        <p:spPr>
+          <a:xfrm>
+            <a:off x="9390888" y="2011680"/>
+            <a:ext cx="2249424" cy="2194560"/>
+          </a:xfrm>
+          <a:prstGeom prst="rect">
+            <a:avLst/>
+          </a:prstGeom>
+          <a:noFill/>
+        </p:spPr>
+        <p:txBody>
+          <a:bodyPr wrap="square">
+            <a:spAutoFit/>
+          </a:bodyPr>
+          <a:lstStyle/>
+          <a:p>
+            <a:pPr>
+              <a:lnSpc>
+                <a:spcPct val="115000"/>
+              </a:lnSpc>
+              <a:spcAft>
+                <a:spcPts val="1000"/>
+              </a:spcAft>
+            </a:pPr>
+            <a:r>
+              <a:rPr sz="1250" b="1">
+                <a:solidFill>
+                  <a:srgbClr val="CC0E1E"/>
+                </a:solidFill>
+                <a:latin typeface="Calibri"/>
+              </a:rPr>
+              <a:t>—  </a:t>
+            </a:r>
+            <a:r>
+              <a:rPr sz="1250">
+                <a:solidFill>
+                  <a:srgbClr val="1A1A1A"/>
+                </a:solidFill>
+                <a:latin typeface="Calibri"/>
+              </a:rPr>
+              <a:t>Signed off by ISZE management.</a:t>
+            </a:r>
+          </a:p>
+        </p:txBody>
+      </p:sp>
+      <p:sp>
+        <p:nvSpPr>
+          <p:cNvPr id="24" name="TextBox 23"/>
+          <p:cNvSpPr txBox="1"/>
+          <p:nvPr/>
+        </p:nvSpPr>
+        <p:spPr>
+          <a:xfrm>
+            <a:off x="292608" y="4572000"/>
+            <a:ext cx="8595360" cy="365760"/>
+          </a:xfrm>
+          <a:prstGeom prst="rect">
+            <a:avLst/>
+          </a:prstGeom>
+          <a:noFill/>
+        </p:spPr>
+        <p:txBody>
+          <a:bodyPr wrap="square">
+            <a:spAutoFit/>
+          </a:bodyPr>
+          <a:lstStyle/>
+          <a:p>
+            <a:pPr algn="l"/>
+            <a:r>
+              <a:rPr sz="1400" b="1">
+                <a:solidFill>
+                  <a:srgbClr val="CC0E1E"/>
+                </a:solidFill>
+                <a:latin typeface="Calibri"/>
+              </a:rPr>
+              <a:t>Purpose: higher turnover for both sides.</a:t>
             </a:r>
           </a:p>
         </p:txBody>
@@ -7400,7 +8115,7 @@
                 </a:solidFill>
                 <a:latin typeface="Calibri"/>
               </a:rPr>
-              <a:t>SPA</a:t>
+              <a:t>R&amp;M</a:t>
             </a:r>
           </a:p>
         </p:txBody>
@@ -7435,7 +8150,7 @@
                 </a:solidFill>
                 <a:latin typeface="Calibri"/>
               </a:rPr>
-              <a:t>SPA</a:t>
+              <a:t>R&amp;M — let's align on the market</a:t>
             </a:r>
           </a:p>
         </p:txBody>
@@ -7526,8 +8241,8 @@
         </p:nvSpPr>
         <p:spPr>
           <a:xfrm>
-            <a:off x="292608" y="1234440"/>
-            <a:ext cx="2798064" cy="3108960"/>
+            <a:off x="292608" y="1188720"/>
+            <a:ext cx="5486400" cy="4023360"/>
           </a:xfrm>
           <a:prstGeom prst="roundRect">
             <a:avLst>
@@ -7572,7 +8287,7 @@
         </p:nvSpPr>
         <p:spPr>
           <a:xfrm>
-            <a:off x="493776" y="1435608"/>
+            <a:off x="493776" y="1389888"/>
             <a:ext cx="457200" cy="457200"/>
           </a:xfrm>
           <a:prstGeom prst="ellipse">
@@ -7612,7 +8327,7 @@
                 </a:solidFill>
                 <a:latin typeface="Calibri"/>
               </a:rPr>
-              <a:t>1</a:t>
+              <a:t>M</a:t>
             </a:r>
           </a:p>
         </p:txBody>
@@ -7625,8 +8340,8 @@
         </p:nvSpPr>
         <p:spPr>
           <a:xfrm>
-            <a:off x="1115568" y="1435608"/>
-            <a:ext cx="1792224" cy="411480"/>
+            <a:off x="1115568" y="1389888"/>
+            <a:ext cx="4480560" cy="411480"/>
           </a:xfrm>
           <a:prstGeom prst="rect">
             <a:avLst/>
@@ -7647,7 +8362,7 @@
                 </a:solidFill>
                 <a:latin typeface="Calibri"/>
               </a:rPr>
-              <a:t>PETROS proposal</a:t>
+              <a:t>Market</a:t>
             </a:r>
           </a:p>
         </p:txBody>
@@ -7660,8 +8375,8 @@
         </p:nvSpPr>
         <p:spPr>
           <a:xfrm>
-            <a:off x="585216" y="2011680"/>
-            <a:ext cx="2249424" cy="2194560"/>
+            <a:off x="585216" y="1965960"/>
+            <a:ext cx="4937760" cy="3108960"/>
           </a:xfrm>
           <a:prstGeom prst="rect">
             <a:avLst/>
@@ -7698,166 +8413,9 @@
                 </a:solidFill>
                 <a:latin typeface="Calibri"/>
               </a:rPr>
-              <a:t>Petros Petropoulos submits a proposed parts list.</a:t>
-            </a:r>
-          </a:p>
-        </p:txBody>
-      </p:sp>
-      <p:sp>
-        <p:nvSpPr>
-          <p:cNvPr id="12" name="Rounded Rectangle 11"/>
-          <p:cNvSpPr/>
-          <p:nvPr/>
-        </p:nvSpPr>
-        <p:spPr>
-          <a:xfrm>
-            <a:off x="3227832" y="1234440"/>
-            <a:ext cx="2798064" cy="3108960"/>
-          </a:xfrm>
-          <a:prstGeom prst="roundRect">
-            <a:avLst>
-              <a:gd name="adj" fmla="val 6000"/>
-            </a:avLst>
-          </a:prstGeom>
-          <a:solidFill>
-            <a:srgbClr val="ECECEC"/>
-          </a:solidFill>
-          <a:ln>
-            <a:noFill/>
-          </a:ln>
-          <a:effectLst/>
-        </p:spPr>
-        <p:style>
-          <a:lnRef idx="1">
-            <a:schemeClr val="accent1"/>
-          </a:lnRef>
-          <a:fillRef idx="3">
-            <a:schemeClr val="accent1"/>
-          </a:fillRef>
-          <a:effectRef idx="2">
-            <a:schemeClr val="accent1"/>
-          </a:effectRef>
-          <a:fontRef idx="minor">
-            <a:schemeClr val="lt1"/>
-          </a:fontRef>
-        </p:style>
-        <p:txBody>
-          <a:bodyPr rtlCol="0" anchor="ctr"/>
-          <a:lstStyle/>
-          <a:p>
-            <a:pPr algn="ctr"/>
-          </a:p>
-        </p:txBody>
-      </p:sp>
-      <p:sp>
-        <p:nvSpPr>
-          <p:cNvPr id="13" name="Oval 12"/>
-          <p:cNvSpPr/>
-          <p:nvPr/>
-        </p:nvSpPr>
-        <p:spPr>
-          <a:xfrm>
-            <a:off x="3429000" y="1435608"/>
-            <a:ext cx="457200" cy="457200"/>
-          </a:xfrm>
-          <a:prstGeom prst="ellipse">
-            <a:avLst/>
-          </a:prstGeom>
-          <a:solidFill>
-            <a:srgbClr val="CC0E1E"/>
-          </a:solidFill>
-          <a:ln>
-            <a:noFill/>
-          </a:ln>
-          <a:effectLst/>
-        </p:spPr>
-        <p:style>
-          <a:lnRef idx="1">
-            <a:schemeClr val="accent1"/>
-          </a:lnRef>
-          <a:fillRef idx="3">
-            <a:schemeClr val="accent1"/>
-          </a:fillRef>
-          <a:effectRef idx="2">
-            <a:schemeClr val="accent1"/>
-          </a:effectRef>
-          <a:fontRef idx="minor">
-            <a:schemeClr val="lt1"/>
-          </a:fontRef>
-        </p:style>
-        <p:txBody>
-          <a:bodyPr rtlCol="0" anchor="ctr" lIns="0" rIns="0" tIns="0" bIns="0"/>
-          <a:lstStyle/>
-          <a:p>
-            <a:pPr algn="ctr"/>
-            <a:r>
-              <a:rPr sz="1800" b="1">
-                <a:solidFill>
-                  <a:srgbClr val="FFFFFF"/>
-                </a:solidFill>
-                <a:latin typeface="Calibri"/>
-              </a:rPr>
-              <a:t>2</a:t>
-            </a:r>
-          </a:p>
-        </p:txBody>
-      </p:sp>
-      <p:sp>
-        <p:nvSpPr>
-          <p:cNvPr id="14" name="TextBox 13"/>
-          <p:cNvSpPr txBox="1"/>
-          <p:nvPr/>
-        </p:nvSpPr>
-        <p:spPr>
-          <a:xfrm>
-            <a:off x="4050792" y="1435608"/>
-            <a:ext cx="1792224" cy="411480"/>
-          </a:xfrm>
-          <a:prstGeom prst="rect">
-            <a:avLst/>
-          </a:prstGeom>
-          <a:noFill/>
-        </p:spPr>
-        <p:txBody>
-          <a:bodyPr wrap="square">
-            <a:spAutoFit/>
-          </a:bodyPr>
-          <a:lstStyle/>
-          <a:p>
-            <a:pPr algn="l"/>
-            <a:r>
-              <a:rPr sz="1500" b="1">
-                <a:solidFill>
-                  <a:srgbClr val="1A1A1A"/>
-                </a:solidFill>
-                <a:latin typeface="Calibri"/>
-              </a:rPr>
-              <a:t>ISZE review</a:t>
-            </a:r>
-          </a:p>
-        </p:txBody>
-      </p:sp>
-      <p:sp>
-        <p:nvSpPr>
-          <p:cNvPr id="15" name="TextBox 14"/>
-          <p:cNvSpPr txBox="1"/>
-          <p:nvPr/>
-        </p:nvSpPr>
-        <p:spPr>
-          <a:xfrm>
-            <a:off x="3520440" y="2011680"/>
-            <a:ext cx="2249424" cy="2194560"/>
-          </a:xfrm>
-          <a:prstGeom prst="rect">
-            <a:avLst/>
-          </a:prstGeom>
-          <a:noFill/>
-        </p:spPr>
-        <p:txBody>
-          <a:bodyPr wrap="square">
-            <a:spAutoFit/>
-          </a:bodyPr>
-          <a:lstStyle/>
+              <a:t>How is the market moving for you right now?</a:t>
+            </a:r>
+          </a:p>
           <a:p>
             <a:pPr>
               <a:lnSpc>
@@ -7883,166 +8441,9 @@
                 </a:solidFill>
                 <a:latin typeface="Calibri"/>
               </a:rPr>
-              <a:t>ISZE reviews the proposal against network data and fit.</a:t>
-            </a:r>
-          </a:p>
-        </p:txBody>
-      </p:sp>
-      <p:sp>
-        <p:nvSpPr>
-          <p:cNvPr id="16" name="Rounded Rectangle 15"/>
-          <p:cNvSpPr/>
-          <p:nvPr/>
-        </p:nvSpPr>
-        <p:spPr>
-          <a:xfrm>
-            <a:off x="6163056" y="1234440"/>
-            <a:ext cx="2798064" cy="3108960"/>
-          </a:xfrm>
-          <a:prstGeom prst="roundRect">
-            <a:avLst>
-              <a:gd name="adj" fmla="val 6000"/>
-            </a:avLst>
-          </a:prstGeom>
-          <a:solidFill>
-            <a:srgbClr val="ECECEC"/>
-          </a:solidFill>
-          <a:ln>
-            <a:noFill/>
-          </a:ln>
-          <a:effectLst/>
-        </p:spPr>
-        <p:style>
-          <a:lnRef idx="1">
-            <a:schemeClr val="accent1"/>
-          </a:lnRef>
-          <a:fillRef idx="3">
-            <a:schemeClr val="accent1"/>
-          </a:fillRef>
-          <a:effectRef idx="2">
-            <a:schemeClr val="accent1"/>
-          </a:effectRef>
-          <a:fontRef idx="minor">
-            <a:schemeClr val="lt1"/>
-          </a:fontRef>
-        </p:style>
-        <p:txBody>
-          <a:bodyPr rtlCol="0" anchor="ctr"/>
-          <a:lstStyle/>
-          <a:p>
-            <a:pPr algn="ctr"/>
-          </a:p>
-        </p:txBody>
-      </p:sp>
-      <p:sp>
-        <p:nvSpPr>
-          <p:cNvPr id="17" name="Oval 16"/>
-          <p:cNvSpPr/>
-          <p:nvPr/>
-        </p:nvSpPr>
-        <p:spPr>
-          <a:xfrm>
-            <a:off x="6364224" y="1435608"/>
-            <a:ext cx="457200" cy="457200"/>
-          </a:xfrm>
-          <a:prstGeom prst="ellipse">
-            <a:avLst/>
-          </a:prstGeom>
-          <a:solidFill>
-            <a:srgbClr val="CC0E1E"/>
-          </a:solidFill>
-          <a:ln>
-            <a:noFill/>
-          </a:ln>
-          <a:effectLst/>
-        </p:spPr>
-        <p:style>
-          <a:lnRef idx="1">
-            <a:schemeClr val="accent1"/>
-          </a:lnRef>
-          <a:fillRef idx="3">
-            <a:schemeClr val="accent1"/>
-          </a:fillRef>
-          <a:effectRef idx="2">
-            <a:schemeClr val="accent1"/>
-          </a:effectRef>
-          <a:fontRef idx="minor">
-            <a:schemeClr val="lt1"/>
-          </a:fontRef>
-        </p:style>
-        <p:txBody>
-          <a:bodyPr rtlCol="0" anchor="ctr" lIns="0" rIns="0" tIns="0" bIns="0"/>
-          <a:lstStyle/>
-          <a:p>
-            <a:pPr algn="ctr"/>
-            <a:r>
-              <a:rPr sz="1800" b="1">
-                <a:solidFill>
-                  <a:srgbClr val="FFFFFF"/>
-                </a:solidFill>
-                <a:latin typeface="Calibri"/>
-              </a:rPr>
-              <a:t>3</a:t>
-            </a:r>
-          </a:p>
-        </p:txBody>
-      </p:sp>
-      <p:sp>
-        <p:nvSpPr>
-          <p:cNvPr id="18" name="TextBox 17"/>
-          <p:cNvSpPr txBox="1"/>
-          <p:nvPr/>
-        </p:nvSpPr>
-        <p:spPr>
-          <a:xfrm>
-            <a:off x="6986016" y="1435608"/>
-            <a:ext cx="1792224" cy="411480"/>
-          </a:xfrm>
-          <a:prstGeom prst="rect">
-            <a:avLst/>
-          </a:prstGeom>
-          <a:noFill/>
-        </p:spPr>
-        <p:txBody>
-          <a:bodyPr wrap="square">
-            <a:spAutoFit/>
-          </a:bodyPr>
-          <a:lstStyle/>
-          <a:p>
-            <a:pPr algn="l"/>
-            <a:r>
-              <a:rPr sz="1500" b="1">
-                <a:solidFill>
-                  <a:srgbClr val="1A1A1A"/>
-                </a:solidFill>
-                <a:latin typeface="Calibri"/>
-              </a:rPr>
-              <a:t>Counter-proposal</a:t>
-            </a:r>
-          </a:p>
-        </p:txBody>
-      </p:sp>
-      <p:sp>
-        <p:nvSpPr>
-          <p:cNvPr id="19" name="TextBox 18"/>
-          <p:cNvSpPr txBox="1"/>
-          <p:nvPr/>
-        </p:nvSpPr>
-        <p:spPr>
-          <a:xfrm>
-            <a:off x="6455664" y="2011680"/>
-            <a:ext cx="2249424" cy="2194560"/>
-          </a:xfrm>
-          <a:prstGeom prst="rect">
-            <a:avLst/>
-          </a:prstGeom>
-          <a:noFill/>
-        </p:spPr>
-        <p:txBody>
-          <a:bodyPr wrap="square">
-            <a:spAutoFit/>
-          </a:bodyPr>
-          <a:lstStyle/>
+              <a:t>How much of your volume is fleet business rather than retail?</a:t>
+            </a:r>
+          </a:p>
           <a:p>
             <a:pPr>
               <a:lnSpc>
@@ -8068,166 +8469,9 @@
                 </a:solidFill>
                 <a:latin typeface="Calibri"/>
               </a:rPr>
-              <a:t>ISZE returns a counter-proposal where needed.</a:t>
-            </a:r>
-          </a:p>
-        </p:txBody>
-      </p:sp>
-      <p:sp>
-        <p:nvSpPr>
-          <p:cNvPr id="20" name="Rounded Rectangle 19"/>
-          <p:cNvSpPr/>
-          <p:nvPr/>
-        </p:nvSpPr>
-        <p:spPr>
-          <a:xfrm>
-            <a:off x="9098280" y="1234440"/>
-            <a:ext cx="2798064" cy="3108960"/>
-          </a:xfrm>
-          <a:prstGeom prst="roundRect">
-            <a:avLst>
-              <a:gd name="adj" fmla="val 6000"/>
-            </a:avLst>
-          </a:prstGeom>
-          <a:solidFill>
-            <a:srgbClr val="ECECEC"/>
-          </a:solidFill>
-          <a:ln>
-            <a:noFill/>
-          </a:ln>
-          <a:effectLst/>
-        </p:spPr>
-        <p:style>
-          <a:lnRef idx="1">
-            <a:schemeClr val="accent1"/>
-          </a:lnRef>
-          <a:fillRef idx="3">
-            <a:schemeClr val="accent1"/>
-          </a:fillRef>
-          <a:effectRef idx="2">
-            <a:schemeClr val="accent1"/>
-          </a:effectRef>
-          <a:fontRef idx="minor">
-            <a:schemeClr val="lt1"/>
-          </a:fontRef>
-        </p:style>
-        <p:txBody>
-          <a:bodyPr rtlCol="0" anchor="ctr"/>
-          <a:lstStyle/>
-          <a:p>
-            <a:pPr algn="ctr"/>
-          </a:p>
-        </p:txBody>
-      </p:sp>
-      <p:sp>
-        <p:nvSpPr>
-          <p:cNvPr id="21" name="Oval 20"/>
-          <p:cNvSpPr/>
-          <p:nvPr/>
-        </p:nvSpPr>
-        <p:spPr>
-          <a:xfrm>
-            <a:off x="9299448" y="1435608"/>
-            <a:ext cx="457200" cy="457200"/>
-          </a:xfrm>
-          <a:prstGeom prst="ellipse">
-            <a:avLst/>
-          </a:prstGeom>
-          <a:solidFill>
-            <a:srgbClr val="CC0E1E"/>
-          </a:solidFill>
-          <a:ln>
-            <a:noFill/>
-          </a:ln>
-          <a:effectLst/>
-        </p:spPr>
-        <p:style>
-          <a:lnRef idx="1">
-            <a:schemeClr val="accent1"/>
-          </a:lnRef>
-          <a:fillRef idx="3">
-            <a:schemeClr val="accent1"/>
-          </a:fillRef>
-          <a:effectRef idx="2">
-            <a:schemeClr val="accent1"/>
-          </a:effectRef>
-          <a:fontRef idx="minor">
-            <a:schemeClr val="lt1"/>
-          </a:fontRef>
-        </p:style>
-        <p:txBody>
-          <a:bodyPr rtlCol="0" anchor="ctr" lIns="0" rIns="0" tIns="0" bIns="0"/>
-          <a:lstStyle/>
-          <a:p>
-            <a:pPr algn="ctr"/>
-            <a:r>
-              <a:rPr sz="1800" b="1">
-                <a:solidFill>
-                  <a:srgbClr val="FFFFFF"/>
-                </a:solidFill>
-                <a:latin typeface="Calibri"/>
-              </a:rPr>
-              <a:t>4</a:t>
-            </a:r>
-          </a:p>
-        </p:txBody>
-      </p:sp>
-      <p:sp>
-        <p:nvSpPr>
-          <p:cNvPr id="22" name="TextBox 21"/>
-          <p:cNvSpPr txBox="1"/>
-          <p:nvPr/>
-        </p:nvSpPr>
-        <p:spPr>
-          <a:xfrm>
-            <a:off x="9921240" y="1435608"/>
-            <a:ext cx="1792224" cy="411480"/>
-          </a:xfrm>
-          <a:prstGeom prst="rect">
-            <a:avLst/>
-          </a:prstGeom>
-          <a:noFill/>
-        </p:spPr>
-        <p:txBody>
-          <a:bodyPr wrap="square">
-            <a:spAutoFit/>
-          </a:bodyPr>
-          <a:lstStyle/>
-          <a:p>
-            <a:pPr algn="l"/>
-            <a:r>
-              <a:rPr sz="1500" b="1">
-                <a:solidFill>
-                  <a:srgbClr val="1A1A1A"/>
-                </a:solidFill>
-                <a:latin typeface="Calibri"/>
-              </a:rPr>
-              <a:t>Final approval</a:t>
-            </a:r>
-          </a:p>
-        </p:txBody>
-      </p:sp>
-      <p:sp>
-        <p:nvSpPr>
-          <p:cNvPr id="23" name="TextBox 22"/>
-          <p:cNvSpPr txBox="1"/>
-          <p:nvPr/>
-        </p:nvSpPr>
-        <p:spPr>
-          <a:xfrm>
-            <a:off x="9390888" y="2011680"/>
-            <a:ext cx="2249424" cy="2194560"/>
-          </a:xfrm>
-          <a:prstGeom prst="rect">
-            <a:avLst/>
-          </a:prstGeom>
-          <a:noFill/>
-        </p:spPr>
-        <p:txBody>
-          <a:bodyPr wrap="square">
-            <a:spAutoFit/>
-          </a:bodyPr>
-          <a:lstStyle/>
+              <a:t>Where do you see the biggest hurdles this year?</a:t>
+            </a:r>
+          </a:p>
           <a:p>
             <a:pPr>
               <a:lnSpc>
@@ -8253,21 +8497,120 @@
                 </a:solidFill>
                 <a:latin typeface="Calibri"/>
               </a:rPr>
-              <a:t>Signed off by ISZE management.</a:t>
-            </a:r>
-          </a:p>
-        </p:txBody>
-      </p:sp>
-      <p:sp>
-        <p:nvSpPr>
-          <p:cNvPr id="24" name="TextBox 23"/>
+              <a:t>Where are your real strengths in this segment?</a:t>
+            </a:r>
+          </a:p>
+        </p:txBody>
+      </p:sp>
+      <p:sp>
+        <p:nvSpPr>
+          <p:cNvPr id="12" name="Rounded Rectangle 11"/>
+          <p:cNvSpPr/>
+          <p:nvPr/>
+        </p:nvSpPr>
+        <p:spPr>
+          <a:xfrm>
+            <a:off x="5943600" y="1188720"/>
+            <a:ext cx="5943600" cy="4023360"/>
+          </a:xfrm>
+          <a:prstGeom prst="roundRect">
+            <a:avLst>
+              <a:gd name="adj" fmla="val 6000"/>
+            </a:avLst>
+          </a:prstGeom>
+          <a:solidFill>
+            <a:srgbClr val="ECECEC"/>
+          </a:solidFill>
+          <a:ln>
+            <a:noFill/>
+          </a:ln>
+          <a:effectLst/>
+        </p:spPr>
+        <p:style>
+          <a:lnRef idx="1">
+            <a:schemeClr val="accent1"/>
+          </a:lnRef>
+          <a:fillRef idx="3">
+            <a:schemeClr val="accent1"/>
+          </a:fillRef>
+          <a:effectRef idx="2">
+            <a:schemeClr val="accent1"/>
+          </a:effectRef>
+          <a:fontRef idx="minor">
+            <a:schemeClr val="lt1"/>
+          </a:fontRef>
+        </p:style>
+        <p:txBody>
+          <a:bodyPr rtlCol="0" anchor="ctr"/>
+          <a:lstStyle/>
+          <a:p>
+            <a:pPr algn="ctr"/>
+          </a:p>
+        </p:txBody>
+      </p:sp>
+      <p:sp>
+        <p:nvSpPr>
+          <p:cNvPr id="13" name="Oval 12"/>
+          <p:cNvSpPr/>
+          <p:nvPr/>
+        </p:nvSpPr>
+        <p:spPr>
+          <a:xfrm>
+            <a:off x="6144768" y="1389888"/>
+            <a:ext cx="457200" cy="457200"/>
+          </a:xfrm>
+          <a:prstGeom prst="ellipse">
+            <a:avLst/>
+          </a:prstGeom>
+          <a:solidFill>
+            <a:srgbClr val="CC0E1E"/>
+          </a:solidFill>
+          <a:ln>
+            <a:noFill/>
+          </a:ln>
+          <a:effectLst/>
+        </p:spPr>
+        <p:style>
+          <a:lnRef idx="1">
+            <a:schemeClr val="accent1"/>
+          </a:lnRef>
+          <a:fillRef idx="3">
+            <a:schemeClr val="accent1"/>
+          </a:fillRef>
+          <a:effectRef idx="2">
+            <a:schemeClr val="accent1"/>
+          </a:effectRef>
+          <a:fontRef idx="minor">
+            <a:schemeClr val="lt1"/>
+          </a:fontRef>
+        </p:style>
+        <p:txBody>
+          <a:bodyPr rtlCol="0" anchor="ctr" lIns="0" rIns="0" tIns="0" bIns="0"/>
+          <a:lstStyle/>
+          <a:p>
+            <a:pPr algn="ctr"/>
+            <a:r>
+              <a:rPr sz="1800" b="1">
+                <a:solidFill>
+                  <a:srgbClr val="FFFFFF"/>
+                </a:solidFill>
+                <a:latin typeface="Calibri"/>
+              </a:rPr>
+              <a:t>S</a:t>
+            </a:r>
+          </a:p>
+        </p:txBody>
+      </p:sp>
+      <p:sp>
+        <p:nvSpPr>
+          <p:cNvPr id="14" name="TextBox 13"/>
           <p:cNvSpPr txBox="1"/>
           <p:nvPr/>
         </p:nvSpPr>
         <p:spPr>
           <a:xfrm>
-            <a:off x="292608" y="4572000"/>
-            <a:ext cx="8595360" cy="365760"/>
+            <a:off x="6766560" y="1389888"/>
+            <a:ext cx="4937760" cy="411480"/>
           </a:xfrm>
           <a:prstGeom prst="rect">
             <a:avLst/>
@@ -8282,13 +8625,148 @@
           <a:p>
             <a:pPr algn="l"/>
             <a:r>
-              <a:rPr sz="1400" b="1">
+              <a:rPr sz="1500" b="1">
+                <a:solidFill>
+                  <a:srgbClr val="1A1A1A"/>
+                </a:solidFill>
+                <a:latin typeface="Calibri"/>
+              </a:rPr>
+              <a:t>Servicing &amp; R&amp;M</a:t>
+            </a:r>
+          </a:p>
+        </p:txBody>
+      </p:sp>
+      <p:sp>
+        <p:nvSpPr>
+          <p:cNvPr id="15" name="TextBox 14"/>
+          <p:cNvSpPr txBox="1"/>
+          <p:nvPr/>
+        </p:nvSpPr>
+        <p:spPr>
+          <a:xfrm>
+            <a:off x="6236208" y="1965960"/>
+            <a:ext cx="5394960" cy="3108960"/>
+          </a:xfrm>
+          <a:prstGeom prst="rect">
+            <a:avLst/>
+          </a:prstGeom>
+          <a:noFill/>
+        </p:spPr>
+        <p:txBody>
+          <a:bodyPr wrap="square">
+            <a:spAutoFit/>
+          </a:bodyPr>
+          <a:lstStyle/>
+          <a:p>
+            <a:pPr>
+              <a:lnSpc>
+                <a:spcPct val="115000"/>
+              </a:lnSpc>
+              <a:spcAft>
+                <a:spcPts val="1000"/>
+              </a:spcAft>
+            </a:pPr>
+            <a:r>
+              <a:rPr sz="1250" b="1">
                 <a:solidFill>
                   <a:srgbClr val="CC0E1E"/>
                 </a:solidFill>
                 <a:latin typeface="Calibri"/>
               </a:rPr>
-              <a:t>Purpose: higher turnover for both sides.</a:t>
+              <a:t>—  </a:t>
+            </a:r>
+            <a:r>
+              <a:rPr sz="1250">
+                <a:solidFill>
+                  <a:srgbClr val="1A1A1A"/>
+                </a:solidFill>
+                <a:latin typeface="Calibri"/>
+              </a:rPr>
+              <a:t>Do you offer an R&amp;M or service-plan product today?</a:t>
+            </a:r>
+          </a:p>
+          <a:p>
+            <a:pPr>
+              <a:lnSpc>
+                <a:spcPct val="115000"/>
+              </a:lnSpc>
+              <a:spcAft>
+                <a:spcPts val="1000"/>
+              </a:spcAft>
+            </a:pPr>
+            <a:r>
+              <a:rPr sz="1250" b="1">
+                <a:solidFill>
+                  <a:srgbClr val="CC0E1E"/>
+                </a:solidFill>
+                <a:latin typeface="Calibri"/>
+              </a:rPr>
+              <a:t>—  </a:t>
+            </a:r>
+            <a:r>
+              <a:rPr sz="1250">
+                <a:solidFill>
+                  <a:srgbClr val="1A1A1A"/>
+                </a:solidFill>
+                <a:latin typeface="Calibri"/>
+              </a:rPr>
+              <a:t>What share of the parc do you retain for servicing after year three?</a:t>
+            </a:r>
+          </a:p>
+          <a:p>
+            <a:pPr>
+              <a:lnSpc>
+                <a:spcPct val="115000"/>
+              </a:lnSpc>
+              <a:spcAft>
+                <a:spcPts val="1000"/>
+              </a:spcAft>
+            </a:pPr>
+            <a:r>
+              <a:rPr sz="1250" b="1">
+                <a:solidFill>
+                  <a:srgbClr val="CC0E1E"/>
+                </a:solidFill>
+                <a:latin typeface="Calibri"/>
+              </a:rPr>
+              <a:t>—  </a:t>
+            </a:r>
+            <a:r>
+              <a:rPr sz="1250">
+                <a:solidFill>
+                  <a:srgbClr val="1A1A1A"/>
+                </a:solidFill>
+                <a:latin typeface="Calibri"/>
+              </a:rPr>
+              <a:t>Does R&amp;M business come bundled with fleet tenders — roughly what share?</a:t>
+            </a:r>
+          </a:p>
+          <a:p>
+            <a:pPr>
+              <a:lnSpc>
+                <a:spcPct val="115000"/>
+              </a:lnSpc>
+              <a:spcAft>
+                <a:spcPts val="1000"/>
+              </a:spcAft>
+            </a:pPr>
+            <a:r>
+              <a:rPr sz="1250" b="1">
+                <a:solidFill>
+                  <a:srgbClr val="CC0E1E"/>
+                </a:solidFill>
+                <a:latin typeface="Calibri"/>
+              </a:rPr>
+              <a:t>—  </a:t>
+            </a:r>
+            <a:r>
+              <a:rPr sz="1250">
+                <a:solidFill>
+                  <a:srgbClr val="1A1A1A"/>
+                </a:solidFill>
+                <a:latin typeface="Calibri"/>
+              </a:rPr>
+              <a:t>What would it take to bring more out-of-network servicing back?</a:t>
             </a:r>
           </a:p>
         </p:txBody>
@@ -8416,7 +8894,7 @@
                 </a:solidFill>
                 <a:latin typeface="Calibri"/>
               </a:rPr>
-              <a:t>R&amp;M</a:t>
+              <a:t>ASK</a:t>
             </a:r>
           </a:p>
         </p:txBody>
@@ -8451,7 +8929,7 @@
                 </a:solidFill>
                 <a:latin typeface="Calibri"/>
               </a:rPr>
-              <a:t>R&amp;M — let's align on the market</a:t>
+              <a:t>Part-level Sales-to-Dealer Data</a:t>
             </a:r>
           </a:p>
         </p:txBody>
@@ -8542,8 +9020,8 @@
         </p:nvSpPr>
         <p:spPr>
           <a:xfrm>
-            <a:off x="292608" y="1188720"/>
-            <a:ext cx="5486400" cy="4023360"/>
+            <a:off x="292608" y="1234440"/>
+            <a:ext cx="3611880" cy="2377440"/>
           </a:xfrm>
           <a:prstGeom prst="roundRect">
             <a:avLst>
@@ -8588,7 +9066,7 @@
         </p:nvSpPr>
         <p:spPr>
           <a:xfrm>
-            <a:off x="493776" y="1389888"/>
+            <a:off x="493776" y="1435608"/>
             <a:ext cx="457200" cy="457200"/>
           </a:xfrm>
           <a:prstGeom prst="ellipse">
@@ -8628,7 +9106,7 @@
                 </a:solidFill>
                 <a:latin typeface="Calibri"/>
               </a:rPr>
-              <a:t>M</a:t>
+              <a:t>1</a:t>
             </a:r>
           </a:p>
         </p:txBody>
@@ -8641,8 +9119,8 @@
         </p:nvSpPr>
         <p:spPr>
           <a:xfrm>
-            <a:off x="1115568" y="1389888"/>
-            <a:ext cx="4480560" cy="411480"/>
+            <a:off x="1115568" y="1435608"/>
+            <a:ext cx="2606040" cy="411480"/>
           </a:xfrm>
           <a:prstGeom prst="rect">
             <a:avLst/>
@@ -8663,7 +9141,7 @@
                 </a:solidFill>
                 <a:latin typeface="Calibri"/>
               </a:rPr>
-              <a:t>Market</a:t>
+              <a:t>The starting point</a:t>
             </a:r>
           </a:p>
         </p:txBody>
@@ -8676,8 +9154,8 @@
         </p:nvSpPr>
         <p:spPr>
           <a:xfrm>
-            <a:off x="585216" y="1965960"/>
-            <a:ext cx="4937760" cy="3108960"/>
+            <a:off x="585216" y="2011680"/>
+            <a:ext cx="3063240" cy="1463040"/>
           </a:xfrm>
           <a:prstGeom prst="rect">
             <a:avLst/>
@@ -8714,9 +9192,166 @@
                 </a:solidFill>
                 <a:latin typeface="Calibri"/>
               </a:rPr>
-              <a:t>How is the market moving for you right now?</a:t>
-            </a:r>
-          </a:p>
+              <a:t>We have no Sales-to-Dealer figures from you for FY2026. The ask is monthly Sales-to-Dealer, at part-number level.</a:t>
+            </a:r>
+          </a:p>
+        </p:txBody>
+      </p:sp>
+      <p:sp>
+        <p:nvSpPr>
+          <p:cNvPr id="12" name="Rounded Rectangle 11"/>
+          <p:cNvSpPr/>
+          <p:nvPr/>
+        </p:nvSpPr>
+        <p:spPr>
+          <a:xfrm>
+            <a:off x="4087368" y="1234440"/>
+            <a:ext cx="3611880" cy="2377440"/>
+          </a:xfrm>
+          <a:prstGeom prst="roundRect">
+            <a:avLst>
+              <a:gd name="adj" fmla="val 6000"/>
+            </a:avLst>
+          </a:prstGeom>
+          <a:solidFill>
+            <a:srgbClr val="ECECEC"/>
+          </a:solidFill>
+          <a:ln>
+            <a:noFill/>
+          </a:ln>
+          <a:effectLst/>
+        </p:spPr>
+        <p:style>
+          <a:lnRef idx="1">
+            <a:schemeClr val="accent1"/>
+          </a:lnRef>
+          <a:fillRef idx="3">
+            <a:schemeClr val="accent1"/>
+          </a:fillRef>
+          <a:effectRef idx="2">
+            <a:schemeClr val="accent1"/>
+          </a:effectRef>
+          <a:fontRef idx="minor">
+            <a:schemeClr val="lt1"/>
+          </a:fontRef>
+        </p:style>
+        <p:txBody>
+          <a:bodyPr rtlCol="0" anchor="ctr"/>
+          <a:lstStyle/>
+          <a:p>
+            <a:pPr algn="ctr"/>
+          </a:p>
+        </p:txBody>
+      </p:sp>
+      <p:sp>
+        <p:nvSpPr>
+          <p:cNvPr id="13" name="Oval 12"/>
+          <p:cNvSpPr/>
+          <p:nvPr/>
+        </p:nvSpPr>
+        <p:spPr>
+          <a:xfrm>
+            <a:off x="4288536" y="1435608"/>
+            <a:ext cx="457200" cy="457200"/>
+          </a:xfrm>
+          <a:prstGeom prst="ellipse">
+            <a:avLst/>
+          </a:prstGeom>
+          <a:solidFill>
+            <a:srgbClr val="CC0E1E"/>
+          </a:solidFill>
+          <a:ln>
+            <a:noFill/>
+          </a:ln>
+          <a:effectLst/>
+        </p:spPr>
+        <p:style>
+          <a:lnRef idx="1">
+            <a:schemeClr val="accent1"/>
+          </a:lnRef>
+          <a:fillRef idx="3">
+            <a:schemeClr val="accent1"/>
+          </a:fillRef>
+          <a:effectRef idx="2">
+            <a:schemeClr val="accent1"/>
+          </a:effectRef>
+          <a:fontRef idx="minor">
+            <a:schemeClr val="lt1"/>
+          </a:fontRef>
+        </p:style>
+        <p:txBody>
+          <a:bodyPr rtlCol="0" anchor="ctr" lIns="0" rIns="0" tIns="0" bIns="0"/>
+          <a:lstStyle/>
+          <a:p>
+            <a:pPr algn="ctr"/>
+            <a:r>
+              <a:rPr sz="1800" b="1">
+                <a:solidFill>
+                  <a:srgbClr val="FFFFFF"/>
+                </a:solidFill>
+                <a:latin typeface="Calibri"/>
+              </a:rPr>
+              <a:t>2</a:t>
+            </a:r>
+          </a:p>
+        </p:txBody>
+      </p:sp>
+      <p:sp>
+        <p:nvSpPr>
+          <p:cNvPr id="14" name="TextBox 13"/>
+          <p:cNvSpPr txBox="1"/>
+          <p:nvPr/>
+        </p:nvSpPr>
+        <p:spPr>
+          <a:xfrm>
+            <a:off x="4910328" y="1435608"/>
+            <a:ext cx="2606040" cy="411480"/>
+          </a:xfrm>
+          <a:prstGeom prst="rect">
+            <a:avLst/>
+          </a:prstGeom>
+          <a:noFill/>
+        </p:spPr>
+        <p:txBody>
+          <a:bodyPr wrap="square">
+            <a:spAutoFit/>
+          </a:bodyPr>
+          <a:lstStyle/>
+          <a:p>
+            <a:pPr algn="l"/>
+            <a:r>
+              <a:rPr sz="1500" b="1">
+                <a:solidFill>
+                  <a:srgbClr val="1A1A1A"/>
+                </a:solidFill>
+                <a:latin typeface="Calibri"/>
+              </a:rPr>
+              <a:t>Sharper insight</a:t>
+            </a:r>
+          </a:p>
+        </p:txBody>
+      </p:sp>
+      <p:sp>
+        <p:nvSpPr>
+          <p:cNvPr id="15" name="TextBox 14"/>
+          <p:cNvSpPr txBox="1"/>
+          <p:nvPr/>
+        </p:nvSpPr>
+        <p:spPr>
+          <a:xfrm>
+            <a:off x="4379976" y="2011680"/>
+            <a:ext cx="3063240" cy="1463040"/>
+          </a:xfrm>
+          <a:prstGeom prst="rect">
+            <a:avLst/>
+          </a:prstGeom>
+          <a:noFill/>
+        </p:spPr>
+        <p:txBody>
+          <a:bodyPr wrap="square">
+            <a:spAutoFit/>
+          </a:bodyPr>
+          <a:lstStyle/>
           <a:p>
             <a:pPr>
               <a:lnSpc>
@@ -8742,9 +9377,166 @@
                 </a:solidFill>
                 <a:latin typeface="Calibri"/>
               </a:rPr>
-              <a:t>How much of your volume is fleet business rather than retail?</a:t>
-            </a:r>
-          </a:p>
+              <a:t>Part-by-part visibility separates a stock movement from a lost job — and tells us where the volume actually went.</a:t>
+            </a:r>
+          </a:p>
+        </p:txBody>
+      </p:sp>
+      <p:sp>
+        <p:nvSpPr>
+          <p:cNvPr id="16" name="Rounded Rectangle 15"/>
+          <p:cNvSpPr/>
+          <p:nvPr/>
+        </p:nvSpPr>
+        <p:spPr>
+          <a:xfrm>
+            <a:off x="7882127" y="1234440"/>
+            <a:ext cx="3611880" cy="2377440"/>
+          </a:xfrm>
+          <a:prstGeom prst="roundRect">
+            <a:avLst>
+              <a:gd name="adj" fmla="val 6000"/>
+            </a:avLst>
+          </a:prstGeom>
+          <a:solidFill>
+            <a:srgbClr val="ECECEC"/>
+          </a:solidFill>
+          <a:ln>
+            <a:noFill/>
+          </a:ln>
+          <a:effectLst/>
+        </p:spPr>
+        <p:style>
+          <a:lnRef idx="1">
+            <a:schemeClr val="accent1"/>
+          </a:lnRef>
+          <a:fillRef idx="3">
+            <a:schemeClr val="accent1"/>
+          </a:fillRef>
+          <a:effectRef idx="2">
+            <a:schemeClr val="accent1"/>
+          </a:effectRef>
+          <a:fontRef idx="minor">
+            <a:schemeClr val="lt1"/>
+          </a:fontRef>
+        </p:style>
+        <p:txBody>
+          <a:bodyPr rtlCol="0" anchor="ctr"/>
+          <a:lstStyle/>
+          <a:p>
+            <a:pPr algn="ctr"/>
+          </a:p>
+        </p:txBody>
+      </p:sp>
+      <p:sp>
+        <p:nvSpPr>
+          <p:cNvPr id="17" name="Oval 16"/>
+          <p:cNvSpPr/>
+          <p:nvPr/>
+        </p:nvSpPr>
+        <p:spPr>
+          <a:xfrm>
+            <a:off x="8083295" y="1435608"/>
+            <a:ext cx="457200" cy="457200"/>
+          </a:xfrm>
+          <a:prstGeom prst="ellipse">
+            <a:avLst/>
+          </a:prstGeom>
+          <a:solidFill>
+            <a:srgbClr val="CC0E1E"/>
+          </a:solidFill>
+          <a:ln>
+            <a:noFill/>
+          </a:ln>
+          <a:effectLst/>
+        </p:spPr>
+        <p:style>
+          <a:lnRef idx="1">
+            <a:schemeClr val="accent1"/>
+          </a:lnRef>
+          <a:fillRef idx="3">
+            <a:schemeClr val="accent1"/>
+          </a:fillRef>
+          <a:effectRef idx="2">
+            <a:schemeClr val="accent1"/>
+          </a:effectRef>
+          <a:fontRef idx="minor">
+            <a:schemeClr val="lt1"/>
+          </a:fontRef>
+        </p:style>
+        <p:txBody>
+          <a:bodyPr rtlCol="0" anchor="ctr" lIns="0" rIns="0" tIns="0" bIns="0"/>
+          <a:lstStyle/>
+          <a:p>
+            <a:pPr algn="ctr"/>
+            <a:r>
+              <a:rPr sz="1800" b="1">
+                <a:solidFill>
+                  <a:srgbClr val="FFFFFF"/>
+                </a:solidFill>
+                <a:latin typeface="Calibri"/>
+              </a:rPr>
+              <a:t>3</a:t>
+            </a:r>
+          </a:p>
+        </p:txBody>
+      </p:sp>
+      <p:sp>
+        <p:nvSpPr>
+          <p:cNvPr id="18" name="TextBox 17"/>
+          <p:cNvSpPr txBox="1"/>
+          <p:nvPr/>
+        </p:nvSpPr>
+        <p:spPr>
+          <a:xfrm>
+            <a:off x="8705087" y="1435608"/>
+            <a:ext cx="2606040" cy="411480"/>
+          </a:xfrm>
+          <a:prstGeom prst="rect">
+            <a:avLst/>
+          </a:prstGeom>
+          <a:noFill/>
+        </p:spPr>
+        <p:txBody>
+          <a:bodyPr wrap="square">
+            <a:spAutoFit/>
+          </a:bodyPr>
+          <a:lstStyle/>
+          <a:p>
+            <a:pPr algn="l"/>
+            <a:r>
+              <a:rPr sz="1500" b="1">
+                <a:solidFill>
+                  <a:srgbClr val="1A1A1A"/>
+                </a:solidFill>
+                <a:latin typeface="Calibri"/>
+              </a:rPr>
+              <a:t>Shared benefit</a:t>
+            </a:r>
+          </a:p>
+        </p:txBody>
+      </p:sp>
+      <p:sp>
+        <p:nvSpPr>
+          <p:cNvPr id="19" name="TextBox 18"/>
+          <p:cNvSpPr txBox="1"/>
+          <p:nvPr/>
+        </p:nvSpPr>
+        <p:spPr>
+          <a:xfrm>
+            <a:off x="8174735" y="2011680"/>
+            <a:ext cx="3063240" cy="1463040"/>
+          </a:xfrm>
+          <a:prstGeom prst="rect">
+            <a:avLst/>
+          </a:prstGeom>
+          <a:noFill/>
+        </p:spPr>
+        <p:txBody>
+          <a:bodyPr wrap="square">
+            <a:spAutoFit/>
+          </a:bodyPr>
+          <a:lstStyle/>
           <a:p>
             <a:pPr>
               <a:lnSpc>
@@ -8770,148 +9562,21 @@
                 </a:solidFill>
                 <a:latin typeface="Calibri"/>
               </a:rPr>
-              <a:t>Where do you see the biggest hurdles this year?</a:t>
-            </a:r>
-          </a:p>
-          <a:p>
-            <a:pPr>
-              <a:lnSpc>
-                <a:spcPct val="115000"/>
-              </a:lnSpc>
-              <a:spcAft>
-                <a:spcPts val="1000"/>
-              </a:spcAft>
-            </a:pPr>
-            <a:r>
-              <a:rPr sz="1250" b="1">
-                <a:solidFill>
-                  <a:srgbClr val="CC0E1E"/>
-                </a:solidFill>
-                <a:latin typeface="Calibri"/>
-              </a:rPr>
-              <a:t>—  </a:t>
-            </a:r>
-            <a:r>
-              <a:rPr sz="1250">
-                <a:solidFill>
-                  <a:srgbClr val="1A1A1A"/>
-                </a:solidFill>
-                <a:latin typeface="Calibri"/>
-              </a:rPr>
-              <a:t>Where are your real strengths in this segment?</a:t>
-            </a:r>
-          </a:p>
-        </p:txBody>
-      </p:sp>
-      <p:sp>
-        <p:nvSpPr>
-          <p:cNvPr id="12" name="Rounded Rectangle 11"/>
-          <p:cNvSpPr/>
-          <p:nvPr/>
-        </p:nvSpPr>
-        <p:spPr>
-          <a:xfrm>
-            <a:off x="5943600" y="1188720"/>
-            <a:ext cx="5943600" cy="4023360"/>
-          </a:xfrm>
-          <a:prstGeom prst="roundRect">
-            <a:avLst>
-              <a:gd name="adj" fmla="val 6000"/>
-            </a:avLst>
-          </a:prstGeom>
-          <a:solidFill>
-            <a:srgbClr val="ECECEC"/>
-          </a:solidFill>
-          <a:ln>
-            <a:noFill/>
-          </a:ln>
-          <a:effectLst/>
-        </p:spPr>
-        <p:style>
-          <a:lnRef idx="1">
-            <a:schemeClr val="accent1"/>
-          </a:lnRef>
-          <a:fillRef idx="3">
-            <a:schemeClr val="accent1"/>
-          </a:fillRef>
-          <a:effectRef idx="2">
-            <a:schemeClr val="accent1"/>
-          </a:effectRef>
-          <a:fontRef idx="minor">
-            <a:schemeClr val="lt1"/>
-          </a:fontRef>
-        </p:style>
-        <p:txBody>
-          <a:bodyPr rtlCol="0" anchor="ctr"/>
-          <a:lstStyle/>
-          <a:p>
-            <a:pPr algn="ctr"/>
-          </a:p>
-        </p:txBody>
-      </p:sp>
-      <p:sp>
-        <p:nvSpPr>
-          <p:cNvPr id="13" name="Oval 12"/>
-          <p:cNvSpPr/>
-          <p:nvPr/>
-        </p:nvSpPr>
-        <p:spPr>
-          <a:xfrm>
-            <a:off x="6144768" y="1389888"/>
-            <a:ext cx="457200" cy="457200"/>
-          </a:xfrm>
-          <a:prstGeom prst="ellipse">
-            <a:avLst/>
-          </a:prstGeom>
-          <a:solidFill>
-            <a:srgbClr val="CC0E1E"/>
-          </a:solidFill>
-          <a:ln>
-            <a:noFill/>
-          </a:ln>
-          <a:effectLst/>
-        </p:spPr>
-        <p:style>
-          <a:lnRef idx="1">
-            <a:schemeClr val="accent1"/>
-          </a:lnRef>
-          <a:fillRef idx="3">
-            <a:schemeClr val="accent1"/>
-          </a:fillRef>
-          <a:effectRef idx="2">
-            <a:schemeClr val="accent1"/>
-          </a:effectRef>
-          <a:fontRef idx="minor">
-            <a:schemeClr val="lt1"/>
-          </a:fontRef>
-        </p:style>
-        <p:txBody>
-          <a:bodyPr rtlCol="0" anchor="ctr" lIns="0" rIns="0" tIns="0" bIns="0"/>
-          <a:lstStyle/>
-          <a:p>
-            <a:pPr algn="ctr"/>
-            <a:r>
-              <a:rPr sz="1800" b="1">
-                <a:solidFill>
-                  <a:srgbClr val="FFFFFF"/>
-                </a:solidFill>
-                <a:latin typeface="Calibri"/>
-              </a:rPr>
-              <a:t>S</a:t>
-            </a:r>
-          </a:p>
-        </p:txBody>
-      </p:sp>
-      <p:sp>
-        <p:nvSpPr>
-          <p:cNvPr id="14" name="TextBox 13"/>
+              <a:t>Better availability on your fast movers, a sharper target for us, and a factual basis for the SPA — same data, both sides gain.</a:t>
+            </a:r>
+          </a:p>
+        </p:txBody>
+      </p:sp>
+      <p:sp>
+        <p:nvSpPr>
+          <p:cNvPr id="20" name="TextBox 19"/>
           <p:cNvSpPr txBox="1"/>
           <p:nvPr/>
         </p:nvSpPr>
         <p:spPr>
           <a:xfrm>
-            <a:off x="6766560" y="1389888"/>
-            <a:ext cx="4937760" cy="411480"/>
+            <a:off x="292608" y="3886200"/>
+            <a:ext cx="8595360" cy="365760"/>
           </a:xfrm>
           <a:prstGeom prst="rect">
             <a:avLst/>
@@ -8926,148 +9591,13 @@
           <a:p>
             <a:pPr algn="l"/>
             <a:r>
-              <a:rPr sz="1500" b="1">
-                <a:solidFill>
-                  <a:srgbClr val="1A1A1A"/>
-                </a:solidFill>
-                <a:latin typeface="Calibri"/>
-              </a:rPr>
-              <a:t>Servicing &amp; R&amp;M</a:t>
-            </a:r>
-          </a:p>
-        </p:txBody>
-      </p:sp>
-      <p:sp>
-        <p:nvSpPr>
-          <p:cNvPr id="15" name="TextBox 14"/>
-          <p:cNvSpPr txBox="1"/>
-          <p:nvPr/>
-        </p:nvSpPr>
-        <p:spPr>
-          <a:xfrm>
-            <a:off x="6236208" y="1965960"/>
-            <a:ext cx="5394960" cy="3108960"/>
-          </a:xfrm>
-          <a:prstGeom prst="rect">
-            <a:avLst/>
-          </a:prstGeom>
-          <a:noFill/>
-        </p:spPr>
-        <p:txBody>
-          <a:bodyPr wrap="square">
-            <a:spAutoFit/>
-          </a:bodyPr>
-          <a:lstStyle/>
-          <a:p>
-            <a:pPr>
-              <a:lnSpc>
-                <a:spcPct val="115000"/>
-              </a:lnSpc>
-              <a:spcAft>
-                <a:spcPts val="1000"/>
-              </a:spcAft>
-            </a:pPr>
-            <a:r>
-              <a:rPr sz="1250" b="1">
+              <a:rPr sz="1400" b="1">
                 <a:solidFill>
                   <a:srgbClr val="CC0E1E"/>
                 </a:solidFill>
                 <a:latin typeface="Calibri"/>
               </a:rPr>
-              <a:t>—  </a:t>
-            </a:r>
-            <a:r>
-              <a:rPr sz="1250">
-                <a:solidFill>
-                  <a:srgbClr val="1A1A1A"/>
-                </a:solidFill>
-                <a:latin typeface="Calibri"/>
-              </a:rPr>
-              <a:t>Do you offer an R&amp;M or service-plan product today?</a:t>
-            </a:r>
-          </a:p>
-          <a:p>
-            <a:pPr>
-              <a:lnSpc>
-                <a:spcPct val="115000"/>
-              </a:lnSpc>
-              <a:spcAft>
-                <a:spcPts val="1000"/>
-              </a:spcAft>
-            </a:pPr>
-            <a:r>
-              <a:rPr sz="1250" b="1">
-                <a:solidFill>
-                  <a:srgbClr val="CC0E1E"/>
-                </a:solidFill>
-                <a:latin typeface="Calibri"/>
-              </a:rPr>
-              <a:t>—  </a:t>
-            </a:r>
-            <a:r>
-              <a:rPr sz="1250">
-                <a:solidFill>
-                  <a:srgbClr val="1A1A1A"/>
-                </a:solidFill>
-                <a:latin typeface="Calibri"/>
-              </a:rPr>
-              <a:t>What share of the parc do you retain for servicing after year three?</a:t>
-            </a:r>
-          </a:p>
-          <a:p>
-            <a:pPr>
-              <a:lnSpc>
-                <a:spcPct val="115000"/>
-              </a:lnSpc>
-              <a:spcAft>
-                <a:spcPts val="1000"/>
-              </a:spcAft>
-            </a:pPr>
-            <a:r>
-              <a:rPr sz="1250" b="1">
-                <a:solidFill>
-                  <a:srgbClr val="CC0E1E"/>
-                </a:solidFill>
-                <a:latin typeface="Calibri"/>
-              </a:rPr>
-              <a:t>—  </a:t>
-            </a:r>
-            <a:r>
-              <a:rPr sz="1250">
-                <a:solidFill>
-                  <a:srgbClr val="1A1A1A"/>
-                </a:solidFill>
-                <a:latin typeface="Calibri"/>
-              </a:rPr>
-              <a:t>Does R&amp;M business come bundled with fleet tenders — roughly what share?</a:t>
-            </a:r>
-          </a:p>
-          <a:p>
-            <a:pPr>
-              <a:lnSpc>
-                <a:spcPct val="115000"/>
-              </a:lnSpc>
-              <a:spcAft>
-                <a:spcPts val="1000"/>
-              </a:spcAft>
-            </a:pPr>
-            <a:r>
-              <a:rPr sz="1250" b="1">
-                <a:solidFill>
-                  <a:srgbClr val="CC0E1E"/>
-                </a:solidFill>
-                <a:latin typeface="Calibri"/>
-              </a:rPr>
-              <a:t>—  </a:t>
-            </a:r>
-            <a:r>
-              <a:rPr sz="1250">
-                <a:solidFill>
-                  <a:srgbClr val="1A1A1A"/>
-                </a:solidFill>
-                <a:latin typeface="Calibri"/>
-              </a:rPr>
-              <a:t>What would it take to bring more out-of-network servicing back?</a:t>
+              <a:t>Requested from 01/01/2025, part number level, monthly.</a:t>
             </a:r>
           </a:p>
         </p:txBody>
@@ -9195,7 +9725,7 @@
                 </a:solidFill>
                 <a:latin typeface="Calibri"/>
               </a:rPr>
-              <a:t>ASK</a:t>
+              <a:t>SUMMARY</a:t>
             </a:r>
           </a:p>
         </p:txBody>
@@ -9230,7 +9760,7 @@
                 </a:solidFill>
                 <a:latin typeface="Calibri"/>
               </a:rPr>
-              <a:t>Part-level Sales-to-Dealer Data</a:t>
+              <a:t>Next steps</a:t>
             </a:r>
           </a:p>
         </p:txBody>
@@ -9315,113 +9845,14 @@
       </p:sp>
       <p:sp>
         <p:nvSpPr>
-          <p:cNvPr id="8" name="Rounded Rectangle 7"/>
-          <p:cNvSpPr/>
+          <p:cNvPr id="8" name="TextBox 7"/>
+          <p:cNvSpPr txBox="1"/>
           <p:nvPr/>
         </p:nvSpPr>
         <p:spPr>
           <a:xfrm>
             <a:off x="292608" y="1234440"/>
-            <a:ext cx="3611880" cy="2377440"/>
-          </a:xfrm>
-          <a:prstGeom prst="roundRect">
-            <a:avLst>
-              <a:gd name="adj" fmla="val 6000"/>
-            </a:avLst>
-          </a:prstGeom>
-          <a:solidFill>
-            <a:srgbClr val="ECECEC"/>
-          </a:solidFill>
-          <a:ln>
-            <a:noFill/>
-          </a:ln>
-          <a:effectLst/>
-        </p:spPr>
-        <p:style>
-          <a:lnRef idx="1">
-            <a:schemeClr val="accent1"/>
-          </a:lnRef>
-          <a:fillRef idx="3">
-            <a:schemeClr val="accent1"/>
-          </a:fillRef>
-          <a:effectRef idx="2">
-            <a:schemeClr val="accent1"/>
-          </a:effectRef>
-          <a:fontRef idx="minor">
-            <a:schemeClr val="lt1"/>
-          </a:fontRef>
-        </p:style>
-        <p:txBody>
-          <a:bodyPr rtlCol="0" anchor="ctr"/>
-          <a:lstStyle/>
-          <a:p>
-            <a:pPr algn="ctr"/>
-          </a:p>
-        </p:txBody>
-      </p:sp>
-      <p:sp>
-        <p:nvSpPr>
-          <p:cNvPr id="9" name="Oval 8"/>
-          <p:cNvSpPr/>
-          <p:nvPr/>
-        </p:nvSpPr>
-        <p:spPr>
-          <a:xfrm>
-            <a:off x="493776" y="1435608"/>
-            <a:ext cx="457200" cy="457200"/>
-          </a:xfrm>
-          <a:prstGeom prst="ellipse">
-            <a:avLst/>
-          </a:prstGeom>
-          <a:solidFill>
-            <a:srgbClr val="CC0E1E"/>
-          </a:solidFill>
-          <a:ln>
-            <a:noFill/>
-          </a:ln>
-          <a:effectLst/>
-        </p:spPr>
-        <p:style>
-          <a:lnRef idx="1">
-            <a:schemeClr val="accent1"/>
-          </a:lnRef>
-          <a:fillRef idx="3">
-            <a:schemeClr val="accent1"/>
-          </a:fillRef>
-          <a:effectRef idx="2">
-            <a:schemeClr val="accent1"/>
-          </a:effectRef>
-          <a:fontRef idx="minor">
-            <a:schemeClr val="lt1"/>
-          </a:fontRef>
-        </p:style>
-        <p:txBody>
-          <a:bodyPr rtlCol="0" anchor="ctr" lIns="0" rIns="0" tIns="0" bIns="0"/>
-          <a:lstStyle/>
-          <a:p>
-            <a:pPr algn="ctr"/>
-            <a:r>
-              <a:rPr sz="1800" b="1">
-                <a:solidFill>
-                  <a:srgbClr val="FFFFFF"/>
-                </a:solidFill>
-                <a:latin typeface="Calibri"/>
-              </a:rPr>
-              <a:t>1</a:t>
-            </a:r>
-          </a:p>
-        </p:txBody>
-      </p:sp>
-      <p:sp>
-        <p:nvSpPr>
-          <p:cNvPr id="10" name="TextBox 9"/>
-          <p:cNvSpPr txBox="1"/>
-          <p:nvPr/>
-        </p:nvSpPr>
-        <p:spPr>
-          <a:xfrm>
-            <a:off x="1115568" y="1435608"/>
-            <a:ext cx="2606040" cy="411480"/>
+            <a:ext cx="11612880" cy="4206240"/>
           </a:xfrm>
           <a:prstGeom prst="rect">
             <a:avLst/>
@@ -9434,51 +9865,16 @@
           </a:bodyPr>
           <a:lstStyle/>
           <a:p>
-            <a:pPr algn="l"/>
-            <a:r>
-              <a:rPr sz="1500" b="1">
-                <a:solidFill>
-                  <a:srgbClr val="1A1A1A"/>
-                </a:solidFill>
-                <a:latin typeface="Calibri"/>
-              </a:rPr>
-              <a:t>The starting point</a:t>
-            </a:r>
-          </a:p>
-        </p:txBody>
-      </p:sp>
-      <p:sp>
-        <p:nvSpPr>
-          <p:cNvPr id="11" name="TextBox 10"/>
-          <p:cNvSpPr txBox="1"/>
-          <p:nvPr/>
-        </p:nvSpPr>
-        <p:spPr>
-          <a:xfrm>
-            <a:off x="585216" y="2011680"/>
-            <a:ext cx="3063240" cy="1463040"/>
-          </a:xfrm>
-          <a:prstGeom prst="rect">
-            <a:avLst/>
-          </a:prstGeom>
-          <a:noFill/>
-        </p:spPr>
-        <p:txBody>
-          <a:bodyPr wrap="square">
-            <a:spAutoFit/>
-          </a:bodyPr>
-          <a:lstStyle/>
-          <a:p>
             <a:pPr>
               <a:lnSpc>
-                <a:spcPct val="115000"/>
+                <a:spcPct val="125000"/>
               </a:lnSpc>
               <a:spcAft>
                 <a:spcPts val="1000"/>
               </a:spcAft>
             </a:pPr>
             <a:r>
-              <a:rPr sz="1250" b="1">
+              <a:rPr sz="1500" b="1">
                 <a:solidFill>
                   <a:srgbClr val="CC0E1E"/>
                 </a:solidFill>
@@ -9487,183 +9883,26 @@
               <a:t>—  </a:t>
             </a:r>
             <a:r>
-              <a:rPr sz="1250">
+              <a:rPr sz="1500">
                 <a:solidFill>
                   <a:srgbClr val="1A1A1A"/>
                 </a:solidFill>
                 <a:latin typeface="Calibri"/>
               </a:rPr>
-              <a:t>We have no Sales-to-Dealer figures from you for FY2026. The ask is monthly Sales-to-Dealer, at part-number level.</a:t>
-            </a:r>
-          </a:p>
-        </p:txBody>
-      </p:sp>
-      <p:sp>
-        <p:nvSpPr>
-          <p:cNvPr id="12" name="Rounded Rectangle 11"/>
-          <p:cNvSpPr/>
-          <p:nvPr/>
-        </p:nvSpPr>
-        <p:spPr>
-          <a:xfrm>
-            <a:off x="4087368" y="1234440"/>
-            <a:ext cx="3611880" cy="2377440"/>
-          </a:xfrm>
-          <a:prstGeom prst="roundRect">
-            <a:avLst>
-              <a:gd name="adj" fmla="val 6000"/>
-            </a:avLst>
-          </a:prstGeom>
-          <a:solidFill>
-            <a:srgbClr val="ECECEC"/>
-          </a:solidFill>
-          <a:ln>
-            <a:noFill/>
-          </a:ln>
-          <a:effectLst/>
-        </p:spPr>
-        <p:style>
-          <a:lnRef idx="1">
-            <a:schemeClr val="accent1"/>
-          </a:lnRef>
-          <a:fillRef idx="3">
-            <a:schemeClr val="accent1"/>
-          </a:fillRef>
-          <a:effectRef idx="2">
-            <a:schemeClr val="accent1"/>
-          </a:effectRef>
-          <a:fontRef idx="minor">
-            <a:schemeClr val="lt1"/>
-          </a:fontRef>
-        </p:style>
-        <p:txBody>
-          <a:bodyPr rtlCol="0" anchor="ctr"/>
-          <a:lstStyle/>
-          <a:p>
-            <a:pPr algn="ctr"/>
-          </a:p>
-        </p:txBody>
-      </p:sp>
-      <p:sp>
-        <p:nvSpPr>
-          <p:cNvPr id="13" name="Oval 12"/>
-          <p:cNvSpPr/>
-          <p:nvPr/>
-        </p:nvSpPr>
-        <p:spPr>
-          <a:xfrm>
-            <a:off x="4288536" y="1435608"/>
-            <a:ext cx="457200" cy="457200"/>
-          </a:xfrm>
-          <a:prstGeom prst="ellipse">
-            <a:avLst/>
-          </a:prstGeom>
-          <a:solidFill>
-            <a:srgbClr val="CC0E1E"/>
-          </a:solidFill>
-          <a:ln>
-            <a:noFill/>
-          </a:ln>
-          <a:effectLst/>
-        </p:spPr>
-        <p:style>
-          <a:lnRef idx="1">
-            <a:schemeClr val="accent1"/>
-          </a:lnRef>
-          <a:fillRef idx="3">
-            <a:schemeClr val="accent1"/>
-          </a:fillRef>
-          <a:effectRef idx="2">
-            <a:schemeClr val="accent1"/>
-          </a:effectRef>
-          <a:fontRef idx="minor">
-            <a:schemeClr val="lt1"/>
-          </a:fontRef>
-        </p:style>
-        <p:txBody>
-          <a:bodyPr rtlCol="0" anchor="ctr" lIns="0" rIns="0" tIns="0" bIns="0"/>
-          <a:lstStyle/>
-          <a:p>
-            <a:pPr algn="ctr"/>
-            <a:r>
-              <a:rPr sz="1800" b="1">
-                <a:solidFill>
-                  <a:srgbClr val="FFFFFF"/>
-                </a:solidFill>
-                <a:latin typeface="Calibri"/>
-              </a:rPr>
-              <a:t>2</a:t>
-            </a:r>
-          </a:p>
-        </p:txBody>
-      </p:sp>
-      <p:sp>
-        <p:nvSpPr>
-          <p:cNvPr id="14" name="TextBox 13"/>
-          <p:cNvSpPr txBox="1"/>
-          <p:nvPr/>
-        </p:nvSpPr>
-        <p:spPr>
-          <a:xfrm>
-            <a:off x="4910328" y="1435608"/>
-            <a:ext cx="2606040" cy="411480"/>
-          </a:xfrm>
-          <a:prstGeom prst="rect">
-            <a:avLst/>
-          </a:prstGeom>
-          <a:noFill/>
-        </p:spPr>
-        <p:txBody>
-          <a:bodyPr wrap="square">
-            <a:spAutoFit/>
-          </a:bodyPr>
-          <a:lstStyle/>
-          <a:p>
-            <a:pPr algn="l"/>
-            <a:r>
-              <a:rPr sz="1500" b="1">
-                <a:solidFill>
-                  <a:srgbClr val="1A1A1A"/>
-                </a:solidFill>
-                <a:latin typeface="Calibri"/>
-              </a:rPr>
-              <a:t>Sharper insight</a:t>
-            </a:r>
-          </a:p>
-        </p:txBody>
-      </p:sp>
-      <p:sp>
-        <p:nvSpPr>
-          <p:cNvPr id="15" name="TextBox 14"/>
-          <p:cNvSpPr txBox="1"/>
-          <p:nvPr/>
-        </p:nvSpPr>
-        <p:spPr>
-          <a:xfrm>
-            <a:off x="4379976" y="2011680"/>
-            <a:ext cx="3063240" cy="1463040"/>
-          </a:xfrm>
-          <a:prstGeom prst="rect">
-            <a:avLst/>
-          </a:prstGeom>
-          <a:noFill/>
-        </p:spPr>
-        <p:txBody>
-          <a:bodyPr wrap="square">
-            <a:spAutoFit/>
-          </a:bodyPr>
-          <a:lstStyle/>
+              <a:t>Confirm FY2027 extended target: EUR 592,795 (V3.1 Dashboard column I, +1.8% stretch).</a:t>
+            </a:r>
+          </a:p>
           <a:p>
             <a:pPr>
               <a:lnSpc>
-                <a:spcPct val="115000"/>
+                <a:spcPct val="125000"/>
               </a:lnSpc>
               <a:spcAft>
                 <a:spcPts val="1000"/>
               </a:spcAft>
             </a:pPr>
             <a:r>
-              <a:rPr sz="1250" b="1">
+              <a:rPr sz="1500" b="1">
                 <a:solidFill>
                   <a:srgbClr val="CC0E1E"/>
                 </a:solidFill>
@@ -9672,183 +9911,26 @@
               <a:t>—  </a:t>
             </a:r>
             <a:r>
-              <a:rPr sz="1250">
+              <a:rPr sz="1500">
                 <a:solidFill>
                   <a:srgbClr val="1A1A1A"/>
                 </a:solidFill>
                 <a:latin typeface="Calibri"/>
               </a:rPr>
-              <a:t>Part-by-part visibility separates a stock movement from a lost job — and tells us where the volume actually went.</a:t>
-            </a:r>
-          </a:p>
-        </p:txBody>
-      </p:sp>
-      <p:sp>
-        <p:nvSpPr>
-          <p:cNvPr id="16" name="Rounded Rectangle 15"/>
-          <p:cNvSpPr/>
-          <p:nvPr/>
-        </p:nvSpPr>
-        <p:spPr>
-          <a:xfrm>
-            <a:off x="7882127" y="1234440"/>
-            <a:ext cx="3611880" cy="2377440"/>
-          </a:xfrm>
-          <a:prstGeom prst="roundRect">
-            <a:avLst>
-              <a:gd name="adj" fmla="val 6000"/>
-            </a:avLst>
-          </a:prstGeom>
-          <a:solidFill>
-            <a:srgbClr val="ECECEC"/>
-          </a:solidFill>
-          <a:ln>
-            <a:noFill/>
-          </a:ln>
-          <a:effectLst/>
-        </p:spPr>
-        <p:style>
-          <a:lnRef idx="1">
-            <a:schemeClr val="accent1"/>
-          </a:lnRef>
-          <a:fillRef idx="3">
-            <a:schemeClr val="accent1"/>
-          </a:fillRef>
-          <a:effectRef idx="2">
-            <a:schemeClr val="accent1"/>
-          </a:effectRef>
-          <a:fontRef idx="minor">
-            <a:schemeClr val="lt1"/>
-          </a:fontRef>
-        </p:style>
-        <p:txBody>
-          <a:bodyPr rtlCol="0" anchor="ctr"/>
-          <a:lstStyle/>
-          <a:p>
-            <a:pPr algn="ctr"/>
-          </a:p>
-        </p:txBody>
-      </p:sp>
-      <p:sp>
-        <p:nvSpPr>
-          <p:cNvPr id="17" name="Oval 16"/>
-          <p:cNvSpPr/>
-          <p:nvPr/>
-        </p:nvSpPr>
-        <p:spPr>
-          <a:xfrm>
-            <a:off x="8083295" y="1435608"/>
-            <a:ext cx="457200" cy="457200"/>
-          </a:xfrm>
-          <a:prstGeom prst="ellipse">
-            <a:avLst/>
-          </a:prstGeom>
-          <a:solidFill>
-            <a:srgbClr val="CC0E1E"/>
-          </a:solidFill>
-          <a:ln>
-            <a:noFill/>
-          </a:ln>
-          <a:effectLst/>
-        </p:spPr>
-        <p:style>
-          <a:lnRef idx="1">
-            <a:schemeClr val="accent1"/>
-          </a:lnRef>
-          <a:fillRef idx="3">
-            <a:schemeClr val="accent1"/>
-          </a:fillRef>
-          <a:effectRef idx="2">
-            <a:schemeClr val="accent1"/>
-          </a:effectRef>
-          <a:fontRef idx="minor">
-            <a:schemeClr val="lt1"/>
-          </a:fontRef>
-        </p:style>
-        <p:txBody>
-          <a:bodyPr rtlCol="0" anchor="ctr" lIns="0" rIns="0" tIns="0" bIns="0"/>
-          <a:lstStyle/>
-          <a:p>
-            <a:pPr algn="ctr"/>
-            <a:r>
-              <a:rPr sz="1800" b="1">
-                <a:solidFill>
-                  <a:srgbClr val="FFFFFF"/>
-                </a:solidFill>
-                <a:latin typeface="Calibri"/>
-              </a:rPr>
-              <a:t>3</a:t>
-            </a:r>
-          </a:p>
-        </p:txBody>
-      </p:sp>
-      <p:sp>
-        <p:nvSpPr>
-          <p:cNvPr id="18" name="TextBox 17"/>
-          <p:cNvSpPr txBox="1"/>
-          <p:nvPr/>
-        </p:nvSpPr>
-        <p:spPr>
-          <a:xfrm>
-            <a:off x="8705087" y="1435608"/>
-            <a:ext cx="2606040" cy="411480"/>
-          </a:xfrm>
-          <a:prstGeom prst="rect">
-            <a:avLst/>
-          </a:prstGeom>
-          <a:noFill/>
-        </p:spPr>
-        <p:txBody>
-          <a:bodyPr wrap="square">
-            <a:spAutoFit/>
-          </a:bodyPr>
-          <a:lstStyle/>
-          <a:p>
-            <a:pPr algn="l"/>
-            <a:r>
-              <a:rPr sz="1500" b="1">
-                <a:solidFill>
-                  <a:srgbClr val="1A1A1A"/>
-                </a:solidFill>
-                <a:latin typeface="Calibri"/>
-              </a:rPr>
-              <a:t>Shared benefit</a:t>
-            </a:r>
-          </a:p>
-        </p:txBody>
-      </p:sp>
-      <p:sp>
-        <p:nvSpPr>
-          <p:cNvPr id="19" name="TextBox 18"/>
-          <p:cNvSpPr txBox="1"/>
-          <p:nvPr/>
-        </p:nvSpPr>
-        <p:spPr>
-          <a:xfrm>
-            <a:off x="8174735" y="2011680"/>
-            <a:ext cx="3063240" cy="1463040"/>
-          </a:xfrm>
-          <a:prstGeom prst="rect">
-            <a:avLst/>
-          </a:prstGeom>
-          <a:noFill/>
-        </p:spPr>
-        <p:txBody>
-          <a:bodyPr wrap="square">
-            <a:spAutoFit/>
-          </a:bodyPr>
-          <a:lstStyle/>
+              <a:t>Confirm the incentive alongside the price adjustment once approved on our side.</a:t>
+            </a:r>
+          </a:p>
           <a:p>
             <a:pPr>
               <a:lnSpc>
-                <a:spcPct val="115000"/>
+                <a:spcPct val="125000"/>
               </a:lnSpc>
               <a:spcAft>
                 <a:spcPts val="1000"/>
               </a:spcAft>
             </a:pPr>
             <a:r>
-              <a:rPr sz="1250" b="1">
+              <a:rPr sz="1500" b="1">
                 <a:solidFill>
                   <a:srgbClr val="CC0E1E"/>
                 </a:solidFill>
@@ -9857,48 +9939,97 @@
               <a:t>—  </a:t>
             </a:r>
             <a:r>
-              <a:rPr sz="1250">
+              <a:rPr sz="1500">
                 <a:solidFill>
                   <a:srgbClr val="1A1A1A"/>
                 </a:solidFill>
                 <a:latin typeface="Calibri"/>
               </a:rPr>
-              <a:t>Better availability on your fast movers, a sharper target for us, and a factual basis for the SPA — same data, both sides gain.</a:t>
-            </a:r>
-          </a:p>
-        </p:txBody>
-      </p:sp>
-      <p:sp>
-        <p:nvSpPr>
-          <p:cNvPr id="20" name="TextBox 19"/>
-          <p:cNvSpPr txBox="1"/>
-          <p:nvPr/>
-        </p:nvSpPr>
-        <p:spPr>
-          <a:xfrm>
-            <a:off x="292608" y="3886200"/>
-            <a:ext cx="8595360" cy="365760"/>
-          </a:xfrm>
-          <a:prstGeom prst="rect">
-            <a:avLst/>
-          </a:prstGeom>
-          <a:noFill/>
-        </p:spPr>
-        <p:txBody>
-          <a:bodyPr wrap="square">
-            <a:spAutoFit/>
-          </a:bodyPr>
-          <a:lstStyle/>
-          <a:p>
-            <a:pPr algn="l"/>
-            <a:r>
-              <a:rPr sz="1400" b="1">
+              <a:t>Brake parts / Engine parts / Body parts: agree which category we tackle first, and what the joint action is.</a:t>
+            </a:r>
+          </a:p>
+          <a:p>
+            <a:pPr>
+              <a:lnSpc>
+                <a:spcPct val="125000"/>
+              </a:lnSpc>
+              <a:spcAft>
+                <a:spcPts val="1000"/>
+              </a:spcAft>
+            </a:pPr>
+            <a:r>
+              <a:rPr sz="1500" b="1">
                 <a:solidFill>
                   <a:srgbClr val="CC0E1E"/>
                 </a:solidFill>
                 <a:latin typeface="Calibri"/>
               </a:rPr>
-              <a:t>Requested from 01/01/2025, part number level, monthly.</a:t>
+              <a:t>—  </a:t>
+            </a:r>
+            <a:r>
+              <a:rPr sz="1500">
+                <a:solidFill>
+                  <a:srgbClr val="1A1A1A"/>
+                </a:solidFill>
+                <a:latin typeface="Calibri"/>
+              </a:rPr>
+              <a:t>Agree part-level Sales-to-Dealer data sharing, effective 01/01/2025.</a:t>
+            </a:r>
+          </a:p>
+          <a:p>
+            <a:pPr>
+              <a:lnSpc>
+                <a:spcPct val="125000"/>
+              </a:lnSpc>
+              <a:spcAft>
+                <a:spcPts val="1000"/>
+              </a:spcAft>
+            </a:pPr>
+            <a:r>
+              <a:rPr sz="1500" b="1">
+                <a:solidFill>
+                  <a:srgbClr val="CC0E1E"/>
+                </a:solidFill>
+                <a:latin typeface="Calibri"/>
+              </a:rPr>
+              <a:t>—  </a:t>
+            </a:r>
+            <a:r>
+              <a:rPr sz="1500">
+                <a:solidFill>
+                  <a:srgbClr val="1A1A1A"/>
+                </a:solidFill>
+                <a:latin typeface="Calibri"/>
+              </a:rPr>
+              <a:t>SPA: PETROS proposal, ISZE review and counter-proposal cycle to follow.</a:t>
+            </a:r>
+          </a:p>
+          <a:p>
+            <a:pPr>
+              <a:lnSpc>
+                <a:spcPct val="125000"/>
+              </a:lnSpc>
+              <a:spcAft>
+                <a:spcPts val="1000"/>
+              </a:spcAft>
+            </a:pPr>
+            <a:r>
+              <a:rPr sz="1500" b="1">
+                <a:solidFill>
+                  <a:srgbClr val="CC0E1E"/>
+                </a:solidFill>
+                <a:latin typeface="Calibri"/>
+              </a:rPr>
+              <a:t>—  </a:t>
+            </a:r>
+            <a:r>
+              <a:rPr sz="1500">
+                <a:solidFill>
+                  <a:srgbClr val="1A1A1A"/>
+                </a:solidFill>
+                <a:latin typeface="Calibri"/>
+              </a:rPr>
+              <a:t>IDS 2026: agree dealer visit dates, starting with the lower-scoring dealers.</a:t>
             </a:r>
           </a:p>
         </p:txBody>
@@ -9929,9 +10060,87 @@
         <p:nvPr/>
       </p:nvGrpSpPr>
       <p:grpSpPr/>
+      <p:sp>
+        <p:nvSpPr>
+          <p:cNvPr id="2" name="Rectangle 1"/>
+          <p:cNvSpPr/>
+          <p:nvPr/>
+        </p:nvSpPr>
+        <p:spPr>
+          <a:xfrm>
+            <a:off x="0" y="0"/>
+            <a:ext cx="201168" cy="6858000"/>
+          </a:xfrm>
+          <a:prstGeom prst="rect">
+            <a:avLst/>
+          </a:prstGeom>
+          <a:solidFill>
+            <a:srgbClr val="CC0E1E"/>
+          </a:solidFill>
+          <a:ln>
+            <a:noFill/>
+          </a:ln>
+        </p:spPr>
+        <p:style>
+          <a:lnRef idx="1">
+            <a:schemeClr val="accent1"/>
+          </a:lnRef>
+          <a:fillRef idx="3">
+            <a:schemeClr val="accent1"/>
+          </a:fillRef>
+          <a:effectRef idx="2">
+            <a:schemeClr val="accent1"/>
+          </a:effectRef>
+          <a:fontRef idx="minor">
+            <a:schemeClr val="lt1"/>
+          </a:fontRef>
+        </p:style>
+        <p:txBody>
+          <a:bodyPr rtlCol="0" anchor="ctr"/>
+          <a:lstStyle/>
+          <a:p>
+            <a:pPr algn="ctr"/>
+          </a:p>
+        </p:txBody>
+      </p:sp>
+      <p:sp>
+        <p:nvSpPr>
+          <p:cNvPr id="3" name="TextBox 2"/>
+          <p:cNvSpPr txBox="1"/>
+          <p:nvPr/>
+        </p:nvSpPr>
+        <p:spPr>
+          <a:xfrm>
+            <a:off x="2286000" y="3063240"/>
+            <a:ext cx="7772400" cy="457200"/>
+          </a:xfrm>
+          <a:prstGeom prst="rect">
+            <a:avLst/>
+          </a:prstGeom>
+          <a:noFill/>
+        </p:spPr>
+        <p:txBody>
+          <a:bodyPr wrap="square">
+            <a:spAutoFit/>
+          </a:bodyPr>
+          <a:lstStyle/>
+          <a:p>
+            <a:pPr algn="ctr"/>
+            <a:r>
+              <a:rPr sz="1600" b="0">
+                <a:solidFill>
+                  <a:srgbClr val="5A5A5A"/>
+                </a:solidFill>
+                <a:latin typeface="Calibri"/>
+              </a:rPr>
+              <a:t>Moving the World – for You</a:t>
+            </a:r>
+          </a:p>
+        </p:txBody>
+      </p:sp>
       <p:pic>
         <p:nvPicPr>
-          <p:cNvPr id="2" name="Picture 1" descr="isuzu_logo_red.png"/>
+          <p:cNvPr id="4" name="Picture 3" descr="isuzu_logo_red.png"/>
           <p:cNvPicPr>
             <a:picLocks noChangeAspect="1"/>
           </p:cNvPicPr>
@@ -9945,396 +10154,14 @@
         </p:blipFill>
         <p:spPr>
           <a:xfrm>
-            <a:off x="256032" y="6263640"/>
-            <a:ext cx="1679787" cy="292608"/>
+            <a:off x="4631436" y="2468880"/>
+            <a:ext cx="2926080" cy="509704"/>
           </a:xfrm>
           <a:prstGeom prst="rect">
             <a:avLst/>
           </a:prstGeom>
         </p:spPr>
       </p:pic>
-      <p:sp>
-        <p:nvSpPr>
-          <p:cNvPr id="3" name="Rectangle 2"/>
-          <p:cNvSpPr/>
-          <p:nvPr/>
-        </p:nvSpPr>
-        <p:spPr>
-          <a:xfrm>
-            <a:off x="0" y="6766560"/>
-            <a:ext cx="12188952" cy="91440"/>
-          </a:xfrm>
-          <a:prstGeom prst="rect">
-            <a:avLst/>
-          </a:prstGeom>
-          <a:solidFill>
-            <a:srgbClr val="CC0E1E"/>
-          </a:solidFill>
-          <a:ln>
-            <a:noFill/>
-          </a:ln>
-        </p:spPr>
-        <p:style>
-          <a:lnRef idx="1">
-            <a:schemeClr val="accent1"/>
-          </a:lnRef>
-          <a:fillRef idx="3">
-            <a:schemeClr val="accent1"/>
-          </a:fillRef>
-          <a:effectRef idx="2">
-            <a:schemeClr val="accent1"/>
-          </a:effectRef>
-          <a:fontRef idx="minor">
-            <a:schemeClr val="lt1"/>
-          </a:fontRef>
-        </p:style>
-        <p:txBody>
-          <a:bodyPr rtlCol="0" anchor="ctr"/>
-          <a:lstStyle/>
-          <a:p>
-            <a:pPr algn="ctr"/>
-          </a:p>
-        </p:txBody>
-      </p:sp>
-      <p:sp>
-        <p:nvSpPr>
-          <p:cNvPr id="4" name="TextBox 3"/>
-          <p:cNvSpPr txBox="1"/>
-          <p:nvPr/>
-        </p:nvSpPr>
-        <p:spPr>
-          <a:xfrm>
-            <a:off x="292608" y="201168"/>
-            <a:ext cx="11430000" cy="274320"/>
-          </a:xfrm>
-          <a:prstGeom prst="rect">
-            <a:avLst/>
-          </a:prstGeom>
-          <a:noFill/>
-        </p:spPr>
-        <p:txBody>
-          <a:bodyPr wrap="square">
-            <a:spAutoFit/>
-          </a:bodyPr>
-          <a:lstStyle/>
-          <a:p>
-            <a:pPr algn="l"/>
-            <a:r>
-              <a:rPr sz="1100" b="1">
-                <a:solidFill>
-                  <a:srgbClr val="CC0E1E"/>
-                </a:solidFill>
-                <a:latin typeface="Calibri"/>
-              </a:rPr>
-              <a:t>SUMMARY</a:t>
-            </a:r>
-          </a:p>
-        </p:txBody>
-      </p:sp>
-      <p:sp>
-        <p:nvSpPr>
-          <p:cNvPr id="5" name="TextBox 4"/>
-          <p:cNvSpPr txBox="1"/>
-          <p:nvPr/>
-        </p:nvSpPr>
-        <p:spPr>
-          <a:xfrm>
-            <a:off x="292608" y="475488"/>
-            <a:ext cx="11612880" cy="566928"/>
-          </a:xfrm>
-          <a:prstGeom prst="rect">
-            <a:avLst/>
-          </a:prstGeom>
-          <a:noFill/>
-        </p:spPr>
-        <p:txBody>
-          <a:bodyPr wrap="square">
-            <a:spAutoFit/>
-          </a:bodyPr>
-          <a:lstStyle/>
-          <a:p>
-            <a:pPr algn="l"/>
-            <a:r>
-              <a:rPr sz="2500" b="1">
-                <a:solidFill>
-                  <a:srgbClr val="1A1A1A"/>
-                </a:solidFill>
-                <a:latin typeface="Calibri"/>
-              </a:rPr>
-              <a:t>Next steps</a:t>
-            </a:r>
-          </a:p>
-        </p:txBody>
-      </p:sp>
-      <p:sp>
-        <p:nvSpPr>
-          <p:cNvPr id="6" name="Rectangle 5"/>
-          <p:cNvSpPr/>
-          <p:nvPr/>
-        </p:nvSpPr>
-        <p:spPr>
-          <a:xfrm>
-            <a:off x="292608" y="1005840"/>
-            <a:ext cx="11612880" cy="28000"/>
-          </a:xfrm>
-          <a:prstGeom prst="rect">
-            <a:avLst/>
-          </a:prstGeom>
-          <a:solidFill>
-            <a:srgbClr val="CC0E1E"/>
-          </a:solidFill>
-          <a:ln>
-            <a:noFill/>
-          </a:ln>
-        </p:spPr>
-        <p:style>
-          <a:lnRef idx="1">
-            <a:schemeClr val="accent1"/>
-          </a:lnRef>
-          <a:fillRef idx="3">
-            <a:schemeClr val="accent1"/>
-          </a:fillRef>
-          <a:effectRef idx="2">
-            <a:schemeClr val="accent1"/>
-          </a:effectRef>
-          <a:fontRef idx="minor">
-            <a:schemeClr val="lt1"/>
-          </a:fontRef>
-        </p:style>
-        <p:txBody>
-          <a:bodyPr rtlCol="0" anchor="ctr"/>
-          <a:lstStyle/>
-          <a:p>
-            <a:pPr algn="ctr"/>
-          </a:p>
-        </p:txBody>
-      </p:sp>
-      <p:sp>
-        <p:nvSpPr>
-          <p:cNvPr id="7" name="TextBox 6"/>
-          <p:cNvSpPr txBox="1"/>
-          <p:nvPr/>
-        </p:nvSpPr>
-        <p:spPr>
-          <a:xfrm>
-            <a:off x="11594592" y="6473952"/>
-            <a:ext cx="365760" cy="274320"/>
-          </a:xfrm>
-          <a:prstGeom prst="rect">
-            <a:avLst/>
-          </a:prstGeom>
-          <a:noFill/>
-        </p:spPr>
-        <p:txBody>
-          <a:bodyPr wrap="square">
-            <a:spAutoFit/>
-          </a:bodyPr>
-          <a:lstStyle/>
-          <a:p>
-            <a:pPr algn="r"/>
-            <a:r>
-              <a:rPr sz="1000" b="0">
-                <a:solidFill>
-                  <a:srgbClr val="5A5A5A"/>
-                </a:solidFill>
-                <a:latin typeface="Calibri"/>
-              </a:rPr>
-              <a:t>19</a:t>
-            </a:r>
-          </a:p>
-        </p:txBody>
-      </p:sp>
-      <p:sp>
-        <p:nvSpPr>
-          <p:cNvPr id="8" name="TextBox 7"/>
-          <p:cNvSpPr txBox="1"/>
-          <p:nvPr/>
-        </p:nvSpPr>
-        <p:spPr>
-          <a:xfrm>
-            <a:off x="292608" y="1234440"/>
-            <a:ext cx="11612880" cy="4206240"/>
-          </a:xfrm>
-          <a:prstGeom prst="rect">
-            <a:avLst/>
-          </a:prstGeom>
-          <a:noFill/>
-        </p:spPr>
-        <p:txBody>
-          <a:bodyPr wrap="square">
-            <a:spAutoFit/>
-          </a:bodyPr>
-          <a:lstStyle/>
-          <a:p>
-            <a:pPr>
-              <a:lnSpc>
-                <a:spcPct val="125000"/>
-              </a:lnSpc>
-              <a:spcAft>
-                <a:spcPts val="1000"/>
-              </a:spcAft>
-            </a:pPr>
-            <a:r>
-              <a:rPr sz="1500" b="1">
-                <a:solidFill>
-                  <a:srgbClr val="CC0E1E"/>
-                </a:solidFill>
-                <a:latin typeface="Calibri"/>
-              </a:rPr>
-              <a:t>—  </a:t>
-            </a:r>
-            <a:r>
-              <a:rPr sz="1500">
-                <a:solidFill>
-                  <a:srgbClr val="1A1A1A"/>
-                </a:solidFill>
-                <a:latin typeface="Calibri"/>
-              </a:rPr>
-              <a:t>Align on the FY2027 Sales-to-Dealer bridge (fleet, price, additional growth) — working figure EUR 795,956 (+12.3% vs FY2026 base).</a:t>
-            </a:r>
-          </a:p>
-          <a:p>
-            <a:pPr>
-              <a:lnSpc>
-                <a:spcPct val="125000"/>
-              </a:lnSpc>
-              <a:spcAft>
-                <a:spcPts val="1000"/>
-              </a:spcAft>
-            </a:pPr>
-            <a:r>
-              <a:rPr sz="1500" b="1">
-                <a:solidFill>
-                  <a:srgbClr val="CC0E1E"/>
-                </a:solidFill>
-                <a:latin typeface="Calibri"/>
-              </a:rPr>
-              <a:t>—  </a:t>
-            </a:r>
-            <a:r>
-              <a:rPr sz="1500">
-                <a:solidFill>
-                  <a:srgbClr val="1A1A1A"/>
-                </a:solidFill>
-                <a:latin typeface="Calibri"/>
-              </a:rPr>
-              <a:t>Confirm the incentive alongside the price adjustment; lock the target once that approval is through.</a:t>
-            </a:r>
-          </a:p>
-          <a:p>
-            <a:pPr>
-              <a:lnSpc>
-                <a:spcPct val="125000"/>
-              </a:lnSpc>
-              <a:spcAft>
-                <a:spcPts val="1000"/>
-              </a:spcAft>
-            </a:pPr>
-            <a:r>
-              <a:rPr sz="1500" b="1">
-                <a:solidFill>
-                  <a:srgbClr val="CC0E1E"/>
-                </a:solidFill>
-                <a:latin typeface="Calibri"/>
-              </a:rPr>
-              <a:t>—  </a:t>
-            </a:r>
-            <a:r>
-              <a:rPr sz="1500">
-                <a:solidFill>
-                  <a:srgbClr val="1A1A1A"/>
-                </a:solidFill>
-                <a:latin typeface="Calibri"/>
-              </a:rPr>
-              <a:t>Brake parts / Engine parts / Hydraulic / mechanical: agree which category we tackle first, and what the joint action is.</a:t>
-            </a:r>
-          </a:p>
-          <a:p>
-            <a:pPr>
-              <a:lnSpc>
-                <a:spcPct val="125000"/>
-              </a:lnSpc>
-              <a:spcAft>
-                <a:spcPts val="1000"/>
-              </a:spcAft>
-            </a:pPr>
-            <a:r>
-              <a:rPr sz="1500" b="1">
-                <a:solidFill>
-                  <a:srgbClr val="CC0E1E"/>
-                </a:solidFill>
-                <a:latin typeface="Calibri"/>
-              </a:rPr>
-              <a:t>—  </a:t>
-            </a:r>
-            <a:r>
-              <a:rPr sz="1500">
-                <a:solidFill>
-                  <a:srgbClr val="1A1A1A"/>
-                </a:solidFill>
-                <a:latin typeface="Calibri"/>
-              </a:rPr>
-              <a:t>Agree part-level Sales-to-Dealer data sharing, effective 01/01/2025.</a:t>
-            </a:r>
-          </a:p>
-          <a:p>
-            <a:pPr>
-              <a:lnSpc>
-                <a:spcPct val="125000"/>
-              </a:lnSpc>
-              <a:spcAft>
-                <a:spcPts val="1000"/>
-              </a:spcAft>
-            </a:pPr>
-            <a:r>
-              <a:rPr sz="1500" b="1">
-                <a:solidFill>
-                  <a:srgbClr val="CC0E1E"/>
-                </a:solidFill>
-                <a:latin typeface="Calibri"/>
-              </a:rPr>
-              <a:t>—  </a:t>
-            </a:r>
-            <a:r>
-              <a:rPr sz="1500">
-                <a:solidFill>
-                  <a:srgbClr val="1A1A1A"/>
-                </a:solidFill>
-                <a:latin typeface="Calibri"/>
-              </a:rPr>
-              <a:t>SPA: PETROS proposal, ISZE review and counter-proposal cycle to follow.</a:t>
-            </a:r>
-          </a:p>
-          <a:p>
-            <a:pPr>
-              <a:lnSpc>
-                <a:spcPct val="125000"/>
-              </a:lnSpc>
-              <a:spcAft>
-                <a:spcPts val="1000"/>
-              </a:spcAft>
-            </a:pPr>
-            <a:r>
-              <a:rPr sz="1500" b="1">
-                <a:solidFill>
-                  <a:srgbClr val="CC0E1E"/>
-                </a:solidFill>
-                <a:latin typeface="Calibri"/>
-              </a:rPr>
-              <a:t>—  </a:t>
-            </a:r>
-            <a:r>
-              <a:rPr sz="1500">
-                <a:solidFill>
-                  <a:srgbClr val="1A1A1A"/>
-                </a:solidFill>
-                <a:latin typeface="Calibri"/>
-              </a:rPr>
-              <a:t>IDS 2026: agree dealer visit dates, starting with the lower-scoring dealers.</a:t>
-            </a:r>
-          </a:p>
-        </p:txBody>
-      </p:sp>
     </p:spTree>
   </p:cSld>
   <p:clrMapOvr>
@@ -10622,7 +10449,7 @@
                 </a:solidFill>
                 <a:latin typeface="Calibri"/>
               </a:rPr>
-              <a:t>Parts Performance — category movers</a:t>
+              <a:t>FY2027 YTD (Apr–Jul) Sales Review</a:t>
             </a:r>
           </a:p>
           <a:p>
@@ -10650,7 +10477,7 @@
                 </a:solidFill>
                 <a:latin typeface="Calibri"/>
               </a:rPr>
-              <a:t>Parts Performance — Brake parts</a:t>
+              <a:t>Parts Performance — category movers</a:t>
             </a:r>
           </a:p>
           <a:p>
@@ -10678,7 +10505,7 @@
                 </a:solidFill>
                 <a:latin typeface="Calibri"/>
               </a:rPr>
-              <a:t>Parts Performance — Engine parts</a:t>
+              <a:t>Parts Performance — Brake parts</a:t>
             </a:r>
           </a:p>
           <a:p>
@@ -10706,7 +10533,7 @@
                 </a:solidFill>
                 <a:latin typeface="Calibri"/>
               </a:rPr>
-              <a:t>Parts Performance — Hydraulic / mechanical</a:t>
+              <a:t>Parts Performance — Engine parts</a:t>
             </a:r>
           </a:p>
           <a:p>
@@ -10734,7 +10561,7 @@
                 </a:solidFill>
                 <a:latin typeface="Calibri"/>
               </a:rPr>
-              <a:t>Parts Performance — where volume grew</a:t>
+              <a:t>Parts Performance — Body parts</a:t>
             </a:r>
           </a:p>
           <a:p>
@@ -10762,7 +10589,7 @@
                 </a:solidFill>
                 <a:latin typeface="Calibri"/>
               </a:rPr>
-              <a:t>New Business — validation queue</a:t>
+              <a:t>Parts Performance — where volume grew</a:t>
             </a:r>
           </a:p>
           <a:p>
@@ -10790,7 +10617,7 @@
                 </a:solidFill>
                 <a:latin typeface="Calibri"/>
               </a:rPr>
-              <a:t>Sales-to-Dealer Outlook</a:t>
+              <a:t>New Business — validation queue</a:t>
             </a:r>
           </a:p>
           <a:p>
@@ -10818,7 +10645,7 @@
                 </a:solidFill>
                 <a:latin typeface="Calibri"/>
               </a:rPr>
-              <a:t>GPS Capture</a:t>
+              <a:t>Service-Parts Coverage</a:t>
             </a:r>
           </a:p>
           <a:p>
@@ -10846,7 +10673,7 @@
                 </a:solidFill>
                 <a:latin typeface="Calibri"/>
               </a:rPr>
-              <a:t>Service-Parts Coverage</a:t>
+              <a:t>IDS 2026 — Dealer Standard</a:t>
             </a:r>
           </a:p>
           <a:p>
@@ -10874,7 +10701,7 @@
                 </a:solidFill>
                 <a:latin typeface="Calibri"/>
               </a:rPr>
-              <a:t>IDS 2026 — Dealer Standard</a:t>
+              <a:t>Fleet &amp; FY2027 Target</a:t>
             </a:r>
           </a:p>
           <a:p>
@@ -10902,7 +10729,7 @@
                 </a:solidFill>
                 <a:latin typeface="Calibri"/>
               </a:rPr>
-              <a:t>Fleet &amp; FY2027 Target</a:t>
+              <a:t>SPA — status</a:t>
             </a:r>
           </a:p>
           <a:p>
@@ -10930,7 +10757,7 @@
                 </a:solidFill>
                 <a:latin typeface="Calibri"/>
               </a:rPr>
-              <a:t>SPA — status</a:t>
+              <a:t>R&amp;M — market discussion</a:t>
             </a:r>
           </a:p>
           <a:p>
@@ -10958,7 +10785,7 @@
                 </a:solidFill>
                 <a:latin typeface="Calibri"/>
               </a:rPr>
-              <a:t>R&amp;M — market discussion</a:t>
+              <a:t>Data request: part-level Sales-to-Dealer</a:t>
             </a:r>
           </a:p>
           <a:p>
@@ -10986,167 +10813,11 @@
                 </a:solidFill>
                 <a:latin typeface="Calibri"/>
               </a:rPr>
-              <a:t>Data request: part-level Sales-to-Dealer</a:t>
-            </a:r>
-          </a:p>
-          <a:p>
-            <a:pPr>
-              <a:lnSpc>
-                <a:spcPct val="110000"/>
-              </a:lnSpc>
-              <a:spcAft>
-                <a:spcPts val="1000"/>
-              </a:spcAft>
-            </a:pPr>
-            <a:r>
-              <a:rPr sz="1300" b="1">
-                <a:solidFill>
-                  <a:srgbClr val="CC0E1E"/>
-                </a:solidFill>
-                <a:latin typeface="Calibri"/>
-              </a:rPr>
-              <a:t>—  </a:t>
-            </a:r>
-            <a:r>
-              <a:rPr sz="1300">
-                <a:solidFill>
-                  <a:srgbClr val="1A1A1A"/>
-                </a:solidFill>
-                <a:latin typeface="Calibri"/>
-              </a:rPr>
               <a:t>Next steps</a:t>
             </a:r>
           </a:p>
         </p:txBody>
       </p:sp>
-    </p:spTree>
-  </p:cSld>
-  <p:clrMapOvr>
-    <a:masterClrMapping/>
-  </p:clrMapOvr>
-</p:sld>
-</file>
-
-<file path=ppt/slides/slide20.xml><?xml version="1.0" encoding="utf-8"?>
-<p:sld xmlns:a="http://schemas.openxmlformats.org/drawingml/2006/main" xmlns:p="http://schemas.openxmlformats.org/presentationml/2006/main" xmlns:r="http://schemas.openxmlformats.org/officeDocument/2006/relationships">
-  <p:cSld>
-    <p:bg>
-      <p:bgPr>
-        <a:solidFill>
-          <a:srgbClr val="FFFFFF"/>
-        </a:solidFill>
-        <a:effectLst/>
-      </p:bgPr>
-    </p:bg>
-    <p:spTree>
-      <p:nvGrpSpPr>
-        <p:cNvPr id="1" name=""/>
-        <p:cNvGrpSpPr/>
-        <p:nvPr/>
-      </p:nvGrpSpPr>
-      <p:grpSpPr/>
-      <p:sp>
-        <p:nvSpPr>
-          <p:cNvPr id="2" name="Rectangle 1"/>
-          <p:cNvSpPr/>
-          <p:nvPr/>
-        </p:nvSpPr>
-        <p:spPr>
-          <a:xfrm>
-            <a:off x="0" y="0"/>
-            <a:ext cx="201168" cy="6858000"/>
-          </a:xfrm>
-          <a:prstGeom prst="rect">
-            <a:avLst/>
-          </a:prstGeom>
-          <a:solidFill>
-            <a:srgbClr val="CC0E1E"/>
-          </a:solidFill>
-          <a:ln>
-            <a:noFill/>
-          </a:ln>
-        </p:spPr>
-        <p:style>
-          <a:lnRef idx="1">
-            <a:schemeClr val="accent1"/>
-          </a:lnRef>
-          <a:fillRef idx="3">
-            <a:schemeClr val="accent1"/>
-          </a:fillRef>
-          <a:effectRef idx="2">
-            <a:schemeClr val="accent1"/>
-          </a:effectRef>
-          <a:fontRef idx="minor">
-            <a:schemeClr val="lt1"/>
-          </a:fontRef>
-        </p:style>
-        <p:txBody>
-          <a:bodyPr rtlCol="0" anchor="ctr"/>
-          <a:lstStyle/>
-          <a:p>
-            <a:pPr algn="ctr"/>
-          </a:p>
-        </p:txBody>
-      </p:sp>
-      <p:sp>
-        <p:nvSpPr>
-          <p:cNvPr id="3" name="TextBox 2"/>
-          <p:cNvSpPr txBox="1"/>
-          <p:nvPr/>
-        </p:nvSpPr>
-        <p:spPr>
-          <a:xfrm>
-            <a:off x="2286000" y="3063240"/>
-            <a:ext cx="7772400" cy="457200"/>
-          </a:xfrm>
-          <a:prstGeom prst="rect">
-            <a:avLst/>
-          </a:prstGeom>
-          <a:noFill/>
-        </p:spPr>
-        <p:txBody>
-          <a:bodyPr wrap="square">
-            <a:spAutoFit/>
-          </a:bodyPr>
-          <a:lstStyle/>
-          <a:p>
-            <a:pPr algn="ctr"/>
-            <a:r>
-              <a:rPr sz="1600" b="0">
-                <a:solidFill>
-                  <a:srgbClr val="5A5A5A"/>
-                </a:solidFill>
-                <a:latin typeface="Calibri"/>
-              </a:rPr>
-              <a:t>Moving the World – for You</a:t>
-            </a:r>
-          </a:p>
-        </p:txBody>
-      </p:sp>
-      <p:pic>
-        <p:nvPicPr>
-          <p:cNvPr id="4" name="Picture 3" descr="isuzu_logo_red.png"/>
-          <p:cNvPicPr>
-            <a:picLocks noChangeAspect="1"/>
-          </p:cNvPicPr>
-          <p:nvPr/>
-        </p:nvPicPr>
-        <p:blipFill>
-          <a:blip r:embed="rId2"/>
-          <a:stretch>
-            <a:fillRect/>
-          </a:stretch>
-        </p:blipFill>
-        <p:spPr>
-          <a:xfrm>
-            <a:off x="4631436" y="2468880"/>
-            <a:ext cx="2926080" cy="509704"/>
-          </a:xfrm>
-          <a:prstGeom prst="rect">
-            <a:avLst/>
-          </a:prstGeom>
-        </p:spPr>
-      </p:pic>
     </p:spTree>
   </p:cSld>
   <p:clrMapOvr>
@@ -11270,7 +10941,7 @@
                 </a:solidFill>
                 <a:latin typeface="Calibri"/>
               </a:rPr>
-              <a:t>PARTS PERFORMANCE</a:t>
+              <a:t>POWER BI — OFFICIAL CUT</a:t>
             </a:r>
           </a:p>
         </p:txBody>
@@ -11305,7 +10976,7 @@
                 </a:solidFill>
                 <a:latin typeface="Calibri"/>
               </a:rPr>
-              <a:t>Parts Performance — CY H1 2026 vs CY H1 2025 (commercial, ex-warranty)</a:t>
+              <a:t>FY2027 YTD (Apr–Jul): EUR 218K, +13% vs BP</a:t>
             </a:r>
           </a:p>
         </p:txBody>
@@ -11390,7 +11061,7 @@
       </p:sp>
       <p:pic>
         <p:nvPicPr>
-          <p:cNvPr id="8" name="Picture 7" descr="category_movers.png"/>
+          <p:cNvPr id="8" name="Picture 7" descr="quarter.png"/>
           <p:cNvPicPr>
             <a:picLocks noChangeAspect="1"/>
           </p:cNvPicPr>
@@ -11404,8 +11075,8 @@
         </p:blipFill>
         <p:spPr>
           <a:xfrm>
-            <a:off x="292608" y="2120980"/>
-            <a:ext cx="7178040" cy="3027520"/>
+            <a:off x="292608" y="2050572"/>
+            <a:ext cx="7178040" cy="3168335"/>
           </a:xfrm>
           <a:prstGeom prst="rect">
             <a:avLst/>
@@ -11536,7 +11207,7 @@
                 </a:solidFill>
                 <a:latin typeface="Calibri"/>
               </a:rPr>
-              <a:t>Commercial parts billing (warranty/campaign excluded) EUR 186K against EUR 213K a year earlier — -12.7% (CY H1 2026 vs CY H1 2025, Jan–Jun).</a:t>
+              <a:t>Sales EUR 218K against BP EUR 192K — +13%, and +24% on last year's EUR 176K.</a:t>
             </a:r>
           </a:p>
           <a:p>
@@ -11564,7 +11235,7 @@
                 </a:solidFill>
                 <a:latin typeface="Calibri"/>
               </a:rPr>
-              <a:t>Largest PN drops: 8976607440 (TRANSMISSION ASM; MA) EUR -4K, 1 fewer pcs; 8980139111 (VALVE; EGR) EUR -4K, 36 fewer pcs; 8972660360 (TRANSFER ASM) EUR -2K, 1 fewer pcs.</a:t>
+              <a:t>By month vs BP: Apr -32%, May +36%, Jun +41%, Jul +8%.</a:t>
             </a:r>
           </a:p>
           <a:p>
@@ -11592,35 +11263,7 @@
                 </a:solidFill>
                 <a:latin typeface="Calibri"/>
               </a:rPr>
-              <a:t>Largest PN gains: 8982705240 (ELEMENT; OIL FILTER) [NHR,NLR,NMR,TF*,UC*] EUR 2K, 96 more pcs; 8975554500 (FILTER; BLOWER UNIT) [TF*,UC*] EUR 2K, 126 more pcs; 7552622990 (PANEL; ENG HOOD) EUR 2K, 8 more pcs.</a:t>
-            </a:r>
-          </a:p>
-          <a:p>
-            <a:pPr>
-              <a:lnSpc>
-                <a:spcPct val="125000"/>
-              </a:lnSpc>
-              <a:spcAft>
-                <a:spcPts val="1000"/>
-              </a:spcAft>
-            </a:pPr>
-            <a:r>
-              <a:rPr sz="1250" b="1">
-                <a:solidFill>
-                  <a:srgbClr val="CC0E1E"/>
-                </a:solidFill>
-                <a:latin typeface="Calibri"/>
-              </a:rPr>
-              <a:t>—  </a:t>
-            </a:r>
-            <a:r>
-              <a:rPr sz="1250">
-                <a:solidFill>
-                  <a:srgbClr val="1A1A1A"/>
-                </a:solidFill>
-                <a:latin typeface="Calibri"/>
-              </a:rPr>
-              <a:t>About EUR 53K of claim-matched PN billing was stripped so this chart is aftermarket demand, not warranty.</a:t>
+              <a:t>Worth walking through the shape of the period together.</a:t>
             </a:r>
           </a:p>
         </p:txBody>
@@ -11748,7 +11391,7 @@
                 </a:solidFill>
                 <a:latin typeface="Calibri"/>
               </a:rPr>
-              <a:t>PARTS PERFORMANCE — BRAKE PARTS</a:t>
+              <a:t>PARTS PERFORMANCE</a:t>
             </a:r>
           </a:p>
         </p:txBody>
@@ -11783,7 +11426,7 @@
                 </a:solidFill>
                 <a:latin typeface="Calibri"/>
               </a:rPr>
-              <a:t>Brake parts — CY H1 2026 vs CY H1 2025 (commercial, ex-warranty)</a:t>
+              <a:t>Parts Performance — CY H1 2026 vs CY H1 2025 (commercial, ex-warranty)</a:t>
             </a:r>
           </a:p>
         </p:txBody>
@@ -11866,16 +11509,118 @@
           </a:p>
         </p:txBody>
       </p:sp>
-      <p:sp>
-        <p:nvSpPr>
-          <p:cNvPr id="8" name="TextBox 7"/>
+      <p:pic>
+        <p:nvPicPr>
+          <p:cNvPr id="8" name="Picture 7" descr="category_movers.png"/>
+          <p:cNvPicPr>
+            <a:picLocks noChangeAspect="1"/>
+          </p:cNvPicPr>
+          <p:nvPr/>
+        </p:nvPicPr>
+        <p:blipFill>
+          <a:blip r:embed="rId3"/>
+          <a:stretch>
+            <a:fillRect/>
+          </a:stretch>
+        </p:blipFill>
+        <p:spPr>
+          <a:xfrm>
+            <a:off x="292608" y="2120980"/>
+            <a:ext cx="7178040" cy="3027520"/>
+          </a:xfrm>
+          <a:prstGeom prst="rect">
+            <a:avLst/>
+          </a:prstGeom>
+        </p:spPr>
+      </p:pic>
+      <p:sp>
+        <p:nvSpPr>
+          <p:cNvPr id="9" name="Rectangle 8"/>
+          <p:cNvSpPr/>
+          <p:nvPr/>
+        </p:nvSpPr>
+        <p:spPr>
+          <a:xfrm>
+            <a:off x="7726679" y="1188720"/>
+            <a:ext cx="22000" cy="4892040"/>
+          </a:xfrm>
+          <a:prstGeom prst="rect">
+            <a:avLst/>
+          </a:prstGeom>
+          <a:solidFill>
+            <a:srgbClr val="ECECEC"/>
+          </a:solidFill>
+          <a:ln>
+            <a:noFill/>
+          </a:ln>
+        </p:spPr>
+        <p:style>
+          <a:lnRef idx="1">
+            <a:schemeClr val="accent1"/>
+          </a:lnRef>
+          <a:fillRef idx="3">
+            <a:schemeClr val="accent1"/>
+          </a:fillRef>
+          <a:effectRef idx="2">
+            <a:schemeClr val="accent1"/>
+          </a:effectRef>
+          <a:fontRef idx="minor">
+            <a:schemeClr val="lt1"/>
+          </a:fontRef>
+        </p:style>
+        <p:txBody>
+          <a:bodyPr rtlCol="0" anchor="ctr"/>
+          <a:lstStyle/>
+          <a:p>
+            <a:pPr algn="ctr"/>
+          </a:p>
+        </p:txBody>
+      </p:sp>
+      <p:sp>
+        <p:nvSpPr>
+          <p:cNvPr id="10" name="TextBox 9"/>
           <p:cNvSpPr txBox="1"/>
           <p:nvPr/>
         </p:nvSpPr>
         <p:spPr>
           <a:xfrm>
-            <a:off x="292608" y="1207008"/>
-            <a:ext cx="11612880" cy="2651760"/>
+            <a:off x="7927847" y="1234440"/>
+            <a:ext cx="3886200" cy="320040"/>
+          </a:xfrm>
+          <a:prstGeom prst="rect">
+            <a:avLst/>
+          </a:prstGeom>
+          <a:noFill/>
+        </p:spPr>
+        <p:txBody>
+          <a:bodyPr wrap="square">
+            <a:spAutoFit/>
+          </a:bodyPr>
+          <a:lstStyle/>
+          <a:p>
+            <a:pPr algn="l"/>
+            <a:r>
+              <a:rPr sz="1200" b="1">
+                <a:solidFill>
+                  <a:srgbClr val="CC0E1E"/>
+                </a:solidFill>
+                <a:latin typeface="Calibri"/>
+              </a:rPr>
+              <a:t>TAKEAWAYS</a:t>
+            </a:r>
+          </a:p>
+        </p:txBody>
+      </p:sp>
+      <p:sp>
+        <p:nvSpPr>
+          <p:cNvPr id="11" name="TextBox 10"/>
+          <p:cNvSpPr txBox="1"/>
+          <p:nvPr/>
+        </p:nvSpPr>
+        <p:spPr>
+          <a:xfrm>
+            <a:off x="7927847" y="1691640"/>
+            <a:ext cx="3794760" cy="4343400"/>
           </a:xfrm>
           <a:prstGeom prst="rect">
             <a:avLst/>
@@ -11897,7 +11642,7 @@
               </a:spcAft>
             </a:pPr>
             <a:r>
-              <a:rPr sz="1300" b="1">
+              <a:rPr sz="1250" b="1">
                 <a:solidFill>
                   <a:srgbClr val="CC0E1E"/>
                 </a:solidFill>
@@ -11906,13 +11651,13 @@
               <a:t>—  </a:t>
             </a:r>
             <a:r>
-              <a:rPr sz="1300">
+              <a:rPr sz="1250">
                 <a:solidFill>
                   <a:srgbClr val="1A1A1A"/>
                 </a:solidFill>
                 <a:latin typeface="Calibri"/>
               </a:rPr>
-              <a:t>EUR 12,155 (CY H1 2025) to EUR 6,387 (CY H1 2026), down EUR 5,768 (-47%).</a:t>
+              <a:t>Commercial parts billing (warranty/campaign excluded) EUR 183K against EUR 213K a year earlier — -14.0% (CY H1 2026 vs CY H1 2025, Jan–Jun).</a:t>
             </a:r>
           </a:p>
           <a:p>
@@ -11925,7 +11670,7 @@
               </a:spcAft>
             </a:pPr>
             <a:r>
-              <a:rPr sz="1300" b="1">
+              <a:rPr sz="1250" b="1">
                 <a:solidFill>
                   <a:srgbClr val="CC0E1E"/>
                 </a:solidFill>
@@ -11934,13 +11679,13 @@
               <a:t>—  </a:t>
             </a:r>
             <a:r>
-              <a:rPr sz="1300">
+              <a:rPr sz="1250">
                 <a:solidFill>
                   <a:srgbClr val="1A1A1A"/>
                 </a:solidFill>
                 <a:latin typeface="Calibri"/>
               </a:rPr>
-              <a:t>Largest part numbers driving the decline (by EUR):</a:t>
+              <a:t>Largest PN drops (all categories): 8976607440 (TRANSMISSION ASM; MA) EUR -4K, 1 fewer pcs; 8980139111 (VALVE; EGR) EUR -4K, 36 fewer pcs; 8972660360 (TRANSFER ASM) EUR -2K, 1 fewer pcs.</a:t>
             </a:r>
           </a:p>
           <a:p>
@@ -11953,7 +11698,7 @@
               </a:spcAft>
             </a:pPr>
             <a:r>
-              <a:rPr sz="1300" b="1">
+              <a:rPr sz="1250" b="1">
                 <a:solidFill>
                   <a:srgbClr val="CC0E1E"/>
                 </a:solidFill>
@@ -11962,13 +11707,13 @@
               <a:t>—  </a:t>
             </a:r>
             <a:r>
-              <a:rPr sz="1300">
+              <a:rPr sz="1250">
                 <a:solidFill>
                   <a:srgbClr val="1A1A1A"/>
                 </a:solidFill>
                 <a:latin typeface="Calibri"/>
               </a:rPr>
-              <a:t>5876150610 (PAD KIT; CALIPER,DISC BRK,FRT · TF*): EUR 2,026 to EUR 0, 45 fewer pieces.</a:t>
+              <a:t>Largest PN gains (all categories): 8982705240 (ELEMENT; OIL FILTER) [NHR,NLR,NMR,TF*,UC*] EUR 2K, 96 more pcs; 8975554500 (FILTER; BLOWER UNIT) [TF*,UC*] EUR 2K, 126 more pcs; 7552622990 (PANEL; ENG HOOD) EUR 2K, 8 more pcs.</a:t>
             </a:r>
           </a:p>
           <a:p>
@@ -11981,7 +11726,7 @@
               </a:spcAft>
             </a:pPr>
             <a:r>
-              <a:rPr sz="1300" b="1">
+              <a:rPr sz="1250" b="1">
                 <a:solidFill>
                   <a:srgbClr val="CC0E1E"/>
                 </a:solidFill>
@@ -11990,211 +11735,13 @@
               <a:t>—  </a:t>
             </a:r>
             <a:r>
-              <a:rPr sz="1300">
+              <a:rPr sz="1250">
                 <a:solidFill>
                   <a:srgbClr val="1A1A1A"/>
                 </a:solidFill>
                 <a:latin typeface="Calibri"/>
               </a:rPr>
-              <a:t>8980180360 (SHOE KIT; BRK,RR): EUR 1,245 to EUR 222, 23 fewer pieces.</a:t>
-            </a:r>
-          </a:p>
-          <a:p>
-            <a:pPr>
-              <a:lnSpc>
-                <a:spcPct val="125000"/>
-              </a:lnSpc>
-              <a:spcAft>
-                <a:spcPts val="1000"/>
-              </a:spcAft>
-            </a:pPr>
-            <a:r>
-              <a:rPr sz="1300" b="1">
-                <a:solidFill>
-                  <a:srgbClr val="CC0E1E"/>
-                </a:solidFill>
-                <a:latin typeface="Calibri"/>
-              </a:rPr>
-              <a:t>—  </a:t>
-            </a:r>
-            <a:r>
-              <a:rPr sz="1300">
-                <a:solidFill>
-                  <a:srgbClr val="1A1A1A"/>
-                </a:solidFill>
-                <a:latin typeface="Calibri"/>
-              </a:rPr>
-              <a:t>5876150600 (PAD KIT; CALIPER,DISC BRK,FRT · TF*): EUR 849 to EUR 0, 16 fewer pieces.</a:t>
-            </a:r>
-          </a:p>
-          <a:p>
-            <a:pPr>
-              <a:lnSpc>
-                <a:spcPct val="125000"/>
-              </a:lnSpc>
-              <a:spcAft>
-                <a:spcPts val="1000"/>
-              </a:spcAft>
-            </a:pPr>
-            <a:r>
-              <a:rPr sz="1300" b="1">
-                <a:solidFill>
-                  <a:srgbClr val="CC0E1E"/>
-                </a:solidFill>
-                <a:latin typeface="Calibri"/>
-              </a:rPr>
-              <a:t>—  </a:t>
-            </a:r>
-            <a:r>
-              <a:rPr sz="1300">
-                <a:solidFill>
-                  <a:srgbClr val="1A1A1A"/>
-                </a:solidFill>
-                <a:latin typeface="Calibri"/>
-              </a:rPr>
-              <a:t>8975546610 (PAD KIT; CALIPER,DISC BRK,FRT · TF*): EUR 755 to EUR 0, 9 fewer pieces.</a:t>
-            </a:r>
-          </a:p>
-        </p:txBody>
-      </p:sp>
-      <p:sp>
-        <p:nvSpPr>
-          <p:cNvPr id="9" name="TextBox 8"/>
-          <p:cNvSpPr txBox="1"/>
-          <p:nvPr/>
-        </p:nvSpPr>
-        <p:spPr>
-          <a:xfrm>
-            <a:off x="292608" y="3840480"/>
-            <a:ext cx="8595360" cy="274320"/>
-          </a:xfrm>
-          <a:prstGeom prst="rect">
-            <a:avLst/>
-          </a:prstGeom>
-          <a:noFill/>
-        </p:spPr>
-        <p:txBody>
-          <a:bodyPr wrap="square">
-            <a:spAutoFit/>
-          </a:bodyPr>
-          <a:lstStyle/>
-          <a:p>
-            <a:pPr algn="l"/>
-            <a:r>
-              <a:rPr sz="1300" b="1">
-                <a:solidFill>
-                  <a:srgbClr val="CC0E1E"/>
-                </a:solidFill>
-                <a:latin typeface="Calibri"/>
-              </a:rPr>
-              <a:t>Questions for us to work through together</a:t>
-            </a:r>
-          </a:p>
-        </p:txBody>
-      </p:sp>
-      <p:sp>
-        <p:nvSpPr>
-          <p:cNvPr id="10" name="TextBox 9"/>
-          <p:cNvSpPr txBox="1"/>
-          <p:nvPr/>
-        </p:nvSpPr>
-        <p:spPr>
-          <a:xfrm>
-            <a:off x="292608" y="4160520"/>
-            <a:ext cx="11612880" cy="1737360"/>
-          </a:xfrm>
-          <a:prstGeom prst="rect">
-            <a:avLst/>
-          </a:prstGeom>
-          <a:noFill/>
-        </p:spPr>
-        <p:txBody>
-          <a:bodyPr wrap="square">
-            <a:spAutoFit/>
-          </a:bodyPr>
-          <a:lstStyle/>
-          <a:p>
-            <a:pPr>
-              <a:lnSpc>
-                <a:spcPct val="125000"/>
-              </a:lnSpc>
-              <a:spcAft>
-                <a:spcPts val="1000"/>
-              </a:spcAft>
-            </a:pPr>
-            <a:r>
-              <a:rPr sz="1400" b="1">
-                <a:solidFill>
-                  <a:srgbClr val="CC0E1E"/>
-                </a:solidFill>
-                <a:latin typeface="Calibri"/>
-              </a:rPr>
-              <a:t>—  </a:t>
-            </a:r>
-            <a:r>
-              <a:rPr sz="1400">
-                <a:solidFill>
-                  <a:srgbClr val="1A1A1A"/>
-                </a:solidFill>
-                <a:latin typeface="Calibri"/>
-              </a:rPr>
-              <a:t>Is pad and rotor pricing competitive against what the dealers can buy locally?</a:t>
-            </a:r>
-          </a:p>
-          <a:p>
-            <a:pPr>
-              <a:lnSpc>
-                <a:spcPct val="125000"/>
-              </a:lnSpc>
-              <a:spcAft>
-                <a:spcPts val="1000"/>
-              </a:spcAft>
-            </a:pPr>
-            <a:r>
-              <a:rPr sz="1400" b="1">
-                <a:solidFill>
-                  <a:srgbClr val="CC0E1E"/>
-                </a:solidFill>
-                <a:latin typeface="Calibri"/>
-              </a:rPr>
-              <a:t>—  </a:t>
-            </a:r>
-            <a:r>
-              <a:rPr sz="1400">
-                <a:solidFill>
-                  <a:srgbClr val="1A1A1A"/>
-                </a:solidFill>
-                <a:latin typeface="Calibri"/>
-              </a:rPr>
-              <a:t>Is any of this stock timing on your side rather than end demand?</a:t>
-            </a:r>
-          </a:p>
-          <a:p>
-            <a:pPr>
-              <a:lnSpc>
-                <a:spcPct val="125000"/>
-              </a:lnSpc>
-              <a:spcAft>
-                <a:spcPts val="1000"/>
-              </a:spcAft>
-            </a:pPr>
-            <a:r>
-              <a:rPr sz="1400" b="1">
-                <a:solidFill>
-                  <a:srgbClr val="CC0E1E"/>
-                </a:solidFill>
-                <a:latin typeface="Calibri"/>
-              </a:rPr>
-              <a:t>—  </a:t>
-            </a:r>
-            <a:r>
-              <a:rPr sz="1400">
-                <a:solidFill>
-                  <a:srgbClr val="1A1A1A"/>
-                </a:solidFill>
-                <a:latin typeface="Calibri"/>
-              </a:rPr>
-              <a:t>Are dealers still quoting these part numbers, or have they dropped off the workshop menu?</a:t>
+              <a:t>Within Exhaust (EUR 6K, +62%): 8983682091 (PIPE; EXH) EUR 8K, 6 more pcs; 8980845954 (DPD ASM) EUR 2K, 1 more pcs; 8981521221 (COOLER; EGR) EUR 1K, 3 more pcs.</a:t>
             </a:r>
           </a:p>
         </p:txBody>
@@ -12322,7 +11869,7 @@
                 </a:solidFill>
                 <a:latin typeface="Calibri"/>
               </a:rPr>
-              <a:t>PARTS PERFORMANCE — ENGINE PARTS</a:t>
+              <a:t>PARTS PERFORMANCE — BRAKE PARTS</a:t>
             </a:r>
           </a:p>
         </p:txBody>
@@ -12357,7 +11904,7 @@
                 </a:solidFill>
                 <a:latin typeface="Calibri"/>
               </a:rPr>
-              <a:t>Engine parts — CY H1 2026 vs CY H1 2025 (commercial, ex-warranty)</a:t>
+              <a:t>Brake parts — CY H1 2026 vs CY H1 2025 (commercial, ex-warranty)</a:t>
             </a:r>
           </a:p>
         </p:txBody>
@@ -12486,7 +12033,7 @@
                 </a:solidFill>
                 <a:latin typeface="Calibri"/>
               </a:rPr>
-              <a:t>EUR 6,374 (CY H1 2025) to EUR 1,530 (CY H1 2026), down EUR 4,844 (-76%).</a:t>
+              <a:t>EUR 12,155 (CY H1 2025) to EUR 6,387 (CY H1 2026), down EUR 5,768 (-47%).</a:t>
             </a:r>
           </a:p>
           <a:p>
@@ -12542,7 +12089,7 @@
                 </a:solidFill>
                 <a:latin typeface="Calibri"/>
               </a:rPr>
-              <a:t>8981706190 (HEAD ASM; CYL): EUR 1,176 to EUR 0, 1 fewer pieces.</a:t>
+              <a:t>5876150610 (PAD KIT; CALIPER,DISC BRK,FRT · TF*): EUR 2,026 to EUR 0, 45 fewer pieces.</a:t>
             </a:r>
           </a:p>
           <a:p>
@@ -12570,7 +12117,7 @@
                 </a:solidFill>
                 <a:latin typeface="Calibri"/>
               </a:rPr>
-              <a:t>8978775550 (CAMERA ASM): EUR 1,088 to EUR 0, 1 fewer pieces.</a:t>
+              <a:t>8980180360 (SHOE KIT; BRK,RR): EUR 1,245 to EUR 222, 23 fewer pieces.</a:t>
             </a:r>
           </a:p>
           <a:p>
@@ -12598,7 +12145,7 @@
                 </a:solidFill>
                 <a:latin typeface="Calibri"/>
               </a:rPr>
-              <a:t>8983360671 (VALVE; EVRV): EUR 885 to EUR 190, 9 fewer pieces.</a:t>
+              <a:t>5876150600 (PAD KIT; CALIPER,DISC BRK,FRT · TF*): EUR 849 to EUR 0, 16 fewer pieces.</a:t>
             </a:r>
           </a:p>
           <a:p>
@@ -12626,7 +12173,7 @@
                 </a:solidFill>
                 <a:latin typeface="Calibri"/>
               </a:rPr>
-              <a:t>8981162600 (VALVE; EVRV): EUR 893 to EUR 453, 10 fewer pieces.</a:t>
+              <a:t>8975546610 (PAD KIT; CALIPER,DISC BRK,FRT · TF*): EUR 755 to EUR 0, 9 fewer pieces.</a:t>
             </a:r>
           </a:p>
         </p:txBody>
@@ -12712,7 +12259,7 @@
                 </a:solidFill>
                 <a:latin typeface="Calibri"/>
               </a:rPr>
-              <a:t>Is this pricing against what the dealers can buy locally?</a:t>
+              <a:t>Is pad and rotor pricing competitive against what the dealers can buy locally?</a:t>
             </a:r>
           </a:p>
           <a:p>
@@ -12768,7 +12315,7 @@
                 </a:solidFill>
                 <a:latin typeface="Calibri"/>
               </a:rPr>
-              <a:t>What would make the biggest difference to keep this business with us?</a:t>
+              <a:t>Are dealers still quoting these part numbers, or have they dropped off the workshop menu?</a:t>
             </a:r>
           </a:p>
         </p:txBody>
@@ -12896,7 +12443,7 @@
                 </a:solidFill>
                 <a:latin typeface="Calibri"/>
               </a:rPr>
-              <a:t>PARTS PERFORMANCE — HYDRAULIC / MECHANICAL</a:t>
+              <a:t>PARTS PERFORMANCE — ENGINE PARTS</a:t>
             </a:r>
           </a:p>
         </p:txBody>
@@ -12931,7 +12478,7 @@
                 </a:solidFill>
                 <a:latin typeface="Calibri"/>
               </a:rPr>
-              <a:t>Hydraulic / mechanical — CY H1 2026 vs CY H1 2025 (commercial, ex-warranty)</a:t>
+              <a:t>Engine parts — CY H1 2026 vs CY H1 2025 (commercial, ex-warranty)</a:t>
             </a:r>
           </a:p>
         </p:txBody>
@@ -13060,7 +12607,7 @@
                 </a:solidFill>
                 <a:latin typeface="Calibri"/>
               </a:rPr>
-              <a:t>EUR 12,106 (CY H1 2025) to EUR 8,425 (CY H1 2026), down EUR 3,682 (-30%).</a:t>
+              <a:t>EUR 6,374 (CY H1 2025) to EUR 1,530 (CY H1 2026), down EUR 4,844 (-76%).</a:t>
             </a:r>
           </a:p>
           <a:p>
@@ -13116,7 +12663,7 @@
                 </a:solidFill>
                 <a:latin typeface="Calibri"/>
               </a:rPr>
-              <a:t>8981454531 (OVERHAUL KIT; SUPPLY PUMP): EUR 2,131 to EUR 1,474, 12 fewer pieces.</a:t>
+              <a:t>8981706190 (HEAD ASM; CYL): EUR 1,176 to EUR 0, 1 fewer pieces.</a:t>
             </a:r>
           </a:p>
           <a:p>
@@ -13144,7 +12691,7 @@
                 </a:solidFill>
                 <a:latin typeface="Calibri"/>
               </a:rPr>
-              <a:t>8981480632 (FLYWHEEL): EUR 516 to EUR 0, 2 fewer pieces.</a:t>
+              <a:t>8978775550 (CAMERA ASM): EUR 1,088 to EUR 0, 1 fewer pieces.</a:t>
             </a:r>
           </a:p>
           <a:p>
@@ -13172,7 +12719,7 @@
                 </a:solidFill>
                 <a:latin typeface="Calibri"/>
               </a:rPr>
-              <a:t>8975274910 (WHEEL; DISC,AL): EUR 438 to EUR 0, 2 fewer pieces.</a:t>
+              <a:t>8983360671 (VALVE; EVRV): EUR 885 to EUR 190, 9 fewer pieces.</a:t>
             </a:r>
           </a:p>
           <a:p>
@@ -13200,7 +12747,7 @@
                 </a:solidFill>
                 <a:latin typeface="Calibri"/>
               </a:rPr>
-              <a:t>8973876741 (SHAFT ASM; FRT DRIVE): EUR 426 to EUR 0, 1 fewer pieces.</a:t>
+              <a:t>8981162600 (VALVE; EVRV): EUR 893 to EUR 453, 10 fewer pieces.</a:t>
             </a:r>
           </a:p>
         </p:txBody>
@@ -13470,7 +13017,7 @@
                 </a:solidFill>
                 <a:latin typeface="Calibri"/>
               </a:rPr>
-              <a:t>PARTS PERFORMANCE — GROWTH</a:t>
+              <a:t>PARTS PERFORMANCE — BODY PARTS</a:t>
             </a:r>
           </a:p>
         </p:txBody>
@@ -13505,7 +13052,7 @@
                 </a:solidFill>
                 <a:latin typeface="Calibri"/>
               </a:rPr>
-              <a:t>Where volume grew — CY H1 2026 vs CY H1 2025 (commercial, ex-warranty)</a:t>
+              <a:t>Body parts — CY H1 2026 vs CY H1 2025 (commercial, ex-warranty)</a:t>
             </a:r>
           </a:p>
         </p:txBody>
@@ -13584,6 +13131,580 @@
                 <a:latin typeface="Calibri"/>
               </a:rPr>
               <a:t>7</a:t>
+            </a:r>
+          </a:p>
+        </p:txBody>
+      </p:sp>
+      <p:sp>
+        <p:nvSpPr>
+          <p:cNvPr id="8" name="TextBox 7"/>
+          <p:cNvSpPr txBox="1"/>
+          <p:nvPr/>
+        </p:nvSpPr>
+        <p:spPr>
+          <a:xfrm>
+            <a:off x="292608" y="1207008"/>
+            <a:ext cx="11612880" cy="2651760"/>
+          </a:xfrm>
+          <a:prstGeom prst="rect">
+            <a:avLst/>
+          </a:prstGeom>
+          <a:noFill/>
+        </p:spPr>
+        <p:txBody>
+          <a:bodyPr wrap="square">
+            <a:spAutoFit/>
+          </a:bodyPr>
+          <a:lstStyle/>
+          <a:p>
+            <a:pPr>
+              <a:lnSpc>
+                <a:spcPct val="125000"/>
+              </a:lnSpc>
+              <a:spcAft>
+                <a:spcPts val="1000"/>
+              </a:spcAft>
+            </a:pPr>
+            <a:r>
+              <a:rPr sz="1300" b="1">
+                <a:solidFill>
+                  <a:srgbClr val="CC0E1E"/>
+                </a:solidFill>
+                <a:latin typeface="Calibri"/>
+              </a:rPr>
+              <a:t>—  </a:t>
+            </a:r>
+            <a:r>
+              <a:rPr sz="1300">
+                <a:solidFill>
+                  <a:srgbClr val="1A1A1A"/>
+                </a:solidFill>
+                <a:latin typeface="Calibri"/>
+              </a:rPr>
+              <a:t>EUR 42,243 (CY H1 2025) to EUR 37,515 (CY H1 2026), down EUR 4,728 (-11%).</a:t>
+            </a:r>
+          </a:p>
+          <a:p>
+            <a:pPr>
+              <a:lnSpc>
+                <a:spcPct val="125000"/>
+              </a:lnSpc>
+              <a:spcAft>
+                <a:spcPts val="1000"/>
+              </a:spcAft>
+            </a:pPr>
+            <a:r>
+              <a:rPr sz="1300" b="1">
+                <a:solidFill>
+                  <a:srgbClr val="CC0E1E"/>
+                </a:solidFill>
+                <a:latin typeface="Calibri"/>
+              </a:rPr>
+              <a:t>—  </a:t>
+            </a:r>
+            <a:r>
+              <a:rPr sz="1300">
+                <a:solidFill>
+                  <a:srgbClr val="1A1A1A"/>
+                </a:solidFill>
+                <a:latin typeface="Calibri"/>
+              </a:rPr>
+              <a:t>Largest part numbers driving the decline (by EUR):</a:t>
+            </a:r>
+          </a:p>
+          <a:p>
+            <a:pPr>
+              <a:lnSpc>
+                <a:spcPct val="125000"/>
+              </a:lnSpc>
+              <a:spcAft>
+                <a:spcPts val="1000"/>
+              </a:spcAft>
+            </a:pPr>
+            <a:r>
+              <a:rPr sz="1300" b="1">
+                <a:solidFill>
+                  <a:srgbClr val="CC0E1E"/>
+                </a:solidFill>
+                <a:latin typeface="Calibri"/>
+              </a:rPr>
+              <a:t>—  </a:t>
+            </a:r>
+            <a:r>
+              <a:rPr sz="1300">
+                <a:solidFill>
+                  <a:srgbClr val="1A1A1A"/>
+                </a:solidFill>
+                <a:latin typeface="Calibri"/>
+              </a:rPr>
+              <a:t>8975509392 (BUMPER ASM; FRT): EUR 2,569 to EUR 1,384, 8 fewer pieces.</a:t>
+            </a:r>
+          </a:p>
+          <a:p>
+            <a:pPr>
+              <a:lnSpc>
+                <a:spcPct val="125000"/>
+              </a:lnSpc>
+              <a:spcAft>
+                <a:spcPts val="1000"/>
+              </a:spcAft>
+            </a:pPr>
+            <a:r>
+              <a:rPr sz="1300" b="1">
+                <a:solidFill>
+                  <a:srgbClr val="CC0E1E"/>
+                </a:solidFill>
+                <a:latin typeface="Calibri"/>
+              </a:rPr>
+              <a:t>—  </a:t>
+            </a:r>
+            <a:r>
+              <a:rPr sz="1300">
+                <a:solidFill>
+                  <a:srgbClr val="1A1A1A"/>
+                </a:solidFill>
+                <a:latin typeface="Calibri"/>
+              </a:rPr>
+              <a:t>8981532774 (BUMPER; RR): EUR 1,176 to EUR 0, 5 fewer pieces.</a:t>
+            </a:r>
+          </a:p>
+          <a:p>
+            <a:pPr>
+              <a:lnSpc>
+                <a:spcPct val="125000"/>
+              </a:lnSpc>
+              <a:spcAft>
+                <a:spcPts val="1000"/>
+              </a:spcAft>
+            </a:pPr>
+            <a:r>
+              <a:rPr sz="1300" b="1">
+                <a:solidFill>
+                  <a:srgbClr val="CC0E1E"/>
+                </a:solidFill>
+                <a:latin typeface="Calibri"/>
+              </a:rPr>
+              <a:t>—  </a:t>
+            </a:r>
+            <a:r>
+              <a:rPr sz="1300">
+                <a:solidFill>
+                  <a:srgbClr val="1A1A1A"/>
+                </a:solidFill>
+                <a:latin typeface="Calibri"/>
+              </a:rPr>
+              <a:t>8978461152 (GLASS; WINDSHIELD): EUR 882 to EUR 0, 4 fewer pieces.</a:t>
+            </a:r>
+          </a:p>
+          <a:p>
+            <a:pPr>
+              <a:lnSpc>
+                <a:spcPct val="125000"/>
+              </a:lnSpc>
+              <a:spcAft>
+                <a:spcPts val="1000"/>
+              </a:spcAft>
+            </a:pPr>
+            <a:r>
+              <a:rPr sz="1300" b="1">
+                <a:solidFill>
+                  <a:srgbClr val="CC0E1E"/>
+                </a:solidFill>
+                <a:latin typeface="Calibri"/>
+              </a:rPr>
+              <a:t>—  </a:t>
+            </a:r>
+            <a:r>
+              <a:rPr sz="1300">
+                <a:solidFill>
+                  <a:srgbClr val="1A1A1A"/>
+                </a:solidFill>
+                <a:latin typeface="Calibri"/>
+              </a:rPr>
+              <a:t>8979089293 (BACK ASM; SEAT): EUR 764 to EUR 0, 1 fewer pieces.</a:t>
+            </a:r>
+          </a:p>
+        </p:txBody>
+      </p:sp>
+      <p:sp>
+        <p:nvSpPr>
+          <p:cNvPr id="9" name="TextBox 8"/>
+          <p:cNvSpPr txBox="1"/>
+          <p:nvPr/>
+        </p:nvSpPr>
+        <p:spPr>
+          <a:xfrm>
+            <a:off x="292608" y="3840480"/>
+            <a:ext cx="8595360" cy="274320"/>
+          </a:xfrm>
+          <a:prstGeom prst="rect">
+            <a:avLst/>
+          </a:prstGeom>
+          <a:noFill/>
+        </p:spPr>
+        <p:txBody>
+          <a:bodyPr wrap="square">
+            <a:spAutoFit/>
+          </a:bodyPr>
+          <a:lstStyle/>
+          <a:p>
+            <a:pPr algn="l"/>
+            <a:r>
+              <a:rPr sz="1300" b="1">
+                <a:solidFill>
+                  <a:srgbClr val="CC0E1E"/>
+                </a:solidFill>
+                <a:latin typeface="Calibri"/>
+              </a:rPr>
+              <a:t>Questions for us to work through together</a:t>
+            </a:r>
+          </a:p>
+        </p:txBody>
+      </p:sp>
+      <p:sp>
+        <p:nvSpPr>
+          <p:cNvPr id="10" name="TextBox 9"/>
+          <p:cNvSpPr txBox="1"/>
+          <p:nvPr/>
+        </p:nvSpPr>
+        <p:spPr>
+          <a:xfrm>
+            <a:off x="292608" y="4160520"/>
+            <a:ext cx="11612880" cy="1737360"/>
+          </a:xfrm>
+          <a:prstGeom prst="rect">
+            <a:avLst/>
+          </a:prstGeom>
+          <a:noFill/>
+        </p:spPr>
+        <p:txBody>
+          <a:bodyPr wrap="square">
+            <a:spAutoFit/>
+          </a:bodyPr>
+          <a:lstStyle/>
+          <a:p>
+            <a:pPr>
+              <a:lnSpc>
+                <a:spcPct val="125000"/>
+              </a:lnSpc>
+              <a:spcAft>
+                <a:spcPts val="1000"/>
+              </a:spcAft>
+            </a:pPr>
+            <a:r>
+              <a:rPr sz="1400" b="1">
+                <a:solidFill>
+                  <a:srgbClr val="CC0E1E"/>
+                </a:solidFill>
+                <a:latin typeface="Calibri"/>
+              </a:rPr>
+              <a:t>—  </a:t>
+            </a:r>
+            <a:r>
+              <a:rPr sz="1400">
+                <a:solidFill>
+                  <a:srgbClr val="1A1A1A"/>
+                </a:solidFill>
+                <a:latin typeface="Calibri"/>
+              </a:rPr>
+              <a:t>Is this pricing against what the dealers can buy locally?</a:t>
+            </a:r>
+          </a:p>
+          <a:p>
+            <a:pPr>
+              <a:lnSpc>
+                <a:spcPct val="125000"/>
+              </a:lnSpc>
+              <a:spcAft>
+                <a:spcPts val="1000"/>
+              </a:spcAft>
+            </a:pPr>
+            <a:r>
+              <a:rPr sz="1400" b="1">
+                <a:solidFill>
+                  <a:srgbClr val="CC0E1E"/>
+                </a:solidFill>
+                <a:latin typeface="Calibri"/>
+              </a:rPr>
+              <a:t>—  </a:t>
+            </a:r>
+            <a:r>
+              <a:rPr sz="1400">
+                <a:solidFill>
+                  <a:srgbClr val="1A1A1A"/>
+                </a:solidFill>
+                <a:latin typeface="Calibri"/>
+              </a:rPr>
+              <a:t>Is any of this stock timing on your side rather than end demand?</a:t>
+            </a:r>
+          </a:p>
+          <a:p>
+            <a:pPr>
+              <a:lnSpc>
+                <a:spcPct val="125000"/>
+              </a:lnSpc>
+              <a:spcAft>
+                <a:spcPts val="1000"/>
+              </a:spcAft>
+            </a:pPr>
+            <a:r>
+              <a:rPr sz="1400" b="1">
+                <a:solidFill>
+                  <a:srgbClr val="CC0E1E"/>
+                </a:solidFill>
+                <a:latin typeface="Calibri"/>
+              </a:rPr>
+              <a:t>—  </a:t>
+            </a:r>
+            <a:r>
+              <a:rPr sz="1400">
+                <a:solidFill>
+                  <a:srgbClr val="1A1A1A"/>
+                </a:solidFill>
+                <a:latin typeface="Calibri"/>
+              </a:rPr>
+              <a:t>What would make the biggest difference to keep this business with us?</a:t>
+            </a:r>
+          </a:p>
+        </p:txBody>
+      </p:sp>
+    </p:spTree>
+  </p:cSld>
+  <p:clrMapOvr>
+    <a:masterClrMapping/>
+  </p:clrMapOvr>
+</p:sld>
+</file>
+
+<file path=ppt/slides/slide8.xml><?xml version="1.0" encoding="utf-8"?>
+<p:sld xmlns:a="http://schemas.openxmlformats.org/drawingml/2006/main" xmlns:p="http://schemas.openxmlformats.org/presentationml/2006/main" xmlns:r="http://schemas.openxmlformats.org/officeDocument/2006/relationships">
+  <p:cSld>
+    <p:bg>
+      <p:bgPr>
+        <a:solidFill>
+          <a:srgbClr val="FFFFFF"/>
+        </a:solidFill>
+        <a:effectLst/>
+      </p:bgPr>
+    </p:bg>
+    <p:spTree>
+      <p:nvGrpSpPr>
+        <p:cNvPr id="1" name=""/>
+        <p:cNvGrpSpPr/>
+        <p:nvPr/>
+      </p:nvGrpSpPr>
+      <p:grpSpPr/>
+      <p:pic>
+        <p:nvPicPr>
+          <p:cNvPr id="2" name="Picture 1" descr="isuzu_logo_red.png"/>
+          <p:cNvPicPr>
+            <a:picLocks noChangeAspect="1"/>
+          </p:cNvPicPr>
+          <p:nvPr/>
+        </p:nvPicPr>
+        <p:blipFill>
+          <a:blip r:embed="rId2"/>
+          <a:stretch>
+            <a:fillRect/>
+          </a:stretch>
+        </p:blipFill>
+        <p:spPr>
+          <a:xfrm>
+            <a:off x="256032" y="6263640"/>
+            <a:ext cx="1679787" cy="292608"/>
+          </a:xfrm>
+          <a:prstGeom prst="rect">
+            <a:avLst/>
+          </a:prstGeom>
+        </p:spPr>
+      </p:pic>
+      <p:sp>
+        <p:nvSpPr>
+          <p:cNvPr id="3" name="Rectangle 2"/>
+          <p:cNvSpPr/>
+          <p:nvPr/>
+        </p:nvSpPr>
+        <p:spPr>
+          <a:xfrm>
+            <a:off x="0" y="6766560"/>
+            <a:ext cx="12188952" cy="91440"/>
+          </a:xfrm>
+          <a:prstGeom prst="rect">
+            <a:avLst/>
+          </a:prstGeom>
+          <a:solidFill>
+            <a:srgbClr val="CC0E1E"/>
+          </a:solidFill>
+          <a:ln>
+            <a:noFill/>
+          </a:ln>
+        </p:spPr>
+        <p:style>
+          <a:lnRef idx="1">
+            <a:schemeClr val="accent1"/>
+          </a:lnRef>
+          <a:fillRef idx="3">
+            <a:schemeClr val="accent1"/>
+          </a:fillRef>
+          <a:effectRef idx="2">
+            <a:schemeClr val="accent1"/>
+          </a:effectRef>
+          <a:fontRef idx="minor">
+            <a:schemeClr val="lt1"/>
+          </a:fontRef>
+        </p:style>
+        <p:txBody>
+          <a:bodyPr rtlCol="0" anchor="ctr"/>
+          <a:lstStyle/>
+          <a:p>
+            <a:pPr algn="ctr"/>
+          </a:p>
+        </p:txBody>
+      </p:sp>
+      <p:sp>
+        <p:nvSpPr>
+          <p:cNvPr id="4" name="TextBox 3"/>
+          <p:cNvSpPr txBox="1"/>
+          <p:nvPr/>
+        </p:nvSpPr>
+        <p:spPr>
+          <a:xfrm>
+            <a:off x="292608" y="201168"/>
+            <a:ext cx="11430000" cy="274320"/>
+          </a:xfrm>
+          <a:prstGeom prst="rect">
+            <a:avLst/>
+          </a:prstGeom>
+          <a:noFill/>
+        </p:spPr>
+        <p:txBody>
+          <a:bodyPr wrap="square">
+            <a:spAutoFit/>
+          </a:bodyPr>
+          <a:lstStyle/>
+          <a:p>
+            <a:pPr algn="l"/>
+            <a:r>
+              <a:rPr sz="1100" b="1">
+                <a:solidFill>
+                  <a:srgbClr val="CC0E1E"/>
+                </a:solidFill>
+                <a:latin typeface="Calibri"/>
+              </a:rPr>
+              <a:t>PARTS PERFORMANCE — GROWTH</a:t>
+            </a:r>
+          </a:p>
+        </p:txBody>
+      </p:sp>
+      <p:sp>
+        <p:nvSpPr>
+          <p:cNvPr id="5" name="TextBox 4"/>
+          <p:cNvSpPr txBox="1"/>
+          <p:nvPr/>
+        </p:nvSpPr>
+        <p:spPr>
+          <a:xfrm>
+            <a:off x="292608" y="475488"/>
+            <a:ext cx="11612880" cy="566928"/>
+          </a:xfrm>
+          <a:prstGeom prst="rect">
+            <a:avLst/>
+          </a:prstGeom>
+          <a:noFill/>
+        </p:spPr>
+        <p:txBody>
+          <a:bodyPr wrap="square">
+            <a:spAutoFit/>
+          </a:bodyPr>
+          <a:lstStyle/>
+          <a:p>
+            <a:pPr algn="l"/>
+            <a:r>
+              <a:rPr sz="2500" b="1">
+                <a:solidFill>
+                  <a:srgbClr val="1A1A1A"/>
+                </a:solidFill>
+                <a:latin typeface="Calibri"/>
+              </a:rPr>
+              <a:t>Where volume grew — CY H1 2026 vs CY H1 2025 (commercial, ex-warranty)</a:t>
+            </a:r>
+          </a:p>
+        </p:txBody>
+      </p:sp>
+      <p:sp>
+        <p:nvSpPr>
+          <p:cNvPr id="6" name="Rectangle 5"/>
+          <p:cNvSpPr/>
+          <p:nvPr/>
+        </p:nvSpPr>
+        <p:spPr>
+          <a:xfrm>
+            <a:off x="292608" y="1005840"/>
+            <a:ext cx="11612880" cy="28000"/>
+          </a:xfrm>
+          <a:prstGeom prst="rect">
+            <a:avLst/>
+          </a:prstGeom>
+          <a:solidFill>
+            <a:srgbClr val="CC0E1E"/>
+          </a:solidFill>
+          <a:ln>
+            <a:noFill/>
+          </a:ln>
+        </p:spPr>
+        <p:style>
+          <a:lnRef idx="1">
+            <a:schemeClr val="accent1"/>
+          </a:lnRef>
+          <a:fillRef idx="3">
+            <a:schemeClr val="accent1"/>
+          </a:fillRef>
+          <a:effectRef idx="2">
+            <a:schemeClr val="accent1"/>
+          </a:effectRef>
+          <a:fontRef idx="minor">
+            <a:schemeClr val="lt1"/>
+          </a:fontRef>
+        </p:style>
+        <p:txBody>
+          <a:bodyPr rtlCol="0" anchor="ctr"/>
+          <a:lstStyle/>
+          <a:p>
+            <a:pPr algn="ctr"/>
+          </a:p>
+        </p:txBody>
+      </p:sp>
+      <p:sp>
+        <p:nvSpPr>
+          <p:cNvPr id="7" name="TextBox 6"/>
+          <p:cNvSpPr txBox="1"/>
+          <p:nvPr/>
+        </p:nvSpPr>
+        <p:spPr>
+          <a:xfrm>
+            <a:off x="11594592" y="6473952"/>
+            <a:ext cx="365760" cy="274320"/>
+          </a:xfrm>
+          <a:prstGeom prst="rect">
+            <a:avLst/>
+          </a:prstGeom>
+          <a:noFill/>
+        </p:spPr>
+        <p:txBody>
+          <a:bodyPr wrap="square">
+            <a:spAutoFit/>
+          </a:bodyPr>
+          <a:lstStyle/>
+          <a:p>
+            <a:pPr algn="r"/>
+            <a:r>
+              <a:rPr sz="1000" b="0">
+                <a:solidFill>
+                  <a:srgbClr val="5A5A5A"/>
+                </a:solidFill>
+                <a:latin typeface="Calibri"/>
+              </a:rPr>
+              <a:t>8</a:t>
             </a:r>
           </a:p>
         </p:txBody>
@@ -14713,7 +14834,7 @@
 </p:sld>
 </file>
 
-<file path=ppt/slides/slide8.xml><?xml version="1.0" encoding="utf-8"?>
+<file path=ppt/slides/slide9.xml><?xml version="1.0" encoding="utf-8"?>
 <p:sld xmlns:a="http://schemas.openxmlformats.org/drawingml/2006/main" xmlns:p="http://schemas.openxmlformats.org/presentationml/2006/main" xmlns:r="http://schemas.openxmlformats.org/officeDocument/2006/relationships">
   <p:cSld>
     <p:bg>
@@ -14941,7 +15062,7 @@
                 </a:solidFill>
                 <a:latin typeface="Calibri"/>
               </a:rPr>
-              <a:t>8</a:t>
+              <a:t>9</a:t>
             </a:r>
           </a:p>
         </p:txBody>
@@ -15312,7 +15433,7 @@
                           </a:solidFill>
                           <a:latin typeface="Calibri"/>
                         </a:rPr>
-                        <a:t>EUR 6,738</a:t>
+                        <a:t>EUR 3,419</a:t>
                       </a:r>
                     </a:p>
                   </a:txBody>
@@ -15707,382 +15828,6 @@
                 <a:latin typeface="Calibri"/>
               </a:rPr>
               <a:t>A first sale can be a new model, a supersession, timing, or a warranty campaign. It is not treated as a commercial win until that cause is confirmed.</a:t>
-            </a:r>
-          </a:p>
-        </p:txBody>
-      </p:sp>
-    </p:spTree>
-  </p:cSld>
-  <p:clrMapOvr>
-    <a:masterClrMapping/>
-  </p:clrMapOvr>
-</p:sld>
-</file>
-
-<file path=ppt/slides/slide9.xml><?xml version="1.0" encoding="utf-8"?>
-<p:sld xmlns:a="http://schemas.openxmlformats.org/drawingml/2006/main" xmlns:p="http://schemas.openxmlformats.org/presentationml/2006/main" xmlns:r="http://schemas.openxmlformats.org/officeDocument/2006/relationships">
-  <p:cSld>
-    <p:bg>
-      <p:bgPr>
-        <a:solidFill>
-          <a:srgbClr val="FFFFFF"/>
-        </a:solidFill>
-        <a:effectLst/>
-      </p:bgPr>
-    </p:bg>
-    <p:spTree>
-      <p:nvGrpSpPr>
-        <p:cNvPr id="1" name=""/>
-        <p:cNvGrpSpPr/>
-        <p:nvPr/>
-      </p:nvGrpSpPr>
-      <p:grpSpPr/>
-      <p:pic>
-        <p:nvPicPr>
-          <p:cNvPr id="2" name="Picture 1" descr="isuzu_logo_red.png"/>
-          <p:cNvPicPr>
-            <a:picLocks noChangeAspect="1"/>
-          </p:cNvPicPr>
-          <p:nvPr/>
-        </p:nvPicPr>
-        <p:blipFill>
-          <a:blip r:embed="rId2"/>
-          <a:stretch>
-            <a:fillRect/>
-          </a:stretch>
-        </p:blipFill>
-        <p:spPr>
-          <a:xfrm>
-            <a:off x="256032" y="6263640"/>
-            <a:ext cx="1679787" cy="292608"/>
-          </a:xfrm>
-          <a:prstGeom prst="rect">
-            <a:avLst/>
-          </a:prstGeom>
-        </p:spPr>
-      </p:pic>
-      <p:sp>
-        <p:nvSpPr>
-          <p:cNvPr id="3" name="Rectangle 2"/>
-          <p:cNvSpPr/>
-          <p:nvPr/>
-        </p:nvSpPr>
-        <p:spPr>
-          <a:xfrm>
-            <a:off x="0" y="6766560"/>
-            <a:ext cx="12188952" cy="91440"/>
-          </a:xfrm>
-          <a:prstGeom prst="rect">
-            <a:avLst/>
-          </a:prstGeom>
-          <a:solidFill>
-            <a:srgbClr val="CC0E1E"/>
-          </a:solidFill>
-          <a:ln>
-            <a:noFill/>
-          </a:ln>
-        </p:spPr>
-        <p:style>
-          <a:lnRef idx="1">
-            <a:schemeClr val="accent1"/>
-          </a:lnRef>
-          <a:fillRef idx="3">
-            <a:schemeClr val="accent1"/>
-          </a:fillRef>
-          <a:effectRef idx="2">
-            <a:schemeClr val="accent1"/>
-          </a:effectRef>
-          <a:fontRef idx="minor">
-            <a:schemeClr val="lt1"/>
-          </a:fontRef>
-        </p:style>
-        <p:txBody>
-          <a:bodyPr rtlCol="0" anchor="ctr"/>
-          <a:lstStyle/>
-          <a:p>
-            <a:pPr algn="ctr"/>
-          </a:p>
-        </p:txBody>
-      </p:sp>
-      <p:sp>
-        <p:nvSpPr>
-          <p:cNvPr id="4" name="TextBox 3"/>
-          <p:cNvSpPr txBox="1"/>
-          <p:nvPr/>
-        </p:nvSpPr>
-        <p:spPr>
-          <a:xfrm>
-            <a:off x="292608" y="201168"/>
-            <a:ext cx="11430000" cy="274320"/>
-          </a:xfrm>
-          <a:prstGeom prst="rect">
-            <a:avLst/>
-          </a:prstGeom>
-          <a:noFill/>
-        </p:spPr>
-        <p:txBody>
-          <a:bodyPr wrap="square">
-            <a:spAutoFit/>
-          </a:bodyPr>
-          <a:lstStyle/>
-          <a:p>
-            <a:pPr algn="l"/>
-            <a:r>
-              <a:rPr sz="1100" b="1">
-                <a:solidFill>
-                  <a:srgbClr val="CC0E1E"/>
-                </a:solidFill>
-                <a:latin typeface="Calibri"/>
-              </a:rPr>
-              <a:t>SALES-TO-DEALER</a:t>
-            </a:r>
-          </a:p>
-        </p:txBody>
-      </p:sp>
-      <p:sp>
-        <p:nvSpPr>
-          <p:cNvPr id="5" name="TextBox 4"/>
-          <p:cNvSpPr txBox="1"/>
-          <p:nvPr/>
-        </p:nvSpPr>
-        <p:spPr>
-          <a:xfrm>
-            <a:off x="292608" y="475488"/>
-            <a:ext cx="11612880" cy="566928"/>
-          </a:xfrm>
-          <a:prstGeom prst="rect">
-            <a:avLst/>
-          </a:prstGeom>
-          <a:noFill/>
-        </p:spPr>
-        <p:txBody>
-          <a:bodyPr wrap="square">
-            <a:spAutoFit/>
-          </a:bodyPr>
-          <a:lstStyle/>
-          <a:p>
-            <a:pPr algn="l"/>
-            <a:r>
-              <a:rPr sz="2500" b="1">
-                <a:solidFill>
-                  <a:srgbClr val="1A1A1A"/>
-                </a:solidFill>
-                <a:latin typeface="Calibri"/>
-              </a:rPr>
-              <a:t>Sales-to-Dealer outlook — FY2027</a:t>
-            </a:r>
-          </a:p>
-        </p:txBody>
-      </p:sp>
-      <p:sp>
-        <p:nvSpPr>
-          <p:cNvPr id="6" name="Rectangle 5"/>
-          <p:cNvSpPr/>
-          <p:nvPr/>
-        </p:nvSpPr>
-        <p:spPr>
-          <a:xfrm>
-            <a:off x="292608" y="1005840"/>
-            <a:ext cx="11612880" cy="28000"/>
-          </a:xfrm>
-          <a:prstGeom prst="rect">
-            <a:avLst/>
-          </a:prstGeom>
-          <a:solidFill>
-            <a:srgbClr val="CC0E1E"/>
-          </a:solidFill>
-          <a:ln>
-            <a:noFill/>
-          </a:ln>
-        </p:spPr>
-        <p:style>
-          <a:lnRef idx="1">
-            <a:schemeClr val="accent1"/>
-          </a:lnRef>
-          <a:fillRef idx="3">
-            <a:schemeClr val="accent1"/>
-          </a:fillRef>
-          <a:effectRef idx="2">
-            <a:schemeClr val="accent1"/>
-          </a:effectRef>
-          <a:fontRef idx="minor">
-            <a:schemeClr val="lt1"/>
-          </a:fontRef>
-        </p:style>
-        <p:txBody>
-          <a:bodyPr rtlCol="0" anchor="ctr"/>
-          <a:lstStyle/>
-          <a:p>
-            <a:pPr algn="ctr"/>
-          </a:p>
-        </p:txBody>
-      </p:sp>
-      <p:sp>
-        <p:nvSpPr>
-          <p:cNvPr id="7" name="TextBox 6"/>
-          <p:cNvSpPr txBox="1"/>
-          <p:nvPr/>
-        </p:nvSpPr>
-        <p:spPr>
-          <a:xfrm>
-            <a:off x="11594592" y="6473952"/>
-            <a:ext cx="365760" cy="274320"/>
-          </a:xfrm>
-          <a:prstGeom prst="rect">
-            <a:avLst/>
-          </a:prstGeom>
-          <a:noFill/>
-        </p:spPr>
-        <p:txBody>
-          <a:bodyPr wrap="square">
-            <a:spAutoFit/>
-          </a:bodyPr>
-          <a:lstStyle/>
-          <a:p>
-            <a:pPr algn="r"/>
-            <a:r>
-              <a:rPr sz="1000" b="0">
-                <a:solidFill>
-                  <a:srgbClr val="5A5A5A"/>
-                </a:solidFill>
-                <a:latin typeface="Calibri"/>
-              </a:rPr>
-              <a:t>9</a:t>
-            </a:r>
-          </a:p>
-        </p:txBody>
-      </p:sp>
-      <p:sp>
-        <p:nvSpPr>
-          <p:cNvPr id="8" name="TextBox 7"/>
-          <p:cNvSpPr txBox="1"/>
-          <p:nvPr/>
-        </p:nvSpPr>
-        <p:spPr>
-          <a:xfrm>
-            <a:off x="292608" y="1234440"/>
-            <a:ext cx="10881360" cy="3840480"/>
-          </a:xfrm>
-          <a:prstGeom prst="rect">
-            <a:avLst/>
-          </a:prstGeom>
-          <a:noFill/>
-        </p:spPr>
-        <p:txBody>
-          <a:bodyPr wrap="square">
-            <a:spAutoFit/>
-          </a:bodyPr>
-          <a:lstStyle/>
-          <a:p>
-            <a:pPr>
-              <a:lnSpc>
-                <a:spcPct val="125000"/>
-              </a:lnSpc>
-              <a:spcAft>
-                <a:spcPts val="1000"/>
-              </a:spcAft>
-            </a:pPr>
-            <a:r>
-              <a:rPr sz="1500" b="1">
-                <a:solidFill>
-                  <a:srgbClr val="CC0E1E"/>
-                </a:solidFill>
-                <a:latin typeface="Calibri"/>
-              </a:rPr>
-              <a:t>—  </a:t>
-            </a:r>
-            <a:r>
-              <a:rPr sz="1500">
-                <a:solidFill>
-                  <a:srgbClr val="1A1A1A"/>
-                </a:solidFill>
-                <a:latin typeface="Calibri"/>
-              </a:rPr>
-              <a:t>FY2026 Sales-to-Dealer is EUR 708,667 (working estimate).</a:t>
-            </a:r>
-          </a:p>
-          <a:p>
-            <a:pPr>
-              <a:lnSpc>
-                <a:spcPct val="125000"/>
-              </a:lnSpc>
-              <a:spcAft>
-                <a:spcPts val="1000"/>
-              </a:spcAft>
-            </a:pPr>
-            <a:r>
-              <a:rPr sz="1500" b="1">
-                <a:solidFill>
-                  <a:srgbClr val="CC0E1E"/>
-                </a:solidFill>
-                <a:latin typeface="Calibri"/>
-              </a:rPr>
-              <a:t>—  </a:t>
-            </a:r>
-            <a:r>
-              <a:rPr sz="1500">
-                <a:solidFill>
-                  <a:srgbClr val="1A1A1A"/>
-                </a:solidFill>
-                <a:latin typeface="Calibri"/>
-              </a:rPr>
-              <a:t>The working fleet movement into FY2027 is +5.1%.</a:t>
-            </a:r>
-          </a:p>
-          <a:p>
-            <a:pPr>
-              <a:lnSpc>
-                <a:spcPct val="125000"/>
-              </a:lnSpc>
-              <a:spcAft>
-                <a:spcPts val="1000"/>
-              </a:spcAft>
-            </a:pPr>
-            <a:r>
-              <a:rPr sz="1500" b="1">
-                <a:solidFill>
-                  <a:srgbClr val="CC0E1E"/>
-                </a:solidFill>
-                <a:latin typeface="Calibri"/>
-              </a:rPr>
-              <a:t>—  </a:t>
-            </a:r>
-            <a:r>
-              <a:rPr sz="1500">
-                <a:solidFill>
-                  <a:srgbClr val="1A1A1A"/>
-                </a:solidFill>
-                <a:latin typeface="Calibri"/>
-              </a:rPr>
-              <a:t>Applying fleet movement, the 5% price adjustment and 1.8% additional growth gives a FY2027 Sales-to-Dealer target of EUR 795,956.</a:t>
-            </a:r>
-          </a:p>
-          <a:p>
-            <a:pPr>
-              <a:lnSpc>
-                <a:spcPct val="125000"/>
-              </a:lnSpc>
-              <a:spcAft>
-                <a:spcPts val="1000"/>
-              </a:spcAft>
-            </a:pPr>
-            <a:r>
-              <a:rPr sz="1500" b="1">
-                <a:solidFill>
-                  <a:srgbClr val="CC0E1E"/>
-                </a:solidFill>
-                <a:latin typeface="Calibri"/>
-              </a:rPr>
-              <a:t>—  </a:t>
-            </a:r>
-            <a:r>
-              <a:rPr sz="1500">
-                <a:solidFill>
-                  <a:srgbClr val="1A1A1A"/>
-                </a:solidFill>
-                <a:latin typeface="Calibri"/>
-              </a:rPr>
-              <a:t>The discussion is held in Sales-to-Dealer amounts; ISZE billing remains an internal reconciliation measure.</a:t>
             </a:r>
           </a:p>
         </p:txBody>
